--- a/editable/1plus1-templates.pptx
+++ b/editable/1plus1-templates.pptx
@@ -9134,8 +9134,8 @@
         </p:blipFill>
         <p:spPr>
           <a:xfrm>
-            <a:off x="5761434" y="4953000"/>
-            <a:ext cx="4335065" cy="5334000"/>
+            <a:off x="4327326" y="2133600"/>
+            <a:ext cx="6626423" cy="8153400"/>
           </a:xfrm>
           <a:prstGeom prst="rect">
             <a:avLst/>
@@ -9233,8 +9233,8 @@
         </p:nvSpPr>
         <p:spPr>
           <a:xfrm>
-            <a:off x="914400" y="3204210"/>
-            <a:ext cx="9144000" cy="2560320"/>
+            <a:off x="914400" y="3203829"/>
+            <a:ext cx="9144000" cy="2258568"/>
           </a:xfrm>
           <a:prstGeom prst="rect">
             <a:avLst/>
@@ -9247,11 +9247,11 @@
           <a:p>
             <a:pPr algn="l">
               <a:lnSpc>
-                <a:spcPts val="5040"/>
+                <a:spcPts val="4446"/>
               </a:lnSpc>
             </a:pPr>
             <a:r>
-              <a:rPr b="0" sz="4500" spc="-90">
+              <a:rPr b="0" sz="3900" spc="-78">
                 <a:solidFill>
                   <a:srgbClr val="1C1A17"/>
                 </a:solidFill>
@@ -9263,7 +9263,7 @@
             </a:r>
             <a:br/>
             <a:r>
-              <a:rPr b="0" sz="4500" spc="-90">
+              <a:rPr b="0" sz="3900" spc="-78">
                 <a:solidFill>
                   <a:srgbClr val="1C1A17"/>
                 </a:solidFill>
@@ -9275,7 +9275,7 @@
             </a:r>
             <a:br/>
             <a:r>
-              <a:rPr b="0" sz="4500" spc="-90">
+              <a:rPr b="0" sz="3900" spc="-78">
                 <a:solidFill>
                   <a:srgbClr val="D73A61"/>
                 </a:solidFill>
@@ -9286,7 +9286,7 @@
               <a:t>сумма</a:t>
             </a:r>
             <a:r>
-              <a:rPr b="0" sz="4500" spc="-90">
+              <a:rPr b="0" sz="3900" spc="-78">
                 <a:solidFill>
                   <a:srgbClr val="1C1A17"/>
                 </a:solidFill>
@@ -9298,7 +9298,7 @@
             </a:r>
             <a:br/>
             <a:r>
-              <a:rPr b="0" sz="4500" spc="-90">
+              <a:rPr b="0" sz="3900" spc="-78">
                 <a:solidFill>
                   <a:srgbClr val="1C1A17"/>
                 </a:solidFill>

--- a/editable/1plus1-templates.pptx
+++ b/editable/1plus1-templates.pptx
@@ -6698,7 +6698,7 @@
 
 <file path=ppt/slides/slide17.xml><?xml version="1.0" encoding="utf-8"?>
 <p:sld xmlns:a="http://schemas.openxmlformats.org/drawingml/2006/main" xmlns:p="http://schemas.openxmlformats.org/presentationml/2006/main" xmlns:r="http://schemas.openxmlformats.org/officeDocument/2006/relationships">
-  <p:cSld name="U6-urgent-ticker-quiet">
+  <p:cSld name="U6-urgent-ticker-green">
     <p:spTree>
       <p:nvGrpSpPr>
         <p:cNvPr id="1" name=""/>
@@ -6732,7 +6732,7 @@
       </p:sp>
       <p:pic>
         <p:nvPicPr>
-          <p:cNvPr id="4" name="Фон (картинка, без текста)" descr="U6-urgent-ticker-quiet-bg.png"/>
+          <p:cNvPr id="4" name="Фон (картинка, без текста)" descr="U6-urgent-ticker-green-bg.png"/>
           <p:cNvPicPr>
             <a:picLocks noChangeAspect="1"/>
           </p:cNvPicPr>

--- a/editable/1plus1-templates.pptx
+++ b/editable/1plus1-templates.pptx
@@ -4,48 +4,52 @@
   <p:sldMasterIdLst>
     <p:sldMasterId id="2147483648" r:id="rId1"/>
   </p:sldMasterIdLst>
+  <p:notesMasterIdLst>
+    <p:notesMasterId r:id="rId15"/>
+  </p:notesMasterIdLst>
   <p:sldIdLst>
-    <p:sldId id="256" r:id="rId7"/>
-    <p:sldId id="257" r:id="rId9"/>
-    <p:sldId id="258" r:id="rId10"/>
-    <p:sldId id="259" r:id="rId11"/>
-    <p:sldId id="260" r:id="rId12"/>
-    <p:sldId id="261" r:id="rId13"/>
-    <p:sldId id="262" r:id="rId14"/>
-    <p:sldId id="263" r:id="rId15"/>
-    <p:sldId id="264" r:id="rId16"/>
-    <p:sldId id="265" r:id="rId17"/>
-    <p:sldId id="266" r:id="rId18"/>
-    <p:sldId id="267" r:id="rId19"/>
-    <p:sldId id="268" r:id="rId20"/>
-    <p:sldId id="269" r:id="rId21"/>
-    <p:sldId id="270" r:id="rId22"/>
-    <p:sldId id="271" r:id="rId23"/>
-    <p:sldId id="272" r:id="rId24"/>
+    <p:sldId id="256" r:id="rId2"/>
+    <p:sldId id="257" r:id="rId3"/>
+    <p:sldId id="258" r:id="rId4"/>
+    <p:sldId id="259" r:id="rId5"/>
+    <p:sldId id="260" r:id="rId6"/>
+    <p:sldId id="262" r:id="rId7"/>
+    <p:sldId id="263" r:id="rId8"/>
+    <p:sldId id="264" r:id="rId9"/>
+    <p:sldId id="265" r:id="rId10"/>
+    <p:sldId id="268" r:id="rId11"/>
+    <p:sldId id="269" r:id="rId12"/>
+    <p:sldId id="271" r:id="rId13"/>
+    <p:sldId id="272" r:id="rId14"/>
   </p:sldIdLst>
-  <p:sldSz cx="10287000" cy="10287000" type="screen4x3"/>
+  <p:sldSz cx="10287000" cy="10287000"/>
   <p:notesSz cx="6858000" cy="9144000"/>
   <p:embeddedFontLst>
     <p:embeddedFont>
-      <p:font typeface="Gilroy Light"/>
-      <p:regular r:id="rIdFont1"/>
+      <p:font typeface="Gilroy SemiBold" charset="-52"/>
+      <p:regular r:id="rId16"/>
     </p:embeddedFont>
     <p:embeddedFont>
-      <p:font typeface="Gilroy"/>
-      <p:regular r:id="rIdFont2"/>
-      <p:bold r:id="rIdFont3"/>
+      <p:font typeface="Gilroy ExtraBold" charset="-52"/>
+      <p:regular r:id="rId17"/>
     </p:embeddedFont>
     <p:embeddedFont>
-      <p:font typeface="Gilroy Medium"/>
-      <p:regular r:id="rIdFont4"/>
+      <p:font typeface="Gilroy Medium" charset="-52"/>
+      <p:regular r:id="rId18"/>
     </p:embeddedFont>
     <p:embeddedFont>
-      <p:font typeface="Gilroy SemiBold"/>
-      <p:regular r:id="rIdFont5"/>
+      <p:font typeface="Gilroy" pitchFamily="2" charset="-52"/>
+      <p:regular r:id="rId19"/>
+      <p:bold r:id="rId20"/>
+      <p:italic r:id="rId21"/>
+      <p:boldItalic r:id="rId22"/>
     </p:embeddedFont>
     <p:embeddedFont>
-      <p:font typeface="Gilroy ExtraBold"/>
-      <p:regular r:id="rIdFont6"/>
+      <p:font typeface="Calibri" pitchFamily="34" charset="0"/>
+      <p:regular r:id="rId23"/>
+      <p:bold r:id="rId24"/>
+      <p:italic r:id="rId25"/>
+      <p:boldItalic r:id="rId26"/>
     </p:embeddedFont>
   </p:embeddedFontLst>
   <p:defaultTextStyle>
@@ -147,7 +151,7 @@
 </file>
 
 <file path=ppt/notesMasters/notesMaster1.xml><?xml version="1.0" encoding="utf-8"?>
-<p:notesMaster xmlns:a="http://schemas.openxmlformats.org/drawingml/2006/main" xmlns:p="http://schemas.openxmlformats.org/presentationml/2006/main" xmlns:r="http://schemas.openxmlformats.org/officeDocument/2006/relationships">
+<p:notesMaster xmlns:a="http://schemas.openxmlformats.org/drawingml/2006/main" xmlns:r="http://schemas.openxmlformats.org/officeDocument/2006/relationships" xmlns:p="http://schemas.openxmlformats.org/presentationml/2006/main">
   <p:cSld>
     <p:bg>
       <p:bgRef idx="1001">
@@ -170,7 +174,7 @@
       </p:grpSpPr>
       <p:sp>
         <p:nvSpPr>
-          <p:cNvPr id="2" name="Header Placeholder 1"/>
+          <p:cNvPr id="2" name="Верхний колонтитул 1"/>
           <p:cNvSpPr>
             <a:spLocks noGrp="1"/>
           </p:cNvSpPr>
@@ -195,13 +199,13 @@
             </a:lvl1pPr>
           </a:lstStyle>
           <a:p>
-            <a:endParaRPr lang="en-US"/>
-          </a:p>
-        </p:txBody>
-      </p:sp>
-      <p:sp>
-        <p:nvSpPr>
-          <p:cNvPr id="3" name="Date Placeholder 2"/>
+            <a:endParaRPr lang="ru-RU"/>
+          </a:p>
+        </p:txBody>
+      </p:sp>
+      <p:sp>
+        <p:nvSpPr>
+          <p:cNvPr id="3" name="Дата 2"/>
           <p:cNvSpPr>
             <a:spLocks noGrp="1"/>
           </p:cNvSpPr>
@@ -226,17 +230,17 @@
             </a:lvl1pPr>
           </a:lstStyle>
           <a:p>
-            <a:fld id="{0F89C1C7-3DCD-1040-A9CF-14679D8B5DDD}" type="datetimeFigureOut">
-              <a:rPr lang="en-US" smtClean="0"/>
-              <a:t>10/17/16</a:t>
+            <a:fld id="{E51CFBC3-C573-41FD-9F4E-C340CD8BC534}" type="datetimeFigureOut">
+              <a:rPr lang="ru-RU" smtClean="0"/>
+              <a:t>15.10.2026</a:t>
             </a:fld>
-            <a:endParaRPr lang="en-US"/>
-          </a:p>
-        </p:txBody>
-      </p:sp>
-      <p:sp>
-        <p:nvSpPr>
-          <p:cNvPr id="4" name="Slide Image Placeholder 3"/>
+            <a:endParaRPr lang="ru-RU"/>
+          </a:p>
+        </p:txBody>
+      </p:sp>
+      <p:sp>
+        <p:nvSpPr>
+          <p:cNvPr id="4" name="Образ слайда 3"/>
           <p:cNvSpPr>
             <a:spLocks noGrp="1" noRot="1" noChangeAspect="1"/>
           </p:cNvSpPr>
@@ -246,8 +250,8 @@
         </p:nvSpPr>
         <p:spPr>
           <a:xfrm>
-            <a:off x="1143000" y="685800"/>
-            <a:ext cx="4572000" cy="3429000"/>
+            <a:off x="1714500" y="685800"/>
+            <a:ext cx="3429000" cy="3429000"/>
           </a:xfrm>
           <a:prstGeom prst="rect">
             <a:avLst/>
@@ -263,13 +267,13 @@
           <a:bodyPr vert="horz" lIns="91440" tIns="45720" rIns="91440" bIns="45720" rtlCol="0" anchor="ctr"/>
           <a:lstStyle/>
           <a:p>
-            <a:endParaRPr lang="en-US"/>
-          </a:p>
-        </p:txBody>
-      </p:sp>
-      <p:sp>
-        <p:nvSpPr>
-          <p:cNvPr id="5" name="Notes Placeholder 4"/>
+            <a:endParaRPr lang="ru-RU"/>
+          </a:p>
+        </p:txBody>
+      </p:sp>
+      <p:sp>
+        <p:nvSpPr>
+          <p:cNvPr id="5" name="Заметки 4"/>
           <p:cNvSpPr>
             <a:spLocks noGrp="1"/>
           </p:cNvSpPr>
@@ -292,44 +296,44 @@
           <a:p>
             <a:pPr lvl="0"/>
             <a:r>
-              <a:rPr lang="en-US" smtClean="0"/>
-              <a:t>Click to edit Master text styles</a:t>
+              <a:rPr lang="ru-RU" smtClean="0"/>
+              <a:t>Образец текста</a:t>
             </a:r>
           </a:p>
           <a:p>
             <a:pPr lvl="1"/>
             <a:r>
-              <a:rPr lang="en-US" smtClean="0"/>
-              <a:t>Second level</a:t>
+              <a:rPr lang="ru-RU" smtClean="0"/>
+              <a:t>Второй уровень</a:t>
             </a:r>
           </a:p>
           <a:p>
             <a:pPr lvl="2"/>
             <a:r>
-              <a:rPr lang="en-US" smtClean="0"/>
-              <a:t>Third level</a:t>
+              <a:rPr lang="ru-RU" smtClean="0"/>
+              <a:t>Третий уровень</a:t>
             </a:r>
           </a:p>
           <a:p>
             <a:pPr lvl="3"/>
             <a:r>
-              <a:rPr lang="en-US" smtClean="0"/>
-              <a:t>Fourth level</a:t>
+              <a:rPr lang="ru-RU" smtClean="0"/>
+              <a:t>Четвертый уровень</a:t>
             </a:r>
           </a:p>
           <a:p>
             <a:pPr lvl="4"/>
             <a:r>
-              <a:rPr lang="en-US" smtClean="0"/>
-              <a:t>Fifth level</a:t>
-            </a:r>
-            <a:endParaRPr lang="en-US"/>
-          </a:p>
-        </p:txBody>
-      </p:sp>
-      <p:sp>
-        <p:nvSpPr>
-          <p:cNvPr id="6" name="Footer Placeholder 5"/>
+              <a:rPr lang="ru-RU" smtClean="0"/>
+              <a:t>Пятый уровень</a:t>
+            </a:r>
+            <a:endParaRPr lang="ru-RU"/>
+          </a:p>
+        </p:txBody>
+      </p:sp>
+      <p:sp>
+        <p:nvSpPr>
+          <p:cNvPr id="6" name="Нижний колонтитул 5"/>
           <p:cNvSpPr>
             <a:spLocks noGrp="1"/>
           </p:cNvSpPr>
@@ -354,13 +358,13 @@
             </a:lvl1pPr>
           </a:lstStyle>
           <a:p>
-            <a:endParaRPr lang="en-US"/>
-          </a:p>
-        </p:txBody>
-      </p:sp>
-      <p:sp>
-        <p:nvSpPr>
-          <p:cNvPr id="7" name="Slide Number Placeholder 6"/>
+            <a:endParaRPr lang="ru-RU"/>
+          </a:p>
+        </p:txBody>
+      </p:sp>
+      <p:sp>
+        <p:nvSpPr>
+          <p:cNvPr id="7" name="Номер слайда 6"/>
           <p:cNvSpPr>
             <a:spLocks noGrp="1"/>
           </p:cNvSpPr>
@@ -385,24 +389,24 @@
             </a:lvl1pPr>
           </a:lstStyle>
           <a:p>
-            <a:fld id="{BB5E49A5-4136-284D-997B-48E1D791AD67}" type="slidenum">
-              <a:rPr lang="en-US" smtClean="0"/>
+            <a:fld id="{6E450B00-1EBA-496C-B837-46BC82CDD146}" type="slidenum">
+              <a:rPr lang="ru-RU" smtClean="0"/>
               <a:t>‹#›</a:t>
             </a:fld>
-            <a:endParaRPr lang="en-US"/>
+            <a:endParaRPr lang="ru-RU"/>
           </a:p>
         </p:txBody>
       </p:sp>
     </p:spTree>
     <p:extLst>
       <p:ext uri="{BB962C8B-B14F-4D97-AF65-F5344CB8AC3E}">
-        <p14:creationId xmlns:p14="http://schemas.microsoft.com/office/powerpoint/2010/main" val="2623252185"/>
+        <p14:creationId xmlns:p14="http://schemas.microsoft.com/office/powerpoint/2010/main" val="3374818684"/>
       </p:ext>
     </p:extLst>
   </p:cSld>
   <p:clrMap bg1="lt1" tx1="dk1" bg2="lt2" tx2="dk2" accent1="accent1" accent2="accent2" accent3="accent3" accent4="accent4" accent5="accent5" accent6="accent6" hlink="hlink" folHlink="folHlink"/>
   <p:notesStyle>
-    <a:lvl1pPr marL="0" algn="l" defTabSz="457200" rtl="0" eaLnBrk="1" latinLnBrk="0" hangingPunct="1">
+    <a:lvl1pPr marL="0" algn="l" defTabSz="914400" rtl="0" eaLnBrk="1" latinLnBrk="0" hangingPunct="1">
       <a:defRPr sz="1200" kern="1200">
         <a:solidFill>
           <a:schemeClr val="tx1"/>
@@ -412,7 +416,7 @@
         <a:cs typeface="+mn-cs"/>
       </a:defRPr>
     </a:lvl1pPr>
-    <a:lvl2pPr marL="457200" algn="l" defTabSz="457200" rtl="0" eaLnBrk="1" latinLnBrk="0" hangingPunct="1">
+    <a:lvl2pPr marL="457200" algn="l" defTabSz="914400" rtl="0" eaLnBrk="1" latinLnBrk="0" hangingPunct="1">
       <a:defRPr sz="1200" kern="1200">
         <a:solidFill>
           <a:schemeClr val="tx1"/>
@@ -422,7 +426,7 @@
         <a:cs typeface="+mn-cs"/>
       </a:defRPr>
     </a:lvl2pPr>
-    <a:lvl3pPr marL="914400" algn="l" defTabSz="457200" rtl="0" eaLnBrk="1" latinLnBrk="0" hangingPunct="1">
+    <a:lvl3pPr marL="914400" algn="l" defTabSz="914400" rtl="0" eaLnBrk="1" latinLnBrk="0" hangingPunct="1">
       <a:defRPr sz="1200" kern="1200">
         <a:solidFill>
           <a:schemeClr val="tx1"/>
@@ -432,7 +436,7 @@
         <a:cs typeface="+mn-cs"/>
       </a:defRPr>
     </a:lvl3pPr>
-    <a:lvl4pPr marL="1371600" algn="l" defTabSz="457200" rtl="0" eaLnBrk="1" latinLnBrk="0" hangingPunct="1">
+    <a:lvl4pPr marL="1371600" algn="l" defTabSz="914400" rtl="0" eaLnBrk="1" latinLnBrk="0" hangingPunct="1">
       <a:defRPr sz="1200" kern="1200">
         <a:solidFill>
           <a:schemeClr val="tx1"/>
@@ -442,7 +446,7 @@
         <a:cs typeface="+mn-cs"/>
       </a:defRPr>
     </a:lvl4pPr>
-    <a:lvl5pPr marL="1828800" algn="l" defTabSz="457200" rtl="0" eaLnBrk="1" latinLnBrk="0" hangingPunct="1">
+    <a:lvl5pPr marL="1828800" algn="l" defTabSz="914400" rtl="0" eaLnBrk="1" latinLnBrk="0" hangingPunct="1">
       <a:defRPr sz="1200" kern="1200">
         <a:solidFill>
           <a:schemeClr val="tx1"/>
@@ -452,7 +456,7 @@
         <a:cs typeface="+mn-cs"/>
       </a:defRPr>
     </a:lvl5pPr>
-    <a:lvl6pPr marL="2286000" algn="l" defTabSz="457200" rtl="0" eaLnBrk="1" latinLnBrk="0" hangingPunct="1">
+    <a:lvl6pPr marL="2286000" algn="l" defTabSz="914400" rtl="0" eaLnBrk="1" latinLnBrk="0" hangingPunct="1">
       <a:defRPr sz="1200" kern="1200">
         <a:solidFill>
           <a:schemeClr val="tx1"/>
@@ -462,7 +466,7 @@
         <a:cs typeface="+mn-cs"/>
       </a:defRPr>
     </a:lvl6pPr>
-    <a:lvl7pPr marL="2743200" algn="l" defTabSz="457200" rtl="0" eaLnBrk="1" latinLnBrk="0" hangingPunct="1">
+    <a:lvl7pPr marL="2743200" algn="l" defTabSz="914400" rtl="0" eaLnBrk="1" latinLnBrk="0" hangingPunct="1">
       <a:defRPr sz="1200" kern="1200">
         <a:solidFill>
           <a:schemeClr val="tx1"/>
@@ -472,7 +476,7 @@
         <a:cs typeface="+mn-cs"/>
       </a:defRPr>
     </a:lvl7pPr>
-    <a:lvl8pPr marL="3200400" algn="l" defTabSz="457200" rtl="0" eaLnBrk="1" latinLnBrk="0" hangingPunct="1">
+    <a:lvl8pPr marL="3200400" algn="l" defTabSz="914400" rtl="0" eaLnBrk="1" latinLnBrk="0" hangingPunct="1">
       <a:defRPr sz="1200" kern="1200">
         <a:solidFill>
           <a:schemeClr val="tx1"/>
@@ -482,7 +486,7 @@
         <a:cs typeface="+mn-cs"/>
       </a:defRPr>
     </a:lvl8pPr>
-    <a:lvl9pPr marL="3657600" algn="l" defTabSz="457200" rtl="0" eaLnBrk="1" latinLnBrk="0" hangingPunct="1">
+    <a:lvl9pPr marL="3657600" algn="l" defTabSz="914400" rtl="0" eaLnBrk="1" latinLnBrk="0" hangingPunct="1">
       <a:defRPr sz="1200" kern="1200">
         <a:solidFill>
           <a:schemeClr val="tx1"/>
@@ -497,7 +501,7 @@
 </file>
 
 <file path=ppt/notesSlides/notesSlide1.xml><?xml version="1.0" encoding="utf-8"?>
-<p:notes xmlns:a="http://schemas.openxmlformats.org/drawingml/2006/main" xmlns:p="http://schemas.openxmlformats.org/presentationml/2006/main" xmlns:r="http://schemas.openxmlformats.org/officeDocument/2006/relationships">
+<p:notes xmlns:a="http://schemas.openxmlformats.org/drawingml/2006/main" xmlns:r="http://schemas.openxmlformats.org/officeDocument/2006/relationships" xmlns:p="http://schemas.openxmlformats.org/presentationml/2006/main">
   <p:cSld>
     <p:spTree>
       <p:nvGrpSpPr>
@@ -517,7 +521,7 @@
         <p:nvSpPr>
           <p:cNvPr id="2" name="Slide Image Placeholder 1"/>
           <p:cNvSpPr>
-            <a:spLocks noGrp="1"/>
+            <a:spLocks noGrp="1" noRot="1" noChangeAspect="1"/>
           </p:cNvSpPr>
           <p:nvPr>
             <p:ph type="sldImg" idx="2"/>
@@ -532,7 +536,7 @@
             <a:spLocks noGrp="1"/>
           </p:cNvSpPr>
           <p:nvPr>
-            <p:ph type="body" idx="3" sz="quarter"/>
+            <p:ph type="body" sz="quarter" idx="3"/>
           </p:nvPr>
         </p:nvSpPr>
         <p:spPr/>
@@ -553,7 +557,7 @@
             <a:spLocks noGrp="1"/>
           </p:cNvSpPr>
           <p:nvPr>
-            <p:ph type="sldNum" idx="5" sz="quarter"/>
+            <p:ph type="sldNum" sz="quarter" idx="5"/>
           </p:nvPr>
         </p:nvSpPr>
         <p:spPr/>
@@ -567,7 +571,7 @@
 </file>
 
 <file path=ppt/notesSlides/notesSlide10.xml><?xml version="1.0" encoding="utf-8"?>
-<p:notes xmlns:a="http://schemas.openxmlformats.org/drawingml/2006/main" xmlns:p="http://schemas.openxmlformats.org/presentationml/2006/main" xmlns:r="http://schemas.openxmlformats.org/officeDocument/2006/relationships">
+<p:notes xmlns:a="http://schemas.openxmlformats.org/drawingml/2006/main" xmlns:r="http://schemas.openxmlformats.org/officeDocument/2006/relationships" xmlns:p="http://schemas.openxmlformats.org/presentationml/2006/main">
   <p:cSld>
     <p:spTree>
       <p:nvGrpSpPr>
@@ -587,7 +591,7 @@
         <p:nvSpPr>
           <p:cNvPr id="2" name="Slide Image Placeholder 1"/>
           <p:cNvSpPr>
-            <a:spLocks noGrp="1"/>
+            <a:spLocks noGrp="1" noRot="1" noChangeAspect="1"/>
           </p:cNvSpPr>
           <p:nvPr>
             <p:ph type="sldImg" idx="2"/>
@@ -602,7 +606,7 @@
             <a:spLocks noGrp="1"/>
           </p:cNvSpPr>
           <p:nvPr>
-            <p:ph type="body" idx="3" sz="quarter"/>
+            <p:ph type="body" sz="quarter" idx="3"/>
           </p:nvPr>
         </p:nvSpPr>
         <p:spPr/>
@@ -623,7 +627,7 @@
             <a:spLocks noGrp="1"/>
           </p:cNvSpPr>
           <p:nvPr>
-            <p:ph type="sldNum" idx="5" sz="quarter"/>
+            <p:ph type="sldNum" sz="quarter" idx="5"/>
           </p:nvPr>
         </p:nvSpPr>
         <p:spPr/>
@@ -637,7 +641,7 @@
 </file>
 
 <file path=ppt/notesSlides/notesSlide11.xml><?xml version="1.0" encoding="utf-8"?>
-<p:notes xmlns:a="http://schemas.openxmlformats.org/drawingml/2006/main" xmlns:p="http://schemas.openxmlformats.org/presentationml/2006/main" xmlns:r="http://schemas.openxmlformats.org/officeDocument/2006/relationships">
+<p:notes xmlns:a="http://schemas.openxmlformats.org/drawingml/2006/main" xmlns:r="http://schemas.openxmlformats.org/officeDocument/2006/relationships" xmlns:p="http://schemas.openxmlformats.org/presentationml/2006/main">
   <p:cSld>
     <p:spTree>
       <p:nvGrpSpPr>
@@ -657,7 +661,7 @@
         <p:nvSpPr>
           <p:cNvPr id="2" name="Slide Image Placeholder 1"/>
           <p:cNvSpPr>
-            <a:spLocks noGrp="1"/>
+            <a:spLocks noGrp="1" noRot="1" noChangeAspect="1"/>
           </p:cNvSpPr>
           <p:nvPr>
             <p:ph type="sldImg" idx="2"/>
@@ -672,7 +676,7 @@
             <a:spLocks noGrp="1"/>
           </p:cNvSpPr>
           <p:nvPr>
-            <p:ph type="body" idx="3" sz="quarter"/>
+            <p:ph type="body" sz="quarter" idx="3"/>
           </p:nvPr>
         </p:nvSpPr>
         <p:spPr/>
@@ -693,7 +697,7 @@
             <a:spLocks noGrp="1"/>
           </p:cNvSpPr>
           <p:nvPr>
-            <p:ph type="sldNum" idx="5" sz="quarter"/>
+            <p:ph type="sldNum" sz="quarter" idx="5"/>
           </p:nvPr>
         </p:nvSpPr>
         <p:spPr/>
@@ -707,7 +711,7 @@
 </file>
 
 <file path=ppt/notesSlides/notesSlide12.xml><?xml version="1.0" encoding="utf-8"?>
-<p:notes xmlns:a="http://schemas.openxmlformats.org/drawingml/2006/main" xmlns:p="http://schemas.openxmlformats.org/presentationml/2006/main" xmlns:r="http://schemas.openxmlformats.org/officeDocument/2006/relationships">
+<p:notes xmlns:a="http://schemas.openxmlformats.org/drawingml/2006/main" xmlns:r="http://schemas.openxmlformats.org/officeDocument/2006/relationships" xmlns:p="http://schemas.openxmlformats.org/presentationml/2006/main">
   <p:cSld>
     <p:spTree>
       <p:nvGrpSpPr>
@@ -727,7 +731,7 @@
         <p:nvSpPr>
           <p:cNvPr id="2" name="Slide Image Placeholder 1"/>
           <p:cNvSpPr>
-            <a:spLocks noGrp="1"/>
+            <a:spLocks noGrp="1" noRot="1" noChangeAspect="1"/>
           </p:cNvSpPr>
           <p:nvPr>
             <p:ph type="sldImg" idx="2"/>
@@ -742,7 +746,7 @@
             <a:spLocks noGrp="1"/>
           </p:cNvSpPr>
           <p:nvPr>
-            <p:ph type="body" idx="3" sz="quarter"/>
+            <p:ph type="body" sz="quarter" idx="3"/>
           </p:nvPr>
         </p:nvSpPr>
         <p:spPr/>
@@ -763,7 +767,7 @@
             <a:spLocks noGrp="1"/>
           </p:cNvSpPr>
           <p:nvPr>
-            <p:ph type="sldNum" idx="5" sz="quarter"/>
+            <p:ph type="sldNum" sz="quarter" idx="5"/>
           </p:nvPr>
         </p:nvSpPr>
         <p:spPr/>
@@ -777,7 +781,7 @@
 </file>
 
 <file path=ppt/notesSlides/notesSlide13.xml><?xml version="1.0" encoding="utf-8"?>
-<p:notes xmlns:a="http://schemas.openxmlformats.org/drawingml/2006/main" xmlns:p="http://schemas.openxmlformats.org/presentationml/2006/main" xmlns:r="http://schemas.openxmlformats.org/officeDocument/2006/relationships">
+<p:notes xmlns:a="http://schemas.openxmlformats.org/drawingml/2006/main" xmlns:r="http://schemas.openxmlformats.org/officeDocument/2006/relationships" xmlns:p="http://schemas.openxmlformats.org/presentationml/2006/main">
   <p:cSld>
     <p:spTree>
       <p:nvGrpSpPr>
@@ -797,7 +801,7 @@
         <p:nvSpPr>
           <p:cNvPr id="2" name="Slide Image Placeholder 1"/>
           <p:cNvSpPr>
-            <a:spLocks noGrp="1"/>
+            <a:spLocks noGrp="1" noRot="1" noChangeAspect="1"/>
           </p:cNvSpPr>
           <p:nvPr>
             <p:ph type="sldImg" idx="2"/>
@@ -812,7 +816,7 @@
             <a:spLocks noGrp="1"/>
           </p:cNvSpPr>
           <p:nvPr>
-            <p:ph type="body" idx="3" sz="quarter"/>
+            <p:ph type="body" sz="quarter" idx="3"/>
           </p:nvPr>
         </p:nvSpPr>
         <p:spPr/>
@@ -833,7 +837,7 @@
             <a:spLocks noGrp="1"/>
           </p:cNvSpPr>
           <p:nvPr>
-            <p:ph type="sldNum" idx="5" sz="quarter"/>
+            <p:ph type="sldNum" sz="quarter" idx="5"/>
           </p:nvPr>
         </p:nvSpPr>
         <p:spPr/>
@@ -846,8 +850,8 @@
 </p:notes>
 </file>
 
-<file path=ppt/notesSlides/notesSlide14.xml><?xml version="1.0" encoding="utf-8"?>
-<p:notes xmlns:a="http://schemas.openxmlformats.org/drawingml/2006/main" xmlns:p="http://schemas.openxmlformats.org/presentationml/2006/main" xmlns:r="http://schemas.openxmlformats.org/officeDocument/2006/relationships">
+<file path=ppt/notesSlides/notesSlide2.xml><?xml version="1.0" encoding="utf-8"?>
+<p:notes xmlns:a="http://schemas.openxmlformats.org/drawingml/2006/main" xmlns:r="http://schemas.openxmlformats.org/officeDocument/2006/relationships" xmlns:p="http://schemas.openxmlformats.org/presentationml/2006/main">
   <p:cSld>
     <p:spTree>
       <p:nvGrpSpPr>
@@ -867,7 +871,7 @@
         <p:nvSpPr>
           <p:cNvPr id="2" name="Slide Image Placeholder 1"/>
           <p:cNvSpPr>
-            <a:spLocks noGrp="1"/>
+            <a:spLocks noGrp="1" noRot="1" noChangeAspect="1"/>
           </p:cNvSpPr>
           <p:nvPr>
             <p:ph type="sldImg" idx="2"/>
@@ -882,7 +886,7 @@
             <a:spLocks noGrp="1"/>
           </p:cNvSpPr>
           <p:nvPr>
-            <p:ph type="body" idx="3" sz="quarter"/>
+            <p:ph type="body" sz="quarter" idx="3"/>
           </p:nvPr>
         </p:nvSpPr>
         <p:spPr/>
@@ -903,7 +907,7 @@
             <a:spLocks noGrp="1"/>
           </p:cNvSpPr>
           <p:nvPr>
-            <p:ph type="sldNum" idx="5" sz="quarter"/>
+            <p:ph type="sldNum" sz="quarter" idx="5"/>
           </p:nvPr>
         </p:nvSpPr>
         <p:spPr/>
@@ -916,8 +920,8 @@
 </p:notes>
 </file>
 
-<file path=ppt/notesSlides/notesSlide15.xml><?xml version="1.0" encoding="utf-8"?>
-<p:notes xmlns:a="http://schemas.openxmlformats.org/drawingml/2006/main" xmlns:p="http://schemas.openxmlformats.org/presentationml/2006/main" xmlns:r="http://schemas.openxmlformats.org/officeDocument/2006/relationships">
+<file path=ppt/notesSlides/notesSlide3.xml><?xml version="1.0" encoding="utf-8"?>
+<p:notes xmlns:a="http://schemas.openxmlformats.org/drawingml/2006/main" xmlns:r="http://schemas.openxmlformats.org/officeDocument/2006/relationships" xmlns:p="http://schemas.openxmlformats.org/presentationml/2006/main">
   <p:cSld>
     <p:spTree>
       <p:nvGrpSpPr>
@@ -937,7 +941,7 @@
         <p:nvSpPr>
           <p:cNvPr id="2" name="Slide Image Placeholder 1"/>
           <p:cNvSpPr>
-            <a:spLocks noGrp="1"/>
+            <a:spLocks noGrp="1" noRot="1" noChangeAspect="1"/>
           </p:cNvSpPr>
           <p:nvPr>
             <p:ph type="sldImg" idx="2"/>
@@ -952,7 +956,7 @@
             <a:spLocks noGrp="1"/>
           </p:cNvSpPr>
           <p:nvPr>
-            <p:ph type="body" idx="3" sz="quarter"/>
+            <p:ph type="body" sz="quarter" idx="3"/>
           </p:nvPr>
         </p:nvSpPr>
         <p:spPr/>
@@ -973,7 +977,7 @@
             <a:spLocks noGrp="1"/>
           </p:cNvSpPr>
           <p:nvPr>
-            <p:ph type="sldNum" idx="5" sz="quarter"/>
+            <p:ph type="sldNum" sz="quarter" idx="5"/>
           </p:nvPr>
         </p:nvSpPr>
         <p:spPr/>
@@ -986,8 +990,8 @@
 </p:notes>
 </file>
 
-<file path=ppt/notesSlides/notesSlide16.xml><?xml version="1.0" encoding="utf-8"?>
-<p:notes xmlns:a="http://schemas.openxmlformats.org/drawingml/2006/main" xmlns:p="http://schemas.openxmlformats.org/presentationml/2006/main" xmlns:r="http://schemas.openxmlformats.org/officeDocument/2006/relationships">
+<file path=ppt/notesSlides/notesSlide4.xml><?xml version="1.0" encoding="utf-8"?>
+<p:notes xmlns:a="http://schemas.openxmlformats.org/drawingml/2006/main" xmlns:r="http://schemas.openxmlformats.org/officeDocument/2006/relationships" xmlns:p="http://schemas.openxmlformats.org/presentationml/2006/main">
   <p:cSld>
     <p:spTree>
       <p:nvGrpSpPr>
@@ -1007,7 +1011,7 @@
         <p:nvSpPr>
           <p:cNvPr id="2" name="Slide Image Placeholder 1"/>
           <p:cNvSpPr>
-            <a:spLocks noGrp="1"/>
+            <a:spLocks noGrp="1" noRot="1" noChangeAspect="1"/>
           </p:cNvSpPr>
           <p:nvPr>
             <p:ph type="sldImg" idx="2"/>
@@ -1022,7 +1026,7 @@
             <a:spLocks noGrp="1"/>
           </p:cNvSpPr>
           <p:nvPr>
-            <p:ph type="body" idx="3" sz="quarter"/>
+            <p:ph type="body" sz="quarter" idx="3"/>
           </p:nvPr>
         </p:nvSpPr>
         <p:spPr/>
@@ -1043,7 +1047,7 @@
             <a:spLocks noGrp="1"/>
           </p:cNvSpPr>
           <p:nvPr>
-            <p:ph type="sldNum" idx="5" sz="quarter"/>
+            <p:ph type="sldNum" sz="quarter" idx="5"/>
           </p:nvPr>
         </p:nvSpPr>
         <p:spPr/>
@@ -1056,8 +1060,8 @@
 </p:notes>
 </file>
 
-<file path=ppt/notesSlides/notesSlide17.xml><?xml version="1.0" encoding="utf-8"?>
-<p:notes xmlns:a="http://schemas.openxmlformats.org/drawingml/2006/main" xmlns:p="http://schemas.openxmlformats.org/presentationml/2006/main" xmlns:r="http://schemas.openxmlformats.org/officeDocument/2006/relationships">
+<file path=ppt/notesSlides/notesSlide5.xml><?xml version="1.0" encoding="utf-8"?>
+<p:notes xmlns:a="http://schemas.openxmlformats.org/drawingml/2006/main" xmlns:r="http://schemas.openxmlformats.org/officeDocument/2006/relationships" xmlns:p="http://schemas.openxmlformats.org/presentationml/2006/main">
   <p:cSld>
     <p:spTree>
       <p:nvGrpSpPr>
@@ -1077,7 +1081,7 @@
         <p:nvSpPr>
           <p:cNvPr id="2" name="Slide Image Placeholder 1"/>
           <p:cNvSpPr>
-            <a:spLocks noGrp="1"/>
+            <a:spLocks noGrp="1" noRot="1" noChangeAspect="1"/>
           </p:cNvSpPr>
           <p:nvPr>
             <p:ph type="sldImg" idx="2"/>
@@ -1092,7 +1096,7 @@
             <a:spLocks noGrp="1"/>
           </p:cNvSpPr>
           <p:nvPr>
-            <p:ph type="body" idx="3" sz="quarter"/>
+            <p:ph type="body" sz="quarter" idx="3"/>
           </p:nvPr>
         </p:nvSpPr>
         <p:spPr/>
@@ -1113,7 +1117,7 @@
             <a:spLocks noGrp="1"/>
           </p:cNvSpPr>
           <p:nvPr>
-            <p:ph type="sldNum" idx="5" sz="quarter"/>
+            <p:ph type="sldNum" sz="quarter" idx="5"/>
           </p:nvPr>
         </p:nvSpPr>
         <p:spPr/>
@@ -1126,8 +1130,8 @@
 </p:notes>
 </file>
 
-<file path=ppt/notesSlides/notesSlide2.xml><?xml version="1.0" encoding="utf-8"?>
-<p:notes xmlns:a="http://schemas.openxmlformats.org/drawingml/2006/main" xmlns:p="http://schemas.openxmlformats.org/presentationml/2006/main" xmlns:r="http://schemas.openxmlformats.org/officeDocument/2006/relationships">
+<file path=ppt/notesSlides/notesSlide6.xml><?xml version="1.0" encoding="utf-8"?>
+<p:notes xmlns:a="http://schemas.openxmlformats.org/drawingml/2006/main" xmlns:r="http://schemas.openxmlformats.org/officeDocument/2006/relationships" xmlns:p="http://schemas.openxmlformats.org/presentationml/2006/main">
   <p:cSld>
     <p:spTree>
       <p:nvGrpSpPr>
@@ -1147,7 +1151,7 @@
         <p:nvSpPr>
           <p:cNvPr id="2" name="Slide Image Placeholder 1"/>
           <p:cNvSpPr>
-            <a:spLocks noGrp="1"/>
+            <a:spLocks noGrp="1" noRot="1" noChangeAspect="1"/>
           </p:cNvSpPr>
           <p:nvPr>
             <p:ph type="sldImg" idx="2"/>
@@ -1162,7 +1166,7 @@
             <a:spLocks noGrp="1"/>
           </p:cNvSpPr>
           <p:nvPr>
-            <p:ph type="body" idx="3" sz="quarter"/>
+            <p:ph type="body" sz="quarter" idx="3"/>
           </p:nvPr>
         </p:nvSpPr>
         <p:spPr/>
@@ -1183,7 +1187,7 @@
             <a:spLocks noGrp="1"/>
           </p:cNvSpPr>
           <p:nvPr>
-            <p:ph type="sldNum" idx="5" sz="quarter"/>
+            <p:ph type="sldNum" sz="quarter" idx="5"/>
           </p:nvPr>
         </p:nvSpPr>
         <p:spPr/>
@@ -1196,8 +1200,8 @@
 </p:notes>
 </file>
 
-<file path=ppt/notesSlides/notesSlide3.xml><?xml version="1.0" encoding="utf-8"?>
-<p:notes xmlns:a="http://schemas.openxmlformats.org/drawingml/2006/main" xmlns:p="http://schemas.openxmlformats.org/presentationml/2006/main" xmlns:r="http://schemas.openxmlformats.org/officeDocument/2006/relationships">
+<file path=ppt/notesSlides/notesSlide7.xml><?xml version="1.0" encoding="utf-8"?>
+<p:notes xmlns:a="http://schemas.openxmlformats.org/drawingml/2006/main" xmlns:r="http://schemas.openxmlformats.org/officeDocument/2006/relationships" xmlns:p="http://schemas.openxmlformats.org/presentationml/2006/main">
   <p:cSld>
     <p:spTree>
       <p:nvGrpSpPr>
@@ -1217,7 +1221,7 @@
         <p:nvSpPr>
           <p:cNvPr id="2" name="Slide Image Placeholder 1"/>
           <p:cNvSpPr>
-            <a:spLocks noGrp="1"/>
+            <a:spLocks noGrp="1" noRot="1" noChangeAspect="1"/>
           </p:cNvSpPr>
           <p:nvPr>
             <p:ph type="sldImg" idx="2"/>
@@ -1232,7 +1236,7 @@
             <a:spLocks noGrp="1"/>
           </p:cNvSpPr>
           <p:nvPr>
-            <p:ph type="body" idx="3" sz="quarter"/>
+            <p:ph type="body" sz="quarter" idx="3"/>
           </p:nvPr>
         </p:nvSpPr>
         <p:spPr/>
@@ -1253,7 +1257,7 @@
             <a:spLocks noGrp="1"/>
           </p:cNvSpPr>
           <p:nvPr>
-            <p:ph type="sldNum" idx="5" sz="quarter"/>
+            <p:ph type="sldNum" sz="quarter" idx="5"/>
           </p:nvPr>
         </p:nvSpPr>
         <p:spPr/>
@@ -1266,8 +1270,8 @@
 </p:notes>
 </file>
 
-<file path=ppt/notesSlides/notesSlide4.xml><?xml version="1.0" encoding="utf-8"?>
-<p:notes xmlns:a="http://schemas.openxmlformats.org/drawingml/2006/main" xmlns:p="http://schemas.openxmlformats.org/presentationml/2006/main" xmlns:r="http://schemas.openxmlformats.org/officeDocument/2006/relationships">
+<file path=ppt/notesSlides/notesSlide8.xml><?xml version="1.0" encoding="utf-8"?>
+<p:notes xmlns:a="http://schemas.openxmlformats.org/drawingml/2006/main" xmlns:r="http://schemas.openxmlformats.org/officeDocument/2006/relationships" xmlns:p="http://schemas.openxmlformats.org/presentationml/2006/main">
   <p:cSld>
     <p:spTree>
       <p:nvGrpSpPr>
@@ -1287,7 +1291,7 @@
         <p:nvSpPr>
           <p:cNvPr id="2" name="Slide Image Placeholder 1"/>
           <p:cNvSpPr>
-            <a:spLocks noGrp="1"/>
+            <a:spLocks noGrp="1" noRot="1" noChangeAspect="1"/>
           </p:cNvSpPr>
           <p:nvPr>
             <p:ph type="sldImg" idx="2"/>
@@ -1302,7 +1306,7 @@
             <a:spLocks noGrp="1"/>
           </p:cNvSpPr>
           <p:nvPr>
-            <p:ph type="body" idx="3" sz="quarter"/>
+            <p:ph type="body" sz="quarter" idx="3"/>
           </p:nvPr>
         </p:nvSpPr>
         <p:spPr/>
@@ -1323,7 +1327,7 @@
             <a:spLocks noGrp="1"/>
           </p:cNvSpPr>
           <p:nvPr>
-            <p:ph type="sldNum" idx="5" sz="quarter"/>
+            <p:ph type="sldNum" sz="quarter" idx="5"/>
           </p:nvPr>
         </p:nvSpPr>
         <p:spPr/>
@@ -1336,8 +1340,8 @@
 </p:notes>
 </file>
 
-<file path=ppt/notesSlides/notesSlide5.xml><?xml version="1.0" encoding="utf-8"?>
-<p:notes xmlns:a="http://schemas.openxmlformats.org/drawingml/2006/main" xmlns:p="http://schemas.openxmlformats.org/presentationml/2006/main" xmlns:r="http://schemas.openxmlformats.org/officeDocument/2006/relationships">
+<file path=ppt/notesSlides/notesSlide9.xml><?xml version="1.0" encoding="utf-8"?>
+<p:notes xmlns:a="http://schemas.openxmlformats.org/drawingml/2006/main" xmlns:r="http://schemas.openxmlformats.org/officeDocument/2006/relationships" xmlns:p="http://schemas.openxmlformats.org/presentationml/2006/main">
   <p:cSld>
     <p:spTree>
       <p:nvGrpSpPr>
@@ -1357,7 +1361,7 @@
         <p:nvSpPr>
           <p:cNvPr id="2" name="Slide Image Placeholder 1"/>
           <p:cNvSpPr>
-            <a:spLocks noGrp="1"/>
+            <a:spLocks noGrp="1" noRot="1" noChangeAspect="1"/>
           </p:cNvSpPr>
           <p:nvPr>
             <p:ph type="sldImg" idx="2"/>
@@ -1372,7 +1376,7 @@
             <a:spLocks noGrp="1"/>
           </p:cNvSpPr>
           <p:nvPr>
-            <p:ph type="body" idx="3" sz="quarter"/>
+            <p:ph type="body" sz="quarter" idx="3"/>
           </p:nvPr>
         </p:nvSpPr>
         <p:spPr/>
@@ -1393,287 +1397,7 @@
             <a:spLocks noGrp="1"/>
           </p:cNvSpPr>
           <p:nvPr>
-            <p:ph type="sldNum" idx="5" sz="quarter"/>
-          </p:nvPr>
-        </p:nvSpPr>
-        <p:spPr/>
-      </p:sp>
-    </p:spTree>
-  </p:cSld>
-  <p:clrMapOvr>
-    <a:masterClrMapping/>
-  </p:clrMapOvr>
-</p:notes>
-</file>
-
-<file path=ppt/notesSlides/notesSlide6.xml><?xml version="1.0" encoding="utf-8"?>
-<p:notes xmlns:a="http://schemas.openxmlformats.org/drawingml/2006/main" xmlns:p="http://schemas.openxmlformats.org/presentationml/2006/main" xmlns:r="http://schemas.openxmlformats.org/officeDocument/2006/relationships">
-  <p:cSld>
-    <p:spTree>
-      <p:nvGrpSpPr>
-        <p:cNvPr id="1" name=""/>
-        <p:cNvGrpSpPr/>
-        <p:nvPr/>
-      </p:nvGrpSpPr>
-      <p:grpSpPr>
-        <a:xfrm>
-          <a:off x="0" y="0"/>
-          <a:ext cx="0" cy="0"/>
-          <a:chOff x="0" y="0"/>
-          <a:chExt cx="0" cy="0"/>
-        </a:xfrm>
-      </p:grpSpPr>
-      <p:sp>
-        <p:nvSpPr>
-          <p:cNvPr id="2" name="Slide Image Placeholder 1"/>
-          <p:cNvSpPr>
-            <a:spLocks noGrp="1"/>
-          </p:cNvSpPr>
-          <p:nvPr>
-            <p:ph type="sldImg" idx="2"/>
-          </p:nvPr>
-        </p:nvSpPr>
-        <p:spPr/>
-      </p:sp>
-      <p:sp>
-        <p:nvSpPr>
-          <p:cNvPr id="3" name="Notes Placeholder 2"/>
-          <p:cNvSpPr>
-            <a:spLocks noGrp="1"/>
-          </p:cNvSpPr>
-          <p:nvPr>
-            <p:ph type="body" idx="3" sz="quarter"/>
-          </p:nvPr>
-        </p:nvSpPr>
-        <p:spPr/>
-        <p:txBody>
-          <a:bodyPr/>
-          <a:lstStyle/>
-          <a:p>
-            <a:r>
-              <a:t>Шаблон. Текст-«рыба» заменяется своим. Фото и иконки: выделить, правая кнопка → Изменить рисунок. Шрифт Gilroy встроен в файл.</a:t>
-            </a:r>
-          </a:p>
-        </p:txBody>
-      </p:sp>
-      <p:sp>
-        <p:nvSpPr>
-          <p:cNvPr id="4" name="Slide Number Placeholder 3"/>
-          <p:cNvSpPr>
-            <a:spLocks noGrp="1"/>
-          </p:cNvSpPr>
-          <p:nvPr>
-            <p:ph type="sldNum" idx="5" sz="quarter"/>
-          </p:nvPr>
-        </p:nvSpPr>
-        <p:spPr/>
-      </p:sp>
-    </p:spTree>
-  </p:cSld>
-  <p:clrMapOvr>
-    <a:masterClrMapping/>
-  </p:clrMapOvr>
-</p:notes>
-</file>
-
-<file path=ppt/notesSlides/notesSlide7.xml><?xml version="1.0" encoding="utf-8"?>
-<p:notes xmlns:a="http://schemas.openxmlformats.org/drawingml/2006/main" xmlns:p="http://schemas.openxmlformats.org/presentationml/2006/main" xmlns:r="http://schemas.openxmlformats.org/officeDocument/2006/relationships">
-  <p:cSld>
-    <p:spTree>
-      <p:nvGrpSpPr>
-        <p:cNvPr id="1" name=""/>
-        <p:cNvGrpSpPr/>
-        <p:nvPr/>
-      </p:nvGrpSpPr>
-      <p:grpSpPr>
-        <a:xfrm>
-          <a:off x="0" y="0"/>
-          <a:ext cx="0" cy="0"/>
-          <a:chOff x="0" y="0"/>
-          <a:chExt cx="0" cy="0"/>
-        </a:xfrm>
-      </p:grpSpPr>
-      <p:sp>
-        <p:nvSpPr>
-          <p:cNvPr id="2" name="Slide Image Placeholder 1"/>
-          <p:cNvSpPr>
-            <a:spLocks noGrp="1"/>
-          </p:cNvSpPr>
-          <p:nvPr>
-            <p:ph type="sldImg" idx="2"/>
-          </p:nvPr>
-        </p:nvSpPr>
-        <p:spPr/>
-      </p:sp>
-      <p:sp>
-        <p:nvSpPr>
-          <p:cNvPr id="3" name="Notes Placeholder 2"/>
-          <p:cNvSpPr>
-            <a:spLocks noGrp="1"/>
-          </p:cNvSpPr>
-          <p:nvPr>
-            <p:ph type="body" idx="3" sz="quarter"/>
-          </p:nvPr>
-        </p:nvSpPr>
-        <p:spPr/>
-        <p:txBody>
-          <a:bodyPr/>
-          <a:lstStyle/>
-          <a:p>
-            <a:r>
-              <a:t>Шаблон. Текст-«рыба» заменяется своим. Фото и иконки: выделить, правая кнопка → Изменить рисунок. Шрифт Gilroy встроен в файл.</a:t>
-            </a:r>
-          </a:p>
-        </p:txBody>
-      </p:sp>
-      <p:sp>
-        <p:nvSpPr>
-          <p:cNvPr id="4" name="Slide Number Placeholder 3"/>
-          <p:cNvSpPr>
-            <a:spLocks noGrp="1"/>
-          </p:cNvSpPr>
-          <p:nvPr>
-            <p:ph type="sldNum" idx="5" sz="quarter"/>
-          </p:nvPr>
-        </p:nvSpPr>
-        <p:spPr/>
-      </p:sp>
-    </p:spTree>
-  </p:cSld>
-  <p:clrMapOvr>
-    <a:masterClrMapping/>
-  </p:clrMapOvr>
-</p:notes>
-</file>
-
-<file path=ppt/notesSlides/notesSlide8.xml><?xml version="1.0" encoding="utf-8"?>
-<p:notes xmlns:a="http://schemas.openxmlformats.org/drawingml/2006/main" xmlns:p="http://schemas.openxmlformats.org/presentationml/2006/main" xmlns:r="http://schemas.openxmlformats.org/officeDocument/2006/relationships">
-  <p:cSld>
-    <p:spTree>
-      <p:nvGrpSpPr>
-        <p:cNvPr id="1" name=""/>
-        <p:cNvGrpSpPr/>
-        <p:nvPr/>
-      </p:nvGrpSpPr>
-      <p:grpSpPr>
-        <a:xfrm>
-          <a:off x="0" y="0"/>
-          <a:ext cx="0" cy="0"/>
-          <a:chOff x="0" y="0"/>
-          <a:chExt cx="0" cy="0"/>
-        </a:xfrm>
-      </p:grpSpPr>
-      <p:sp>
-        <p:nvSpPr>
-          <p:cNvPr id="2" name="Slide Image Placeholder 1"/>
-          <p:cNvSpPr>
-            <a:spLocks noGrp="1"/>
-          </p:cNvSpPr>
-          <p:nvPr>
-            <p:ph type="sldImg" idx="2"/>
-          </p:nvPr>
-        </p:nvSpPr>
-        <p:spPr/>
-      </p:sp>
-      <p:sp>
-        <p:nvSpPr>
-          <p:cNvPr id="3" name="Notes Placeholder 2"/>
-          <p:cNvSpPr>
-            <a:spLocks noGrp="1"/>
-          </p:cNvSpPr>
-          <p:nvPr>
-            <p:ph type="body" idx="3" sz="quarter"/>
-          </p:nvPr>
-        </p:nvSpPr>
-        <p:spPr/>
-        <p:txBody>
-          <a:bodyPr/>
-          <a:lstStyle/>
-          <a:p>
-            <a:r>
-              <a:t>Шаблон. Текст-«рыба» заменяется своим. Фото и иконки: выделить, правая кнопка → Изменить рисунок. Шрифт Gilroy встроен в файл.</a:t>
-            </a:r>
-          </a:p>
-        </p:txBody>
-      </p:sp>
-      <p:sp>
-        <p:nvSpPr>
-          <p:cNvPr id="4" name="Slide Number Placeholder 3"/>
-          <p:cNvSpPr>
-            <a:spLocks noGrp="1"/>
-          </p:cNvSpPr>
-          <p:nvPr>
-            <p:ph type="sldNum" idx="5" sz="quarter"/>
-          </p:nvPr>
-        </p:nvSpPr>
-        <p:spPr/>
-      </p:sp>
-    </p:spTree>
-  </p:cSld>
-  <p:clrMapOvr>
-    <a:masterClrMapping/>
-  </p:clrMapOvr>
-</p:notes>
-</file>
-
-<file path=ppt/notesSlides/notesSlide9.xml><?xml version="1.0" encoding="utf-8"?>
-<p:notes xmlns:a="http://schemas.openxmlformats.org/drawingml/2006/main" xmlns:p="http://schemas.openxmlformats.org/presentationml/2006/main" xmlns:r="http://schemas.openxmlformats.org/officeDocument/2006/relationships">
-  <p:cSld>
-    <p:spTree>
-      <p:nvGrpSpPr>
-        <p:cNvPr id="1" name=""/>
-        <p:cNvGrpSpPr/>
-        <p:nvPr/>
-      </p:nvGrpSpPr>
-      <p:grpSpPr>
-        <a:xfrm>
-          <a:off x="0" y="0"/>
-          <a:ext cx="0" cy="0"/>
-          <a:chOff x="0" y="0"/>
-          <a:chExt cx="0" cy="0"/>
-        </a:xfrm>
-      </p:grpSpPr>
-      <p:sp>
-        <p:nvSpPr>
-          <p:cNvPr id="2" name="Slide Image Placeholder 1"/>
-          <p:cNvSpPr>
-            <a:spLocks noGrp="1"/>
-          </p:cNvSpPr>
-          <p:nvPr>
-            <p:ph type="sldImg" idx="2"/>
-          </p:nvPr>
-        </p:nvSpPr>
-        <p:spPr/>
-      </p:sp>
-      <p:sp>
-        <p:nvSpPr>
-          <p:cNvPr id="3" name="Notes Placeholder 2"/>
-          <p:cNvSpPr>
-            <a:spLocks noGrp="1"/>
-          </p:cNvSpPr>
-          <p:nvPr>
-            <p:ph type="body" idx="3" sz="quarter"/>
-          </p:nvPr>
-        </p:nvSpPr>
-        <p:spPr/>
-        <p:txBody>
-          <a:bodyPr/>
-          <a:lstStyle/>
-          <a:p>
-            <a:r>
-              <a:t>Шаблон. Текст-«рыба» заменяется своим. Фото и иконки: выделить, правая кнопка → Изменить рисунок. Шрифт Gilroy встроен в файл.</a:t>
-            </a:r>
-          </a:p>
-        </p:txBody>
-      </p:sp>
-      <p:sp>
-        <p:nvSpPr>
-          <p:cNvPr id="4" name="Slide Number Placeholder 3"/>
-          <p:cNvSpPr>
-            <a:spLocks noGrp="1"/>
-          </p:cNvSpPr>
-          <p:nvPr>
-            <p:ph type="sldNum" idx="5" sz="quarter"/>
+            <p:ph type="sldNum" sz="quarter" idx="5"/>
           </p:nvPr>
         </p:nvSpPr>
         <p:spPr/>
@@ -1867,7 +1591,7 @@
           <a:p>
             <a:fld id="{5BCAD085-E8A6-8845-BD4E-CB4CCA059FC4}" type="datetimeFigureOut">
               <a:rPr lang="en-US" smtClean="0"/>
-              <a:t>1/27/13</a:t>
+              <a:t>10/15/2026</a:t>
             </a:fld>
             <a:endParaRPr lang="en-US"/>
           </a:p>
@@ -2037,7 +1761,7 @@
           <a:p>
             <a:fld id="{5BCAD085-E8A6-8845-BD4E-CB4CCA059FC4}" type="datetimeFigureOut">
               <a:rPr lang="en-US" smtClean="0"/>
-              <a:t>1/27/13</a:t>
+              <a:t>10/15/2026</a:t>
             </a:fld>
             <a:endParaRPr lang="en-US"/>
           </a:p>
@@ -2217,7 +1941,7 @@
           <a:p>
             <a:fld id="{5BCAD085-E8A6-8845-BD4E-CB4CCA059FC4}" type="datetimeFigureOut">
               <a:rPr lang="en-US" smtClean="0"/>
-              <a:t>1/27/13</a:t>
+              <a:t>10/15/2026</a:t>
             </a:fld>
             <a:endParaRPr lang="en-US"/>
           </a:p>
@@ -2269,6 +1993,90 @@
     <p:extLst>
       <p:ext uri="{BB962C8B-B14F-4D97-AF65-F5344CB8AC3E}">
         <p14:creationId xmlns:p14="http://schemas.microsoft.com/office/powerpoint/2010/main" val="3612223792"/>
+      </p:ext>
+    </p:extLst>
+  </p:cSld>
+  <p:clrMapOvr>
+    <a:masterClrMapping/>
+  </p:clrMapOvr>
+</p:sldLayout>
+</file>
+
+<file path=ppt/slideLayouts/slideLayout12.xml><?xml version="1.0" encoding="utf-8"?>
+<p:sldLayout xmlns:a="http://schemas.openxmlformats.org/drawingml/2006/main" xmlns:r="http://schemas.openxmlformats.org/officeDocument/2006/relationships" xmlns:p="http://schemas.openxmlformats.org/presentationml/2006/main" type="blank" preserve="1">
+  <p:cSld name="Фото-слоты">
+    <p:spTree>
+      <p:nvGrpSpPr>
+        <p:cNvPr id="1" name=""/>
+        <p:cNvGrpSpPr/>
+        <p:nvPr/>
+      </p:nvGrpSpPr>
+      <p:grpSpPr>
+        <a:xfrm>
+          <a:off x="0" y="0"/>
+          <a:ext cx="0" cy="0"/>
+          <a:chOff x="0" y="0"/>
+          <a:chExt cx="0" cy="0"/>
+        </a:xfrm>
+      </p:grpSpPr>
+      <p:sp>
+        <p:nvSpPr>
+          <p:cNvPr id="40" name="Фото"/>
+          <p:cNvSpPr>
+            <a:spLocks noGrp="1"/>
+          </p:cNvSpPr>
+          <p:nvPr>
+            <p:ph type="pic" idx="10"/>
+          </p:nvPr>
+        </p:nvSpPr>
+        <p:spPr>
+          <a:xfrm>
+            <a:off x="0" y="0"/>
+            <a:ext cx="2857500" cy="2857500"/>
+          </a:xfrm>
+        </p:spPr>
+        <p:txBody>
+          <a:bodyPr/>
+          <a:lstStyle/>
+          <a:p>
+            <a:r>
+              <a:rPr lang="ru-RU"/>
+              <a:t>Щёлкните значок, чтобы добавить фото</a:t>
+            </a:r>
+          </a:p>
+        </p:txBody>
+      </p:sp>
+      <p:sp>
+        <p:nvSpPr>
+          <p:cNvPr id="41" name="Иконка"/>
+          <p:cNvSpPr>
+            <a:spLocks noGrp="1"/>
+          </p:cNvSpPr>
+          <p:nvPr>
+            <p:ph type="pic" idx="11"/>
+          </p:nvPr>
+        </p:nvSpPr>
+        <p:spPr>
+          <a:xfrm>
+            <a:off x="0" y="0"/>
+            <a:ext cx="2857500" cy="2857500"/>
+          </a:xfrm>
+        </p:spPr>
+        <p:txBody>
+          <a:bodyPr/>
+          <a:lstStyle/>
+          <a:p>
+            <a:r>
+              <a:rPr lang="ru-RU"/>
+              <a:t>Щёлкните значок, чтобы добавить иконку</a:t>
+            </a:r>
+          </a:p>
+        </p:txBody>
+      </p:sp>
+    </p:spTree>
+    <p:extLst>
+      <p:ext uri="{BB962C8B-B14F-4D97-AF65-F5344CB8AC3E}">
+        <p14:creationId xmlns:p14="http://schemas.microsoft.com/office/powerpoint/2010/main" val="1212999818"/>
       </p:ext>
     </p:extLst>
   </p:cSld>
@@ -2387,7 +2195,7 @@
           <a:p>
             <a:fld id="{5BCAD085-E8A6-8845-BD4E-CB4CCA059FC4}" type="datetimeFigureOut">
               <a:rPr lang="en-US" smtClean="0"/>
-              <a:t>1/27/13</a:t>
+              <a:t>10/15/2026</a:t>
             </a:fld>
             <a:endParaRPr lang="en-US"/>
           </a:p>
@@ -2633,7 +2441,7 @@
           <a:p>
             <a:fld id="{5BCAD085-E8A6-8845-BD4E-CB4CCA059FC4}" type="datetimeFigureOut">
               <a:rPr lang="en-US" smtClean="0"/>
-              <a:t>1/27/13</a:t>
+              <a:t>10/15/2026</a:t>
             </a:fld>
             <a:endParaRPr lang="en-US"/>
           </a:p>
@@ -2921,7 +2729,7 @@
           <a:p>
             <a:fld id="{5BCAD085-E8A6-8845-BD4E-CB4CCA059FC4}" type="datetimeFigureOut">
               <a:rPr lang="en-US" smtClean="0"/>
-              <a:t>1/27/13</a:t>
+              <a:t>10/15/2026</a:t>
             </a:fld>
             <a:endParaRPr lang="en-US"/>
           </a:p>
@@ -3343,7 +3151,7 @@
           <a:p>
             <a:fld id="{5BCAD085-E8A6-8845-BD4E-CB4CCA059FC4}" type="datetimeFigureOut">
               <a:rPr lang="en-US" smtClean="0"/>
-              <a:t>1/27/13</a:t>
+              <a:t>10/15/2026</a:t>
             </a:fld>
             <a:endParaRPr lang="en-US"/>
           </a:p>
@@ -3461,7 +3269,7 @@
           <a:p>
             <a:fld id="{5BCAD085-E8A6-8845-BD4E-CB4CCA059FC4}" type="datetimeFigureOut">
               <a:rPr lang="en-US" smtClean="0"/>
-              <a:t>1/27/13</a:t>
+              <a:t>10/15/2026</a:t>
             </a:fld>
             <a:endParaRPr lang="en-US"/>
           </a:p>
@@ -3556,7 +3364,7 @@
           <a:p>
             <a:fld id="{5BCAD085-E8A6-8845-BD4E-CB4CCA059FC4}" type="datetimeFigureOut">
               <a:rPr lang="en-US" smtClean="0"/>
-              <a:t>1/27/13</a:t>
+              <a:t>10/15/2026</a:t>
             </a:fld>
             <a:endParaRPr lang="en-US"/>
           </a:p>
@@ -3601,60 +3409,6 @@
               <a:t>‹#›</a:t>
             </a:fld>
             <a:endParaRPr lang="en-US"/>
-          </a:p>
-        </p:txBody>
-      </p:sp>
-      <p:sp>
-        <p:nvSpPr>
-          <p:cNvPr id="40" name="Фото"/>
-          <p:cNvSpPr>
-            <a:spLocks noGrp="1"/>
-          </p:cNvSpPr>
-          <p:nvPr>
-            <p:ph type="pic" idx="10"/>
-          </p:nvPr>
-        </p:nvSpPr>
-        <p:spPr>
-          <a:xfrm>
-            <a:off x="0" y="0"/>
-            <a:ext cx="2857500" cy="2857500"/>
-          </a:xfrm>
-        </p:spPr>
-        <p:txBody>
-          <a:bodyPr/>
-          <a:lstStyle/>
-          <a:p>
-            <a:r>
-              <a:rPr lang="ru-RU"/>
-              <a:t>Щёлкните значок, чтобы добавить фото</a:t>
-            </a:r>
-          </a:p>
-        </p:txBody>
-      </p:sp>
-      <p:sp>
-        <p:nvSpPr>
-          <p:cNvPr id="41" name="Иконка"/>
-          <p:cNvSpPr>
-            <a:spLocks noGrp="1"/>
-          </p:cNvSpPr>
-          <p:nvPr>
-            <p:ph type="pic" idx="11"/>
-          </p:nvPr>
-        </p:nvSpPr>
-        <p:spPr>
-          <a:xfrm>
-            <a:off x="0" y="0"/>
-            <a:ext cx="2857500" cy="2857500"/>
-          </a:xfrm>
-        </p:spPr>
-        <p:txBody>
-          <a:bodyPr/>
-          <a:lstStyle/>
-          <a:p>
-            <a:r>
-              <a:rPr lang="ru-RU"/>
-              <a:t>Щёлкните значок, чтобы добавить иконку</a:t>
-            </a:r>
           </a:p>
         </p:txBody>
       </p:sp>
@@ -3887,7 +3641,7 @@
           <a:p>
             <a:fld id="{5BCAD085-E8A6-8845-BD4E-CB4CCA059FC4}" type="datetimeFigureOut">
               <a:rPr lang="en-US" smtClean="0"/>
-              <a:t>1/27/13</a:t>
+              <a:t>10/15/2026</a:t>
             </a:fld>
             <a:endParaRPr lang="en-US"/>
           </a:p>
@@ -4140,7 +3894,7 @@
           <a:p>
             <a:fld id="{5BCAD085-E8A6-8845-BD4E-CB4CCA059FC4}" type="datetimeFigureOut">
               <a:rPr lang="en-US" smtClean="0"/>
-              <a:t>1/27/13</a:t>
+              <a:t>10/15/2026</a:t>
             </a:fld>
             <a:endParaRPr lang="en-US"/>
           </a:p>
@@ -4353,7 +4107,7 @@
           <a:p>
             <a:fld id="{5BCAD085-E8A6-8845-BD4E-CB4CCA059FC4}" type="datetimeFigureOut">
               <a:rPr lang="en-US" smtClean="0"/>
-              <a:t>1/27/13</a:t>
+              <a:t>10/15/2026</a:t>
             </a:fld>
             <a:endParaRPr lang="en-US"/>
           </a:p>
@@ -4457,6 +4211,7 @@
     <p:sldLayoutId id="2147483657" r:id="rId9"/>
     <p:sldLayoutId id="2147483658" r:id="rId10"/>
     <p:sldLayoutId id="2147483659" r:id="rId11"/>
+    <p:sldLayoutId id="2147483660" r:id="rId13"/>
   </p:sldLayoutIdLst>
   <p:txStyles>
     <p:titleStyle>
@@ -4712,7 +4467,7 @@
 </file>
 
 <file path=ppt/slides/slide1.xml><?xml version="1.0" encoding="utf-8"?>
-<p:sld xmlns:a="http://schemas.openxmlformats.org/drawingml/2006/main" xmlns:p="http://schemas.openxmlformats.org/presentationml/2006/main" xmlns:r="http://schemas.openxmlformats.org/officeDocument/2006/relationships">
+<p:sld xmlns:a="http://schemas.openxmlformats.org/drawingml/2006/main" xmlns:r="http://schemas.openxmlformats.org/officeDocument/2006/relationships" xmlns:p="http://schemas.openxmlformats.org/presentationml/2006/main">
   <p:cSld name="V01-photo-question">
     <p:spTree>
       <p:nvGrpSpPr>
@@ -4720,31 +4475,14 @@
         <p:cNvGrpSpPr/>
         <p:nvPr/>
       </p:nvGrpSpPr>
-      <p:grpSpPr/>
-      <p:sp>
-        <p:nvSpPr>
-          <p:cNvPr id="2" name="Picture Placeholder 1"/>
-          <p:cNvSpPr>
-            <a:spLocks noGrp="1"/>
-          </p:cNvSpPr>
-          <p:nvPr>
-            <p:ph type="pic" idx="10"/>
-          </p:nvPr>
-        </p:nvSpPr>
-        <p:spPr/>
-      </p:sp>
-      <p:sp>
-        <p:nvSpPr>
-          <p:cNvPr id="3" name="Picture Placeholder 2"/>
-          <p:cNvSpPr>
-            <a:spLocks noGrp="1"/>
-          </p:cNvSpPr>
-          <p:nvPr>
-            <p:ph type="pic" idx="11"/>
-          </p:nvPr>
-        </p:nvSpPr>
-        <p:spPr/>
-      </p:sp>
+      <p:grpSpPr>
+        <a:xfrm>
+          <a:off x="0" y="0"/>
+          <a:ext cx="0" cy="0"/>
+          <a:chOff x="0" y="0"/>
+          <a:chExt cx="0" cy="0"/>
+        </a:xfrm>
+      </p:grpSpPr>
       <p:pic>
         <p:nvPicPr>
           <p:cNvPr id="4" name="Фон (картинка, без текста)" descr="V01-photo-question-bg.png"/>
@@ -4754,7 +4492,7 @@
           <p:nvPr/>
         </p:nvPicPr>
         <p:blipFill>
-          <a:blip r:embed="rId2"/>
+          <a:blip r:embed="rId3"/>
           <a:stretch>
             <a:fillRect/>
           </a:stretch>
@@ -4778,7 +4516,7 @@
           <p:nvPr/>
         </p:nvPicPr>
         <p:blipFill>
-          <a:blip r:embed="rId3"/>
+          <a:blip r:embed="rId4"/>
           <a:stretch>
             <a:fillRect/>
           </a:stretch>
@@ -4834,6 +4572,7 @@
           <a:lstStyle/>
           <a:p>
             <a:pPr algn="ctr"/>
+            <a:endParaRPr/>
           </a:p>
         </p:txBody>
       </p:sp>
@@ -4854,7 +4593,7 @@
           <a:noFill/>
         </p:spPr>
         <p:txBody>
-          <a:bodyPr wrap="none" lIns="0" rIns="0" tIns="0" bIns="0" anchor="t"/>
+          <a:bodyPr wrap="none" lIns="0" tIns="0" rIns="0" bIns="0" anchor="t"/>
           <a:lstStyle/>
           <a:p>
             <a:pPr algn="l">
@@ -4863,7 +4602,7 @@
               </a:lnSpc>
             </a:pPr>
             <a:r>
-              <a:rPr b="0" sz="7800" spc="-156">
+              <a:rPr sz="7800" b="0" spc="-156" dirty="0" err="1">
                 <a:solidFill>
                   <a:srgbClr val="FFFFFF"/>
                 </a:solidFill>
@@ -4871,11 +4610,10 @@
                 <a:ea typeface="Gilroy SemiBold"/>
                 <a:cs typeface="Gilroy SemiBold"/>
               </a:rPr>
-              <a:t>Здесь будет</a:t>
-            </a:r>
-            <a:br/>
-            <a:r>
-              <a:rPr b="0" sz="7800" spc="-156">
+              <a:t>Здесь</a:t>
+            </a:r>
+            <a:r>
+              <a:rPr sz="7800" b="0" spc="-156" dirty="0">
                 <a:solidFill>
                   <a:srgbClr val="FFFFFF"/>
                 </a:solidFill>
@@ -4883,8 +4621,67 @@
                 <a:ea typeface="Gilroy SemiBold"/>
                 <a:cs typeface="Gilroy SemiBold"/>
               </a:rPr>
-              <a:t>яркий заголовок</a:t>
-            </a:r>
+              <a:t> </a:t>
+            </a:r>
+            <a:r>
+              <a:rPr sz="7800" b="0" spc="-156" dirty="0" err="1">
+                <a:solidFill>
+                  <a:srgbClr val="FFFFFF"/>
+                </a:solidFill>
+                <a:latin typeface="Gilroy SemiBold"/>
+                <a:ea typeface="Gilroy SemiBold"/>
+                <a:cs typeface="Gilroy SemiBold"/>
+              </a:rPr>
+              <a:t>будет</a:t>
+            </a:r>
+            <a:r>
+              <a:rPr dirty="0"/>
+              <a:t/>
+            </a:r>
+            <a:br>
+              <a:rPr dirty="0"/>
+            </a:br>
+            <a:r>
+              <a:rPr sz="7800" b="0" spc="-156" dirty="0" err="1">
+                <a:solidFill>
+                  <a:srgbClr val="FFFFFF"/>
+                </a:solidFill>
+                <a:latin typeface="Gilroy SemiBold"/>
+                <a:ea typeface="Gilroy SemiBold"/>
+                <a:cs typeface="Gilroy SemiBold"/>
+              </a:rPr>
+              <a:t>яркий</a:t>
+            </a:r>
+            <a:r>
+              <a:rPr sz="7800" b="0" spc="-156" dirty="0">
+                <a:solidFill>
+                  <a:srgbClr val="FFFFFF"/>
+                </a:solidFill>
+                <a:latin typeface="Gilroy SemiBold"/>
+                <a:ea typeface="Gilroy SemiBold"/>
+                <a:cs typeface="Gilroy SemiBold"/>
+              </a:rPr>
+              <a:t> </a:t>
+            </a:r>
+            <a:r>
+              <a:rPr sz="7800" b="0" spc="-156" dirty="0" err="1">
+                <a:solidFill>
+                  <a:srgbClr val="FFFFFF"/>
+                </a:solidFill>
+                <a:latin typeface="Gilroy SemiBold"/>
+                <a:ea typeface="Gilroy SemiBold"/>
+                <a:cs typeface="Gilroy SemiBold"/>
+              </a:rPr>
+              <a:t>заголовок</a:t>
+            </a:r>
+            <a:endParaRPr sz="7800" b="0" spc="-156" dirty="0">
+              <a:solidFill>
+                <a:srgbClr val="FFFFFF"/>
+              </a:solidFill>
+              <a:latin typeface="Gilroy SemiBold"/>
+              <a:ea typeface="Gilroy SemiBold"/>
+              <a:cs typeface="Gilroy SemiBold"/>
+            </a:endParaRPr>
           </a:p>
         </p:txBody>
       </p:sp>
@@ -4896,8 +4693,8 @@
         </p:nvSpPr>
         <p:spPr>
           <a:xfrm>
-            <a:off x="914400" y="5025318"/>
-            <a:ext cx="9144000" cy="1056132"/>
+            <a:off x="914399" y="5025318"/>
+            <a:ext cx="8384583" cy="1056132"/>
           </a:xfrm>
           <a:prstGeom prst="rect">
             <a:avLst/>
@@ -4905,7 +4702,7 @@
           <a:noFill/>
         </p:spPr>
         <p:txBody>
-          <a:bodyPr wrap="none" lIns="0" rIns="0" tIns="0" bIns="0" anchor="t"/>
+          <a:bodyPr wrap="none" lIns="0" tIns="0" rIns="0" bIns="0" anchor="t"/>
           <a:lstStyle/>
           <a:p>
             <a:pPr algn="l">
@@ -4914,7 +4711,7 @@
               </a:lnSpc>
             </a:pPr>
             <a:r>
-              <a:rPr b="0" sz="3300" spc="-16">
+              <a:rPr lang="ru-RU" sz="3300" b="0" spc="-16" dirty="0" smtClean="0">
                 <a:solidFill>
                   <a:srgbClr val="FFFFFF"/>
                 </a:solidFill>
@@ -4922,11 +4719,17 @@
                 <a:ea typeface="Gilroy SemiBold"/>
                 <a:cs typeface="Gilroy SemiBold"/>
               </a:rPr>
-              <a:t>а тут вопрос или</a:t>
-            </a:r>
-            <a:br/>
-            <a:r>
-              <a:rPr b="0" sz="3300" spc="-16">
+              <a:t>Фото на фон можно поставить </a:t>
+            </a:r>
+          </a:p>
+          <a:p>
+            <a:pPr algn="l">
+              <a:lnSpc>
+                <a:spcPts val="4158"/>
+              </a:lnSpc>
+            </a:pPr>
+            <a:r>
+              <a:rPr lang="ru-RU" sz="3300" b="0" spc="-16" dirty="0" smtClean="0">
                 <a:solidFill>
                   <a:srgbClr val="FFFFFF"/>
                 </a:solidFill>
@@ -4934,8 +4737,16 @@
                 <a:ea typeface="Gilroy SemiBold"/>
                 <a:cs typeface="Gilroy SemiBold"/>
               </a:rPr>
-              <a:t>пояснение в две строки</a:t>
-            </a:r>
+              <a:t>Другое, какое хотите</a:t>
+            </a:r>
+            <a:endParaRPr sz="3300" b="0" spc="-16" dirty="0">
+              <a:solidFill>
+                <a:srgbClr val="FFFFFF"/>
+              </a:solidFill>
+              <a:latin typeface="Gilroy SemiBold"/>
+              <a:ea typeface="Gilroy SemiBold"/>
+              <a:cs typeface="Gilroy SemiBold"/>
+            </a:endParaRPr>
           </a:p>
         </p:txBody>
       </p:sp>
@@ -4948,49 +4759,32 @@
 </file>
 
 <file path=ppt/slides/slide10.xml><?xml version="1.0" encoding="utf-8"?>
-<p:sld xmlns:a="http://schemas.openxmlformats.org/drawingml/2006/main" xmlns:p="http://schemas.openxmlformats.org/presentationml/2006/main" xmlns:r="http://schemas.openxmlformats.org/officeDocument/2006/relationships">
-  <p:cSld name="V11-photo-frame">
+<p:sld xmlns:a="http://schemas.openxmlformats.org/drawingml/2006/main" xmlns:r="http://schemas.openxmlformats.org/officeDocument/2006/relationships" xmlns:p="http://schemas.openxmlformats.org/presentationml/2006/main">
+  <p:cSld name="U2-urgent-air-green">
     <p:spTree>
       <p:nvGrpSpPr>
         <p:cNvPr id="1" name=""/>
         <p:cNvGrpSpPr/>
         <p:nvPr/>
       </p:nvGrpSpPr>
-      <p:grpSpPr/>
-      <p:sp>
-        <p:nvSpPr>
-          <p:cNvPr id="2" name="Picture Placeholder 1"/>
-          <p:cNvSpPr>
-            <a:spLocks noGrp="1"/>
-          </p:cNvSpPr>
-          <p:nvPr>
-            <p:ph type="pic" idx="10"/>
-          </p:nvPr>
-        </p:nvSpPr>
-        <p:spPr/>
-      </p:sp>
-      <p:sp>
-        <p:nvSpPr>
-          <p:cNvPr id="3" name="Picture Placeholder 2"/>
-          <p:cNvSpPr>
-            <a:spLocks noGrp="1"/>
-          </p:cNvSpPr>
-          <p:nvPr>
-            <p:ph type="pic" idx="11"/>
-          </p:nvPr>
-        </p:nvSpPr>
-        <p:spPr/>
-      </p:sp>
+      <p:grpSpPr>
+        <a:xfrm>
+          <a:off x="0" y="0"/>
+          <a:ext cx="0" cy="0"/>
+          <a:chOff x="0" y="0"/>
+          <a:chExt cx="0" cy="0"/>
+        </a:xfrm>
+      </p:grpSpPr>
       <p:pic>
         <p:nvPicPr>
-          <p:cNvPr id="4" name="Фон (картинка, без текста)" descr="V05-list-bg.png"/>
+          <p:cNvPr id="4" name="Фон (картинка, без текста)" descr="U2-urgent-air-green-bg.png"/>
           <p:cNvPicPr>
             <a:picLocks noChangeAspect="1"/>
           </p:cNvPicPr>
           <p:nvPr/>
         </p:nvPicPr>
         <p:blipFill>
-          <a:blip r:embed="rId2"/>
+          <a:blip r:embed="rId3"/>
           <a:stretch>
             <a:fillRect/>
           </a:stretch>
@@ -5007,42 +4801,11 @@
       </p:pic>
       <p:pic>
         <p:nvPicPr>
-          <p:cNvPr id="5" name="Фото в рамке (заменить: Изменить рисунок)" descr="V11-photo-frame-photo.jpg"/>
+          <p:cNvPr id="5" name="Логотип" descr="logo-full-white.png"/>
           <p:cNvPicPr>
             <a:picLocks noChangeAspect="1"/>
           </p:cNvPicPr>
-          <p:nvPr>
-            <p:ph type="pic" idx="10"/>
-          </p:nvPr>
-        </p:nvPicPr>
-        <p:blipFill>
-          <a:blip r:embed="rId3"/>
-          <a:srcRect t="8243" b="12365"/>
-          <a:stretch>
-            <a:fillRect/>
-          </a:stretch>
-        </p:blipFill>
-        <p:spPr>
-          <a:xfrm>
-            <a:off x="914400" y="4895850"/>
-            <a:ext cx="8458200" cy="4476750"/>
-          </a:xfrm>
-          <a:prstGeom prst="roundRect">
-            <a:avLst>
-              <a:gd name="adj" fmla="val 1702"/>
-            </a:avLst>
-          </a:prstGeom>
-        </p:spPr>
-      </p:pic>
-      <p:pic>
-        <p:nvPicPr>
-          <p:cNvPr id="6" name="Иконка (водяной знак) (заменить: Изменить рисунок)" descr="V11-photo-frame-icon.png"/>
-          <p:cNvPicPr>
-            <a:picLocks noChangeAspect="1"/>
-          </p:cNvPicPr>
-          <p:nvPr>
-            <p:ph type="pic" idx="11"/>
-          </p:nvPr>
+          <p:nvPr/>
         </p:nvPicPr>
         <p:blipFill>
           <a:blip r:embed="rId4"/>
@@ -5052,17 +4815,653 @@
         </p:blipFill>
         <p:spPr>
           <a:xfrm>
-            <a:off x="7810500" y="-1619250"/>
-            <a:ext cx="3810000" cy="3810000"/>
+            <a:off x="914400" y="914400"/>
+            <a:ext cx="1905000" cy="1162942"/>
           </a:xfrm>
           <a:prstGeom prst="rect">
             <a:avLst/>
           </a:prstGeom>
         </p:spPr>
       </p:pic>
+      <p:sp>
+        <p:nvSpPr>
+          <p:cNvPr id="6" name="Текст 1"/>
+          <p:cNvSpPr txBox="1"/>
+          <p:nvPr/>
+        </p:nvSpPr>
+        <p:spPr>
+          <a:xfrm>
+            <a:off x="1314450" y="2633811"/>
+            <a:ext cx="8743950" cy="342900"/>
+          </a:xfrm>
+          <a:prstGeom prst="rect">
+            <a:avLst/>
+          </a:prstGeom>
+          <a:noFill/>
+        </p:spPr>
+        <p:txBody>
+          <a:bodyPr wrap="none" lIns="0" tIns="0" rIns="0" bIns="0" anchor="t"/>
+          <a:lstStyle/>
+          <a:p>
+            <a:pPr algn="l">
+              <a:lnSpc>
+                <a:spcPts val="2700"/>
+              </a:lnSpc>
+            </a:pPr>
+            <a:r>
+              <a:rPr sz="2250" b="1" cap="all" spc="495">
+                <a:solidFill>
+                  <a:srgbClr val="ABAD58"/>
+                </a:solidFill>
+                <a:latin typeface="Gilroy"/>
+                <a:ea typeface="Gilroy"/>
+                <a:cs typeface="Gilroy"/>
+              </a:rPr>
+              <a:t>Срочные новости</a:t>
+            </a:r>
+          </a:p>
+        </p:txBody>
+      </p:sp>
+      <p:sp>
+        <p:nvSpPr>
+          <p:cNvPr id="7" name="Текст 2"/>
+          <p:cNvSpPr txBox="1"/>
+          <p:nvPr/>
+        </p:nvSpPr>
+        <p:spPr>
+          <a:xfrm>
+            <a:off x="914400" y="3717962"/>
+            <a:ext cx="9144000" cy="4005072"/>
+          </a:xfrm>
+          <a:prstGeom prst="rect">
+            <a:avLst/>
+          </a:prstGeom>
+          <a:noFill/>
+        </p:spPr>
+        <p:txBody>
+          <a:bodyPr wrap="none" lIns="0" tIns="0" rIns="0" bIns="0" anchor="t"/>
+          <a:lstStyle/>
+          <a:p>
+            <a:pPr algn="l">
+              <a:lnSpc>
+                <a:spcPts val="10512"/>
+              </a:lnSpc>
+            </a:pPr>
+            <a:r>
+              <a:rPr sz="10950" b="1" spc="-383">
+                <a:solidFill>
+                  <a:srgbClr val="FFFFFF"/>
+                </a:solidFill>
+                <a:latin typeface="Gilroy"/>
+                <a:ea typeface="Gilroy"/>
+                <a:cs typeface="Gilroy"/>
+              </a:rPr>
+              <a:t>Здесь будет</a:t>
+            </a:r>
+            <a:r>
+              <a:t/>
+            </a:r>
+            <a:br/>
+            <a:r>
+              <a:rPr sz="10950" b="1" spc="-383">
+                <a:solidFill>
+                  <a:srgbClr val="FFFFFF"/>
+                </a:solidFill>
+                <a:latin typeface="Gilroy"/>
+                <a:ea typeface="Gilroy"/>
+                <a:cs typeface="Gilroy"/>
+              </a:rPr>
+              <a:t>заголовок</a:t>
+            </a:r>
+            <a:r>
+              <a:t/>
+            </a:r>
+            <a:br/>
+            <a:r>
+              <a:rPr sz="10950" b="1" spc="-383">
+                <a:solidFill>
+                  <a:srgbClr val="FFFFFF"/>
+                </a:solidFill>
+                <a:latin typeface="Gilroy"/>
+                <a:ea typeface="Gilroy"/>
+                <a:cs typeface="Gilroy"/>
+              </a:rPr>
+              <a:t>новости</a:t>
+            </a:r>
+          </a:p>
+        </p:txBody>
+      </p:sp>
+      <p:sp>
+        <p:nvSpPr>
+          <p:cNvPr id="8" name="Текст 3"/>
+          <p:cNvSpPr txBox="1"/>
+          <p:nvPr/>
+        </p:nvSpPr>
+        <p:spPr>
+          <a:xfrm>
+            <a:off x="914400" y="8131343"/>
+            <a:ext cx="9144000" cy="548640"/>
+          </a:xfrm>
+          <a:prstGeom prst="rect">
+            <a:avLst/>
+          </a:prstGeom>
+          <a:noFill/>
+        </p:spPr>
+        <p:txBody>
+          <a:bodyPr wrap="none" lIns="0" tIns="0" rIns="0" bIns="0" anchor="t"/>
+          <a:lstStyle/>
+          <a:p>
+            <a:pPr algn="l">
+              <a:lnSpc>
+                <a:spcPts val="4320"/>
+              </a:lnSpc>
+            </a:pPr>
+            <a:r>
+              <a:rPr sz="3600" b="0">
+                <a:solidFill>
+                  <a:srgbClr val="BABAB9"/>
+                </a:solidFill>
+                <a:latin typeface="Gilroy Medium"/>
+                <a:ea typeface="Gilroy Medium"/>
+                <a:cs typeface="Gilroy Medium"/>
+              </a:rPr>
+              <a:t>здесь дата или срок</a:t>
+            </a:r>
+          </a:p>
+        </p:txBody>
+      </p:sp>
+    </p:spTree>
+  </p:cSld>
+  <p:clrMapOvr>
+    <a:masterClrMapping/>
+  </p:clrMapOvr>
+</p:sld>
+</file>
+
+<file path=ppt/slides/slide11.xml><?xml version="1.0" encoding="utf-8"?>
+<p:sld xmlns:a="http://schemas.openxmlformats.org/drawingml/2006/main" xmlns:r="http://schemas.openxmlformats.org/officeDocument/2006/relationships" xmlns:p="http://schemas.openxmlformats.org/presentationml/2006/main">
+  <p:cSld name="U3-urgent-date-graphite-chip">
+    <p:spTree>
+      <p:nvGrpSpPr>
+        <p:cNvPr id="1" name=""/>
+        <p:cNvGrpSpPr/>
+        <p:nvPr/>
+      </p:nvGrpSpPr>
+      <p:grpSpPr>
+        <a:xfrm>
+          <a:off x="0" y="0"/>
+          <a:ext cx="0" cy="0"/>
+          <a:chOff x="0" y="0"/>
+          <a:chExt cx="0" cy="0"/>
+        </a:xfrm>
+      </p:grpSpPr>
       <p:pic>
         <p:nvPicPr>
-          <p:cNvPr id="7" name="Логотип" descr="logo-full.png"/>
+          <p:cNvPr id="4" name="Фон (картинка, без текста)" descr="U3-urgent-date-graphite-chip-bg.png"/>
+          <p:cNvPicPr>
+            <a:picLocks noChangeAspect="1"/>
+          </p:cNvPicPr>
+          <p:nvPr/>
+        </p:nvPicPr>
+        <p:blipFill>
+          <a:blip r:embed="rId3"/>
+          <a:stretch>
+            <a:fillRect/>
+          </a:stretch>
+        </p:blipFill>
+        <p:spPr>
+          <a:xfrm>
+            <a:off x="0" y="0"/>
+            <a:ext cx="10287000" cy="10287000"/>
+          </a:xfrm>
+          <a:prstGeom prst="rect">
+            <a:avLst/>
+          </a:prstGeom>
+        </p:spPr>
+      </p:pic>
+      <p:pic>
+        <p:nvPicPr>
+          <p:cNvPr id="5" name="Логотип" descr="logo-full.png"/>
+          <p:cNvPicPr>
+            <a:picLocks noChangeAspect="1"/>
+          </p:cNvPicPr>
+          <p:nvPr/>
+        </p:nvPicPr>
+        <p:blipFill>
+          <a:blip r:embed="rId4"/>
+          <a:stretch>
+            <a:fillRect/>
+          </a:stretch>
+        </p:blipFill>
+        <p:spPr>
+          <a:xfrm>
+            <a:off x="914400" y="914400"/>
+            <a:ext cx="1905000" cy="1162942"/>
+          </a:xfrm>
+          <a:prstGeom prst="rect">
+            <a:avLst/>
+          </a:prstGeom>
+        </p:spPr>
+      </p:pic>
+      <p:sp>
+        <p:nvSpPr>
+          <p:cNvPr id="6" name="Текст 1"/>
+          <p:cNvSpPr txBox="1"/>
+          <p:nvPr/>
+        </p:nvSpPr>
+        <p:spPr>
+          <a:xfrm>
+            <a:off x="1543050" y="3022386"/>
+            <a:ext cx="8515350" cy="388620"/>
+          </a:xfrm>
+          <a:prstGeom prst="rect">
+            <a:avLst/>
+          </a:prstGeom>
+          <a:noFill/>
+        </p:spPr>
+        <p:txBody>
+          <a:bodyPr wrap="none" lIns="0" tIns="0" rIns="0" bIns="0" anchor="t"/>
+          <a:lstStyle/>
+          <a:p>
+            <a:pPr algn="l">
+              <a:lnSpc>
+                <a:spcPts val="3060"/>
+              </a:lnSpc>
+            </a:pPr>
+            <a:r>
+              <a:rPr sz="2550" b="1" cap="all" spc="408">
+                <a:solidFill>
+                  <a:srgbClr val="FFFFFF"/>
+                </a:solidFill>
+                <a:latin typeface="Gilroy"/>
+                <a:ea typeface="Gilroy"/>
+                <a:cs typeface="Gilroy"/>
+              </a:rPr>
+              <a:t>Срочные новости</a:t>
+            </a:r>
+          </a:p>
+        </p:txBody>
+      </p:sp>
+      <p:sp>
+        <p:nvSpPr>
+          <p:cNvPr id="7" name="Текст 2"/>
+          <p:cNvSpPr txBox="1"/>
+          <p:nvPr/>
+        </p:nvSpPr>
+        <p:spPr>
+          <a:xfrm>
+            <a:off x="914400" y="3993022"/>
+            <a:ext cx="9144000" cy="1680210"/>
+          </a:xfrm>
+          <a:prstGeom prst="rect">
+            <a:avLst/>
+          </a:prstGeom>
+          <a:noFill/>
+        </p:spPr>
+        <p:txBody>
+          <a:bodyPr wrap="none" lIns="0" tIns="0" rIns="0" bIns="0" anchor="t"/>
+          <a:lstStyle/>
+          <a:p>
+            <a:pPr algn="l">
+              <a:lnSpc>
+                <a:spcPts val="13230"/>
+              </a:lnSpc>
+            </a:pPr>
+            <a:r>
+              <a:rPr sz="14700" b="0" spc="-662">
+                <a:solidFill>
+                  <a:srgbClr val="D73A61"/>
+                </a:solidFill>
+                <a:latin typeface="Gilroy ExtraBold"/>
+                <a:ea typeface="Gilroy ExtraBold"/>
+                <a:cs typeface="Gilroy ExtraBold"/>
+              </a:rPr>
+              <a:t>12 мая</a:t>
+            </a:r>
+          </a:p>
+        </p:txBody>
+      </p:sp>
+      <p:sp>
+        <p:nvSpPr>
+          <p:cNvPr id="8" name="Текст 3"/>
+          <p:cNvSpPr txBox="1"/>
+          <p:nvPr/>
+        </p:nvSpPr>
+        <p:spPr>
+          <a:xfrm>
+            <a:off x="914400" y="5790262"/>
+            <a:ext cx="9144000" cy="822959"/>
+          </a:xfrm>
+          <a:prstGeom prst="rect">
+            <a:avLst/>
+          </a:prstGeom>
+          <a:noFill/>
+        </p:spPr>
+        <p:txBody>
+          <a:bodyPr wrap="none" lIns="0" tIns="0" rIns="0" bIns="0" anchor="t"/>
+          <a:lstStyle/>
+          <a:p>
+            <a:pPr algn="l">
+              <a:lnSpc>
+                <a:spcPts val="6480"/>
+              </a:lnSpc>
+            </a:pPr>
+            <a:r>
+              <a:rPr sz="5400" b="1" spc="-108">
+                <a:solidFill>
+                  <a:srgbClr val="1C1A17"/>
+                </a:solidFill>
+                <a:latin typeface="Gilroy"/>
+                <a:ea typeface="Gilroy"/>
+                <a:cs typeface="Gilroy"/>
+              </a:rPr>
+              <a:t>2027 года</a:t>
+            </a:r>
+          </a:p>
+        </p:txBody>
+      </p:sp>
+      <p:sp>
+        <p:nvSpPr>
+          <p:cNvPr id="9" name="Текст 4"/>
+          <p:cNvSpPr txBox="1"/>
+          <p:nvPr/>
+        </p:nvSpPr>
+        <p:spPr>
+          <a:xfrm>
+            <a:off x="914400" y="7046609"/>
+            <a:ext cx="9144000" cy="1383030"/>
+          </a:xfrm>
+          <a:prstGeom prst="rect">
+            <a:avLst/>
+          </a:prstGeom>
+          <a:noFill/>
+        </p:spPr>
+        <p:txBody>
+          <a:bodyPr wrap="none" lIns="0" tIns="0" rIns="0" bIns="0" anchor="t"/>
+          <a:lstStyle/>
+          <a:p>
+            <a:pPr algn="l">
+              <a:lnSpc>
+                <a:spcPts val="5445"/>
+              </a:lnSpc>
+            </a:pPr>
+            <a:r>
+              <a:rPr sz="4950" b="0" spc="-99">
+                <a:solidFill>
+                  <a:srgbClr val="1C1A17"/>
+                </a:solidFill>
+                <a:latin typeface="Gilroy SemiBold"/>
+                <a:ea typeface="Gilroy SemiBold"/>
+                <a:cs typeface="Gilroy SemiBold"/>
+              </a:rPr>
+              <a:t>Здесь заголовок</a:t>
+            </a:r>
+            <a:r>
+              <a:t/>
+            </a:r>
+            <a:br/>
+            <a:r>
+              <a:rPr sz="4950" b="0" spc="-99">
+                <a:solidFill>
+                  <a:srgbClr val="1C1A17"/>
+                </a:solidFill>
+                <a:latin typeface="Gilroy SemiBold"/>
+                <a:ea typeface="Gilroy SemiBold"/>
+                <a:cs typeface="Gilroy SemiBold"/>
+              </a:rPr>
+              <a:t>срочной новости</a:t>
+            </a:r>
+          </a:p>
+        </p:txBody>
+      </p:sp>
+    </p:spTree>
+  </p:cSld>
+  <p:clrMapOvr>
+    <a:masterClrMapping/>
+  </p:clrMapOvr>
+</p:sld>
+</file>
+
+<file path=ppt/slides/slide12.xml><?xml version="1.0" encoding="utf-8"?>
+<p:sld xmlns:a="http://schemas.openxmlformats.org/drawingml/2006/main" xmlns:r="http://schemas.openxmlformats.org/officeDocument/2006/relationships" xmlns:p="http://schemas.openxmlformats.org/presentationml/2006/main">
+  <p:cSld name="U5-urgent-newspaper">
+    <p:spTree>
+      <p:nvGrpSpPr>
+        <p:cNvPr id="1" name=""/>
+        <p:cNvGrpSpPr/>
+        <p:nvPr/>
+      </p:nvGrpSpPr>
+      <p:grpSpPr>
+        <a:xfrm>
+          <a:off x="0" y="0"/>
+          <a:ext cx="0" cy="0"/>
+          <a:chOff x="0" y="0"/>
+          <a:chExt cx="0" cy="0"/>
+        </a:xfrm>
+      </p:grpSpPr>
+      <p:pic>
+        <p:nvPicPr>
+          <p:cNvPr id="4" name="Фон (картинка, без текста)" descr="U5-urgent-newspaper-bg.png"/>
+          <p:cNvPicPr>
+            <a:picLocks noChangeAspect="1"/>
+          </p:cNvPicPr>
+          <p:nvPr/>
+        </p:nvPicPr>
+        <p:blipFill>
+          <a:blip r:embed="rId3"/>
+          <a:stretch>
+            <a:fillRect/>
+          </a:stretch>
+        </p:blipFill>
+        <p:spPr>
+          <a:xfrm>
+            <a:off x="0" y="0"/>
+            <a:ext cx="10287000" cy="10287000"/>
+          </a:xfrm>
+          <a:prstGeom prst="rect">
+            <a:avLst/>
+          </a:prstGeom>
+        </p:spPr>
+      </p:pic>
+      <p:pic>
+        <p:nvPicPr>
+          <p:cNvPr id="5" name="Логотип" descr="logo-full.png"/>
+          <p:cNvPicPr>
+            <a:picLocks noChangeAspect="1"/>
+          </p:cNvPicPr>
+          <p:nvPr/>
+        </p:nvPicPr>
+        <p:blipFill>
+          <a:blip r:embed="rId4"/>
+          <a:stretch>
+            <a:fillRect/>
+          </a:stretch>
+        </p:blipFill>
+        <p:spPr>
+          <a:xfrm>
+            <a:off x="914400" y="914400"/>
+            <a:ext cx="1905000" cy="1162942"/>
+          </a:xfrm>
+          <a:prstGeom prst="rect">
+            <a:avLst/>
+          </a:prstGeom>
+        </p:spPr>
+      </p:pic>
+      <p:sp>
+        <p:nvSpPr>
+          <p:cNvPr id="6" name="Текст 1"/>
+          <p:cNvSpPr txBox="1"/>
+          <p:nvPr/>
+        </p:nvSpPr>
+        <p:spPr>
+          <a:xfrm>
+            <a:off x="1276350" y="2819400"/>
+            <a:ext cx="8782050" cy="342900"/>
+          </a:xfrm>
+          <a:prstGeom prst="rect">
+            <a:avLst/>
+          </a:prstGeom>
+          <a:noFill/>
+        </p:spPr>
+        <p:txBody>
+          <a:bodyPr wrap="none" lIns="0" tIns="0" rIns="0" bIns="0" anchor="t"/>
+          <a:lstStyle/>
+          <a:p>
+            <a:pPr algn="l">
+              <a:lnSpc>
+                <a:spcPts val="2700"/>
+              </a:lnSpc>
+            </a:pPr>
+            <a:r>
+              <a:rPr sz="2250" b="1" cap="all" spc="495">
+                <a:solidFill>
+                  <a:srgbClr val="1C1A17"/>
+                </a:solidFill>
+                <a:latin typeface="Gilroy"/>
+                <a:ea typeface="Gilroy"/>
+                <a:cs typeface="Gilroy"/>
+              </a:rPr>
+              <a:t>Срочные новости</a:t>
+            </a:r>
+          </a:p>
+        </p:txBody>
+      </p:sp>
+      <p:sp>
+        <p:nvSpPr>
+          <p:cNvPr id="7" name="Текст 2"/>
+          <p:cNvSpPr txBox="1"/>
+          <p:nvPr/>
+        </p:nvSpPr>
+        <p:spPr>
+          <a:xfrm>
+            <a:off x="914400" y="4000058"/>
+            <a:ext cx="9144000" cy="3696462"/>
+          </a:xfrm>
+          <a:prstGeom prst="rect">
+            <a:avLst/>
+          </a:prstGeom>
+          <a:noFill/>
+        </p:spPr>
+        <p:txBody>
+          <a:bodyPr wrap="none" lIns="0" tIns="0" rIns="0" bIns="0" anchor="t"/>
+          <a:lstStyle/>
+          <a:p>
+            <a:pPr algn="l">
+              <a:lnSpc>
+                <a:spcPts val="9702"/>
+              </a:lnSpc>
+            </a:pPr>
+            <a:r>
+              <a:rPr sz="9900" b="0" spc="-346">
+                <a:solidFill>
+                  <a:srgbClr val="1C1A17"/>
+                </a:solidFill>
+                <a:latin typeface="Gilroy ExtraBold"/>
+                <a:ea typeface="Gilroy ExtraBold"/>
+                <a:cs typeface="Gilroy ExtraBold"/>
+              </a:rPr>
+              <a:t>Здесь будет</a:t>
+            </a:r>
+            <a:r>
+              <a:t/>
+            </a:r>
+            <a:br/>
+            <a:r>
+              <a:rPr sz="9900" b="0" spc="-346">
+                <a:solidFill>
+                  <a:srgbClr val="1C1A17"/>
+                </a:solidFill>
+                <a:latin typeface="Gilroy ExtraBold"/>
+                <a:ea typeface="Gilroy ExtraBold"/>
+                <a:cs typeface="Gilroy ExtraBold"/>
+              </a:rPr>
+              <a:t>заголовок</a:t>
+            </a:r>
+            <a:r>
+              <a:t/>
+            </a:r>
+            <a:br/>
+            <a:r>
+              <a:rPr sz="9900" b="0" spc="-346">
+                <a:solidFill>
+                  <a:srgbClr val="1C1A17"/>
+                </a:solidFill>
+                <a:latin typeface="Gilroy ExtraBold"/>
+                <a:ea typeface="Gilroy ExtraBold"/>
+                <a:cs typeface="Gilroy ExtraBold"/>
+              </a:rPr>
+              <a:t>новости</a:t>
+            </a:r>
+          </a:p>
+        </p:txBody>
+      </p:sp>
+      <p:sp>
+        <p:nvSpPr>
+          <p:cNvPr id="8" name="Текст 3"/>
+          <p:cNvSpPr txBox="1"/>
+          <p:nvPr/>
+        </p:nvSpPr>
+        <p:spPr>
+          <a:xfrm>
+            <a:off x="914400" y="8843962"/>
+            <a:ext cx="9144000" cy="523875"/>
+          </a:xfrm>
+          <a:prstGeom prst="rect">
+            <a:avLst/>
+          </a:prstGeom>
+          <a:noFill/>
+        </p:spPr>
+        <p:txBody>
+          <a:bodyPr wrap="none" lIns="0" tIns="0" rIns="0" bIns="0" anchor="t"/>
+          <a:lstStyle/>
+          <a:p>
+            <a:pPr algn="l">
+              <a:lnSpc>
+                <a:spcPts val="4125"/>
+              </a:lnSpc>
+            </a:pPr>
+            <a:r>
+              <a:rPr sz="3300" b="0" spc="-16">
+                <a:solidFill>
+                  <a:srgbClr val="6A6965"/>
+                </a:solidFill>
+                <a:latin typeface="Gilroy Medium"/>
+                <a:ea typeface="Gilroy Medium"/>
+                <a:cs typeface="Gilroy Medium"/>
+              </a:rPr>
+              <a:t>здесь дата или срок</a:t>
+            </a:r>
+          </a:p>
+        </p:txBody>
+      </p:sp>
+    </p:spTree>
+  </p:cSld>
+  <p:clrMapOvr>
+    <a:masterClrMapping/>
+  </p:clrMapOvr>
+</p:sld>
+</file>
+
+<file path=ppt/slides/slide13.xml><?xml version="1.0" encoding="utf-8"?>
+<p:sld xmlns:a="http://schemas.openxmlformats.org/drawingml/2006/main" xmlns:r="http://schemas.openxmlformats.org/officeDocument/2006/relationships" xmlns:p="http://schemas.openxmlformats.org/presentationml/2006/main">
+  <p:cSld name="U6-urgent-ticker-green">
+    <p:spTree>
+      <p:nvGrpSpPr>
+        <p:cNvPr id="1" name=""/>
+        <p:cNvGrpSpPr/>
+        <p:nvPr/>
+      </p:nvGrpSpPr>
+      <p:grpSpPr>
+        <a:xfrm>
+          <a:off x="0" y="0"/>
+          <a:ext cx="0" cy="0"/>
+          <a:chOff x="0" y="0"/>
+          <a:chExt cx="0" cy="0"/>
+        </a:xfrm>
+      </p:grpSpPr>
+      <p:pic>
+        <p:nvPicPr>
+          <p:cNvPr id="4" name="Фон (картинка, без текста)" descr="U6-urgent-ticker-quiet-bg.png"/>
           <p:cNvPicPr>
             <a:picLocks noChangeAspect="1"/>
           </p:cNvPicPr>
@@ -5076,17 +5475,222 @@
         </p:blipFill>
         <p:spPr>
           <a:xfrm>
-            <a:off x="914400" y="914400"/>
-            <a:ext cx="1905000" cy="1162942"/>
+            <a:off x="0" y="0"/>
+            <a:ext cx="10287000" cy="10287000"/>
           </a:xfrm>
           <a:prstGeom prst="rect">
             <a:avLst/>
           </a:prstGeom>
         </p:spPr>
       </p:pic>
-      <p:sp>
-        <p:nvSpPr>
-          <p:cNvPr id="8" name="Малиновая черта"/>
+      <p:pic>
+        <p:nvPicPr>
+          <p:cNvPr id="5" name="Логотип" descr="logo-full-white.png"/>
+          <p:cNvPicPr>
+            <a:picLocks noChangeAspect="1"/>
+          </p:cNvPicPr>
+          <p:nvPr/>
+        </p:nvPicPr>
+        <p:blipFill>
+          <a:blip r:embed="rId4"/>
+          <a:stretch>
+            <a:fillRect/>
+          </a:stretch>
+        </p:blipFill>
+        <p:spPr>
+          <a:xfrm>
+            <a:off x="914400" y="2195363"/>
+            <a:ext cx="1905000" cy="1162942"/>
+          </a:xfrm>
+          <a:prstGeom prst="rect">
+            <a:avLst/>
+          </a:prstGeom>
+        </p:spPr>
+      </p:pic>
+      <p:sp>
+        <p:nvSpPr>
+          <p:cNvPr id="6" name="Текст 1"/>
+          <p:cNvSpPr txBox="1"/>
+          <p:nvPr/>
+        </p:nvSpPr>
+        <p:spPr>
+          <a:xfrm>
+            <a:off x="914400" y="3833032"/>
+            <a:ext cx="9144000" cy="3380994"/>
+          </a:xfrm>
+          <a:prstGeom prst="rect">
+            <a:avLst/>
+          </a:prstGeom>
+          <a:noFill/>
+        </p:spPr>
+        <p:txBody>
+          <a:bodyPr wrap="none" lIns="0" tIns="0" rIns="0" bIns="0" anchor="t"/>
+          <a:lstStyle/>
+          <a:p>
+            <a:pPr algn="l">
+              <a:lnSpc>
+                <a:spcPts val="8874"/>
+              </a:lnSpc>
+            </a:pPr>
+            <a:r>
+              <a:rPr sz="8700" b="1" spc="-261">
+                <a:solidFill>
+                  <a:srgbClr val="FFFFFF"/>
+                </a:solidFill>
+                <a:latin typeface="Gilroy"/>
+                <a:ea typeface="Gilroy"/>
+                <a:cs typeface="Gilroy"/>
+              </a:rPr>
+              <a:t>Здесь будет</a:t>
+            </a:r>
+            <a:r>
+              <a:t/>
+            </a:r>
+            <a:br/>
+            <a:r>
+              <a:rPr sz="8700" b="1" spc="-261">
+                <a:solidFill>
+                  <a:srgbClr val="FFFFFF"/>
+                </a:solidFill>
+                <a:latin typeface="Gilroy"/>
+                <a:ea typeface="Gilroy"/>
+                <a:cs typeface="Gilroy"/>
+              </a:rPr>
+              <a:t>заголовок</a:t>
+            </a:r>
+            <a:r>
+              <a:t/>
+            </a:r>
+            <a:br/>
+            <a:r>
+              <a:rPr sz="8700" b="1" spc="-261">
+                <a:solidFill>
+                  <a:srgbClr val="FFFFFF"/>
+                </a:solidFill>
+                <a:latin typeface="Gilroy"/>
+                <a:ea typeface="Gilroy"/>
+                <a:cs typeface="Gilroy"/>
+              </a:rPr>
+              <a:t>новости</a:t>
+            </a:r>
+          </a:p>
+        </p:txBody>
+      </p:sp>
+      <p:sp>
+        <p:nvSpPr>
+          <p:cNvPr id="7" name="Текст 2"/>
+          <p:cNvSpPr txBox="1"/>
+          <p:nvPr/>
+        </p:nvSpPr>
+        <p:spPr>
+          <a:xfrm>
+            <a:off x="914400" y="7541091"/>
+            <a:ext cx="9144000" cy="548640"/>
+          </a:xfrm>
+          <a:prstGeom prst="rect">
+            <a:avLst/>
+          </a:prstGeom>
+          <a:noFill/>
+        </p:spPr>
+        <p:txBody>
+          <a:bodyPr wrap="none" lIns="0" tIns="0" rIns="0" bIns="0" anchor="t"/>
+          <a:lstStyle/>
+          <a:p>
+            <a:pPr algn="l">
+              <a:lnSpc>
+                <a:spcPts val="4320"/>
+              </a:lnSpc>
+            </a:pPr>
+            <a:r>
+              <a:rPr sz="3600" b="0">
+                <a:solidFill>
+                  <a:srgbClr val="BABAB9"/>
+                </a:solidFill>
+                <a:latin typeface="Gilroy Medium"/>
+                <a:ea typeface="Gilroy Medium"/>
+                <a:cs typeface="Gilroy Medium"/>
+              </a:rPr>
+              <a:t>здесь дата или срок</a:t>
+            </a:r>
+          </a:p>
+        </p:txBody>
+      </p:sp>
+    </p:spTree>
+  </p:cSld>
+  <p:clrMapOvr>
+    <a:masterClrMapping/>
+  </p:clrMapOvr>
+</p:sld>
+</file>
+
+<file path=ppt/slides/slide2.xml><?xml version="1.0" encoding="utf-8"?>
+<p:sld xmlns:a="http://schemas.openxmlformats.org/drawingml/2006/main" xmlns:r="http://schemas.openxmlformats.org/officeDocument/2006/relationships" xmlns:p="http://schemas.openxmlformats.org/presentationml/2006/main">
+  <p:cSld name="V13-photo-hero-question">
+    <p:spTree>
+      <p:nvGrpSpPr>
+        <p:cNvPr id="1" name=""/>
+        <p:cNvGrpSpPr/>
+        <p:nvPr/>
+      </p:nvGrpSpPr>
+      <p:grpSpPr>
+        <a:xfrm>
+          <a:off x="0" y="0"/>
+          <a:ext cx="0" cy="0"/>
+          <a:chOff x="0" y="0"/>
+          <a:chExt cx="0" cy="0"/>
+        </a:xfrm>
+      </p:grpSpPr>
+      <p:pic>
+        <p:nvPicPr>
+          <p:cNvPr id="4" name="Фон (картинка, без текста)" descr="V13-photo-hero-question-bg.png"/>
+          <p:cNvPicPr>
+            <a:picLocks noChangeAspect="1"/>
+          </p:cNvPicPr>
+          <p:nvPr/>
+        </p:nvPicPr>
+        <p:blipFill>
+          <a:blip r:embed="rId3"/>
+          <a:stretch>
+            <a:fillRect/>
+          </a:stretch>
+        </p:blipFill>
+        <p:spPr>
+          <a:xfrm>
+            <a:off x="0" y="0"/>
+            <a:ext cx="10287000" cy="10287000"/>
+          </a:xfrm>
+          <a:prstGeom prst="rect">
+            <a:avLst/>
+          </a:prstGeom>
+        </p:spPr>
+      </p:pic>
+      <p:pic>
+        <p:nvPicPr>
+          <p:cNvPr id="5" name="Логотип" descr="logo-full-white.png"/>
+          <p:cNvPicPr>
+            <a:picLocks noChangeAspect="1"/>
+          </p:cNvPicPr>
+          <p:nvPr/>
+        </p:nvPicPr>
+        <p:blipFill>
+          <a:blip r:embed="rId4"/>
+          <a:stretch>
+            <a:fillRect/>
+          </a:stretch>
+        </p:blipFill>
+        <p:spPr>
+          <a:xfrm>
+            <a:off x="914400" y="914400"/>
+            <a:ext cx="1905000" cy="1162942"/>
+          </a:xfrm>
+          <a:prstGeom prst="rect">
+            <a:avLst/>
+          </a:prstGeom>
+        </p:spPr>
+      </p:pic>
+      <p:sp>
+        <p:nvSpPr>
+          <p:cNvPr id="6" name="Малиновая черта"/>
           <p:cNvSpPr/>
           <p:nvPr/>
         </p:nvSpPr>
@@ -5125,19 +5729,20 @@
           <a:lstStyle/>
           <a:p>
             <a:pPr algn="ctr"/>
-          </a:p>
-        </p:txBody>
-      </p:sp>
-      <p:sp>
-        <p:nvSpPr>
-          <p:cNvPr id="9" name="Текст 1"/>
+            <a:endParaRPr/>
+          </a:p>
+        </p:txBody>
+      </p:sp>
+      <p:sp>
+        <p:nvSpPr>
+          <p:cNvPr id="7" name="Текст 1"/>
           <p:cNvSpPr txBox="1"/>
           <p:nvPr/>
         </p:nvSpPr>
         <p:spPr>
           <a:xfrm>
-            <a:off x="914400" y="2686050"/>
-            <a:ext cx="9144000" cy="1885950"/>
+            <a:off x="914400" y="2678430"/>
+            <a:ext cx="9144000" cy="1173480"/>
           </a:xfrm>
           <a:prstGeom prst="rect">
             <a:avLst/>
@@ -5145,59 +5750,199 @@
           <a:noFill/>
         </p:spPr>
         <p:txBody>
-          <a:bodyPr wrap="none" lIns="0" rIns="0" tIns="0" bIns="0" anchor="t"/>
+          <a:bodyPr wrap="none" lIns="0" tIns="0" rIns="0" bIns="0" anchor="t"/>
           <a:lstStyle/>
           <a:p>
             <a:pPr algn="l">
               <a:lnSpc>
-                <a:spcPts val="4950"/>
+                <a:spcPts val="4620"/>
               </a:lnSpc>
             </a:pPr>
             <a:r>
-              <a:rPr b="0" sz="4500" spc="-90">
-                <a:solidFill>
-                  <a:srgbClr val="1C1A17"/>
+              <a:rPr sz="4200" b="0" spc="-84" dirty="0" err="1">
+                <a:solidFill>
+                  <a:srgbClr val="FFFFFF"/>
                 </a:solidFill>
                 <a:latin typeface="Gilroy SemiBold"/>
                 <a:ea typeface="Gilroy SemiBold"/>
                 <a:cs typeface="Gilroy SemiBold"/>
               </a:rPr>
-              <a:t>Здесь заголовок</a:t>
-            </a:r>
-            <a:br/>
-            <a:r>
-              <a:rPr b="0" sz="4500" spc="-90">
-                <a:solidFill>
-                  <a:srgbClr val="1C1A17"/>
+              <a:t>Контекст</a:t>
+            </a:r>
+            <a:r>
+              <a:rPr sz="4200" b="0" spc="-84" dirty="0">
+                <a:solidFill>
+                  <a:srgbClr val="FFFFFF"/>
                 </a:solidFill>
                 <a:latin typeface="Gilroy SemiBold"/>
                 <a:ea typeface="Gilroy SemiBold"/>
                 <a:cs typeface="Gilroy SemiBold"/>
               </a:rPr>
-              <a:t>в три строки, последняя</a:t>
-            </a:r>
-            <a:br/>
-            <a:r>
-              <a:rPr b="0" sz="4500" spc="-90">
-                <a:solidFill>
-                  <a:srgbClr val="1C1A17"/>
+              <a:t> в </a:t>
+            </a:r>
+            <a:r>
+              <a:rPr sz="4200" b="0" spc="-84" dirty="0" err="1">
+                <a:solidFill>
+                  <a:srgbClr val="FFFFFF"/>
                 </a:solidFill>
                 <a:latin typeface="Gilroy SemiBold"/>
                 <a:ea typeface="Gilroy SemiBold"/>
                 <a:cs typeface="Gilroy SemiBold"/>
               </a:rPr>
-              <a:t>строка с </a:t>
-            </a:r>
-            <a:r>
-              <a:rPr b="0" sz="4500" spc="-90">
-                <a:solidFill>
-                  <a:srgbClr val="D73A61"/>
+              <a:t>две</a:t>
+            </a:r>
+            <a:r>
+              <a:rPr sz="4200" b="0" spc="-84" dirty="0">
+                <a:solidFill>
+                  <a:srgbClr val="FFFFFF"/>
                 </a:solidFill>
                 <a:latin typeface="Gilroy SemiBold"/>
                 <a:ea typeface="Gilroy SemiBold"/>
                 <a:cs typeface="Gilroy SemiBold"/>
               </a:rPr>
-              <a:t>акцентом</a:t>
+              <a:t> </a:t>
+            </a:r>
+            <a:r>
+              <a:rPr sz="4200" b="0" spc="-84" dirty="0" err="1">
+                <a:solidFill>
+                  <a:srgbClr val="FFFFFF"/>
+                </a:solidFill>
+                <a:latin typeface="Gilroy SemiBold"/>
+                <a:ea typeface="Gilroy SemiBold"/>
+                <a:cs typeface="Gilroy SemiBold"/>
+              </a:rPr>
+              <a:t>строки</a:t>
+            </a:r>
+            <a:r>
+              <a:rPr sz="4200" b="0" spc="-84" dirty="0">
+                <a:solidFill>
+                  <a:srgbClr val="FFFFFF"/>
+                </a:solidFill>
+                <a:latin typeface="Gilroy SemiBold"/>
+                <a:ea typeface="Gilroy SemiBold"/>
+                <a:cs typeface="Gilroy SemiBold"/>
+              </a:rPr>
+              <a:t>,</a:t>
+            </a:r>
+            <a:r>
+              <a:rPr dirty="0"/>
+              <a:t/>
+            </a:r>
+            <a:br>
+              <a:rPr dirty="0"/>
+            </a:br>
+            <a:r>
+              <a:rPr sz="4200" b="0" spc="-84" dirty="0" err="1">
+                <a:solidFill>
+                  <a:srgbClr val="FFFFFF"/>
+                </a:solidFill>
+                <a:latin typeface="Gilroy SemiBold"/>
+                <a:ea typeface="Gilroy SemiBold"/>
+                <a:cs typeface="Gilroy SemiBold"/>
+              </a:rPr>
+              <a:t>коротко</a:t>
+            </a:r>
+            <a:r>
+              <a:rPr sz="4200" b="0" spc="-84" dirty="0">
+                <a:solidFill>
+                  <a:srgbClr val="FFFFFF"/>
+                </a:solidFill>
+                <a:latin typeface="Gilroy SemiBold"/>
+                <a:ea typeface="Gilroy SemiBold"/>
+                <a:cs typeface="Gilroy SemiBold"/>
+              </a:rPr>
+              <a:t> и </a:t>
+            </a:r>
+            <a:r>
+              <a:rPr sz="4200" b="0" spc="-84" dirty="0" err="1">
+                <a:solidFill>
+                  <a:srgbClr val="FFFFFF"/>
+                </a:solidFill>
+                <a:latin typeface="Gilroy SemiBold"/>
+                <a:ea typeface="Gilroy SemiBold"/>
+                <a:cs typeface="Gilroy SemiBold"/>
+              </a:rPr>
+              <a:t>ясно</a:t>
+            </a:r>
+            <a:endParaRPr sz="4200" b="0" spc="-84" dirty="0">
+              <a:solidFill>
+                <a:srgbClr val="FFFFFF"/>
+              </a:solidFill>
+              <a:latin typeface="Gilroy SemiBold"/>
+              <a:ea typeface="Gilroy SemiBold"/>
+              <a:cs typeface="Gilroy SemiBold"/>
+            </a:endParaRPr>
+          </a:p>
+        </p:txBody>
+      </p:sp>
+      <p:sp>
+        <p:nvSpPr>
+          <p:cNvPr id="8" name="Текст 2"/>
+          <p:cNvSpPr txBox="1"/>
+          <p:nvPr/>
+        </p:nvSpPr>
+        <p:spPr>
+          <a:xfrm>
+            <a:off x="914400" y="4117595"/>
+            <a:ext cx="9144000" cy="1248727"/>
+          </a:xfrm>
+          <a:prstGeom prst="rect">
+            <a:avLst/>
+          </a:prstGeom>
+          <a:noFill/>
+        </p:spPr>
+        <p:txBody>
+          <a:bodyPr wrap="none" lIns="0" tIns="0" rIns="0" bIns="0" anchor="t"/>
+          <a:lstStyle/>
+          <a:p>
+            <a:pPr algn="l">
+              <a:lnSpc>
+                <a:spcPts val="9832"/>
+              </a:lnSpc>
+            </a:pPr>
+            <a:r>
+              <a:rPr sz="10350" b="0" spc="-362" dirty="0" err="1">
+                <a:solidFill>
+                  <a:srgbClr val="EA4C74"/>
+                </a:solidFill>
+                <a:latin typeface="Gilroy ExtraBold"/>
+                <a:ea typeface="Gilroy ExtraBold"/>
+                <a:cs typeface="Gilroy ExtraBold"/>
+              </a:rPr>
+              <a:t>Тут</a:t>
+            </a:r>
+            <a:r>
+              <a:rPr sz="10350" b="0" spc="-362" dirty="0">
+                <a:solidFill>
+                  <a:srgbClr val="EA4C74"/>
+                </a:solidFill>
+                <a:latin typeface="Gilroy ExtraBold"/>
+                <a:ea typeface="Gilroy ExtraBold"/>
+                <a:cs typeface="Gilroy ExtraBold"/>
+              </a:rPr>
+              <a:t> </a:t>
+            </a:r>
+            <a:r>
+              <a:rPr sz="10350" b="0" spc="-362" dirty="0" err="1">
+                <a:solidFill>
+                  <a:srgbClr val="EA4C74"/>
+                </a:solidFill>
+                <a:latin typeface="Gilroy ExtraBold"/>
+                <a:ea typeface="Gilroy ExtraBold"/>
+                <a:cs typeface="Gilroy ExtraBold"/>
+              </a:rPr>
+              <a:t>вопрос</a:t>
+            </a:r>
+            <a:r>
+              <a:rPr sz="10350" b="0" spc="-362" dirty="0">
+                <a:solidFill>
+                  <a:srgbClr val="EA4C74"/>
+                </a:solidFill>
+                <a:latin typeface="Gilroy ExtraBold"/>
+                <a:ea typeface="Gilroy ExtraBold"/>
+                <a:cs typeface="Gilroy ExtraBold"/>
+              </a:rPr>
+              <a:t>?</a:t>
             </a:r>
           </a:p>
         </p:txBody>
@@ -5210,73 +5955,30 @@
 </p:sld>
 </file>
 
-<file path=ppt/slides/slide11.xml><?xml version="1.0" encoding="utf-8"?>
-<p:sld xmlns:a="http://schemas.openxmlformats.org/drawingml/2006/main" xmlns:p="http://schemas.openxmlformats.org/presentationml/2006/main" xmlns:r="http://schemas.openxmlformats.org/officeDocument/2006/relationships">
-  <p:cSld name="V12-word-graphite">
+<file path=ppt/slides/slide3.xml><?xml version="1.0" encoding="utf-8"?>
+<p:sld xmlns:a="http://schemas.openxmlformats.org/drawingml/2006/main" xmlns:r="http://schemas.openxmlformats.org/officeDocument/2006/relationships" xmlns:p="http://schemas.openxmlformats.org/presentationml/2006/main">
+  <p:cSld name="V02-news-graphite">
     <p:spTree>
       <p:nvGrpSpPr>
         <p:cNvPr id="1" name=""/>
         <p:cNvGrpSpPr/>
         <p:nvPr/>
       </p:nvGrpSpPr>
-      <p:grpSpPr/>
-      <p:sp>
-        <p:nvSpPr>
-          <p:cNvPr id="2" name="Picture Placeholder 1"/>
-          <p:cNvSpPr>
-            <a:spLocks noGrp="1"/>
-          </p:cNvSpPr>
-          <p:nvPr>
-            <p:ph type="pic" idx="10"/>
-          </p:nvPr>
-        </p:nvSpPr>
-        <p:spPr/>
-      </p:sp>
-      <p:sp>
-        <p:nvSpPr>
-          <p:cNvPr id="3" name="Picture Placeholder 2"/>
-          <p:cNvSpPr>
-            <a:spLocks noGrp="1"/>
-          </p:cNvSpPr>
-          <p:nvPr>
-            <p:ph type="pic" idx="11"/>
-          </p:nvPr>
-        </p:nvSpPr>
-        <p:spPr/>
-      </p:sp>
+      <p:grpSpPr>
+        <a:xfrm>
+          <a:off x="0" y="0"/>
+          <a:ext cx="0" cy="0"/>
+          <a:chOff x="0" y="0"/>
+          <a:chExt cx="0" cy="0"/>
+        </a:xfrm>
+      </p:grpSpPr>
       <p:pic>
         <p:nvPicPr>
-          <p:cNvPr id="4" name="Фон (картинка, без текста)" descr="V12-word-graphite-bg.png"/>
+          <p:cNvPr id="4" name="Фон (картинка, без текста)" descr="V02-news-graphite-bg.png"/>
           <p:cNvPicPr>
             <a:picLocks noChangeAspect="1"/>
           </p:cNvPicPr>
           <p:nvPr/>
-        </p:nvPicPr>
-        <p:blipFill>
-          <a:blip r:embed="rId2"/>
-          <a:stretch>
-            <a:fillRect/>
-          </a:stretch>
-        </p:blipFill>
-        <p:spPr>
-          <a:xfrm>
-            <a:off x="0" y="0"/>
-            <a:ext cx="10287000" cy="10287000"/>
-          </a:xfrm>
-          <a:prstGeom prst="rect">
-            <a:avLst/>
-          </a:prstGeom>
-        </p:spPr>
-      </p:pic>
-      <p:pic>
-        <p:nvPicPr>
-          <p:cNvPr id="5" name="Иконка (водяной знак) (заменить: Изменить рисунок)" descr="V12-word-graphite-icon.png"/>
-          <p:cNvPicPr>
-            <a:picLocks noChangeAspect="1"/>
-          </p:cNvPicPr>
-          <p:nvPr>
-            <p:ph type="pic" idx="11"/>
-          </p:nvPr>
         </p:nvPicPr>
         <p:blipFill>
           <a:blip r:embed="rId3"/>
@@ -5286,8 +5988,8 @@
         </p:blipFill>
         <p:spPr>
           <a:xfrm>
-            <a:off x="5524500" y="5810250"/>
-            <a:ext cx="6667500" cy="6667500"/>
+            <a:off x="0" y="0"/>
+            <a:ext cx="10287000" cy="10287000"/>
           </a:xfrm>
           <a:prstGeom prst="rect">
             <a:avLst/>
@@ -5296,7 +5998,7 @@
       </p:pic>
       <p:pic>
         <p:nvPicPr>
-          <p:cNvPr id="6" name="Логотип" descr="logo-full-white.png"/>
+          <p:cNvPr id="5" name="Логотип" descr="logo-full-white.png"/>
           <p:cNvPicPr>
             <a:picLocks noChangeAspect="1"/>
           </p:cNvPicPr>
@@ -5320,13 +6022,13 @@
       </p:pic>
       <p:sp>
         <p:nvSpPr>
-          <p:cNvPr id="7" name="Малиновая черта"/>
+          <p:cNvPr id="6" name="Малиновая черта"/>
           <p:cNvSpPr/>
           <p:nvPr/>
         </p:nvSpPr>
         <p:spPr>
           <a:xfrm>
-            <a:off x="914400" y="3434729"/>
+            <a:off x="914400" y="3155305"/>
             <a:ext cx="609600" cy="38100"/>
           </a:xfrm>
           <a:prstGeom prst="rect">
@@ -5359,19 +6061,20 @@
           <a:lstStyle/>
           <a:p>
             <a:pPr algn="ctr"/>
-          </a:p>
-        </p:txBody>
-      </p:sp>
-      <p:sp>
-        <p:nvSpPr>
-          <p:cNvPr id="8" name="Текст 1"/>
+            <a:endParaRPr/>
+          </a:p>
+        </p:txBody>
+      </p:sp>
+      <p:sp>
+        <p:nvSpPr>
+          <p:cNvPr id="7" name="Текст 1"/>
           <p:cNvSpPr txBox="1"/>
           <p:nvPr/>
         </p:nvSpPr>
         <p:spPr>
           <a:xfrm>
-            <a:off x="914400" y="3750007"/>
-            <a:ext cx="9144000" cy="760095"/>
+            <a:off x="914400" y="3477250"/>
+            <a:ext cx="9144000" cy="251460"/>
           </a:xfrm>
           <a:prstGeom prst="rect">
             <a:avLst/>
@@ -5379,38 +6082,90 @@
           <a:noFill/>
         </p:spPr>
         <p:txBody>
-          <a:bodyPr wrap="none" lIns="0" rIns="0" tIns="0" bIns="0" anchor="t"/>
+          <a:bodyPr wrap="none" lIns="0" tIns="0" rIns="0" bIns="0" anchor="t"/>
           <a:lstStyle/>
           <a:p>
             <a:pPr algn="l">
               <a:lnSpc>
-                <a:spcPts val="5984"/>
+                <a:spcPts val="1979"/>
               </a:lnSpc>
             </a:pPr>
             <a:r>
-              <a:rPr b="0" sz="5700" spc="-114">
-                <a:solidFill>
-                  <a:srgbClr val="FFFFFF"/>
-                </a:solidFill>
-                <a:latin typeface="Gilroy SemiBold"/>
-                <a:ea typeface="Gilroy SemiBold"/>
-                <a:cs typeface="Gilroy SemiBold"/>
-              </a:rPr>
-              <a:t>Рыбный заголовок</a:t>
-            </a:r>
-          </a:p>
-        </p:txBody>
-      </p:sp>
-      <p:sp>
-        <p:nvSpPr>
-          <p:cNvPr id="9" name="Текст 2"/>
+              <a:rPr sz="1650" b="0" cap="all" spc="231" dirty="0" err="1">
+                <a:solidFill>
+                  <a:srgbClr val="D2BE8C"/>
+                </a:solidFill>
+                <a:latin typeface="Gilroy Medium"/>
+                <a:ea typeface="Gilroy Medium"/>
+                <a:cs typeface="Gilroy Medium"/>
+              </a:rPr>
+              <a:t>Рубрика</a:t>
+            </a:r>
+            <a:r>
+              <a:rPr sz="1650" b="0" cap="all" spc="231" dirty="0">
+                <a:solidFill>
+                  <a:srgbClr val="D2BE8C"/>
+                </a:solidFill>
+                <a:latin typeface="Gilroy Medium"/>
+                <a:ea typeface="Gilroy Medium"/>
+                <a:cs typeface="Gilroy Medium"/>
+              </a:rPr>
+              <a:t> </a:t>
+            </a:r>
+            <a:r>
+              <a:rPr sz="1650" b="0" cap="all" spc="231" dirty="0" err="1">
+                <a:solidFill>
+                  <a:srgbClr val="D2BE8C"/>
+                </a:solidFill>
+                <a:latin typeface="Gilroy Medium"/>
+                <a:ea typeface="Gilroy Medium"/>
+                <a:cs typeface="Gilroy Medium"/>
+              </a:rPr>
+              <a:t>или</a:t>
+            </a:r>
+            <a:r>
+              <a:rPr sz="1650" b="0" cap="all" spc="231" dirty="0">
+                <a:solidFill>
+                  <a:srgbClr val="D2BE8C"/>
+                </a:solidFill>
+                <a:latin typeface="Gilroy Medium"/>
+                <a:ea typeface="Gilroy Medium"/>
+                <a:cs typeface="Gilroy Medium"/>
+              </a:rPr>
+              <a:t> </a:t>
+            </a:r>
+            <a:r>
+              <a:rPr sz="1650" b="0" cap="all" spc="231" dirty="0" err="1">
+                <a:solidFill>
+                  <a:srgbClr val="D2BE8C"/>
+                </a:solidFill>
+                <a:latin typeface="Gilroy Medium"/>
+                <a:ea typeface="Gilroy Medium"/>
+                <a:cs typeface="Gilroy Medium"/>
+              </a:rPr>
+              <a:t>тема</a:t>
+            </a:r>
+            <a:endParaRPr sz="1650" b="0" cap="all" spc="231" dirty="0">
+              <a:solidFill>
+                <a:srgbClr val="D2BE8C"/>
+              </a:solidFill>
+              <a:latin typeface="Gilroy Medium"/>
+              <a:ea typeface="Gilroy Medium"/>
+              <a:cs typeface="Gilroy Medium"/>
+            </a:endParaRPr>
+          </a:p>
+        </p:txBody>
+      </p:sp>
+      <p:sp>
+        <p:nvSpPr>
+          <p:cNvPr id="8" name="Текст 2"/>
           <p:cNvSpPr txBox="1"/>
           <p:nvPr/>
         </p:nvSpPr>
         <p:spPr>
           <a:xfrm>
-            <a:off x="914400" y="4671807"/>
-            <a:ext cx="9144000" cy="2457450"/>
+            <a:off x="914400" y="4002268"/>
+            <a:ext cx="9144000" cy="3090672"/>
           </a:xfrm>
           <a:prstGeom prst="rect">
             <a:avLst/>
@@ -5418,38 +6173,170 @@
           <a:noFill/>
         </p:spPr>
         <p:txBody>
-          <a:bodyPr wrap="none" lIns="0" rIns="0" tIns="0" bIns="0" anchor="t"/>
+          <a:bodyPr wrap="none" lIns="0" tIns="0" rIns="0" bIns="0" anchor="t"/>
           <a:lstStyle/>
           <a:p>
             <a:pPr algn="l">
               <a:lnSpc>
-                <a:spcPts val="19350"/>
+                <a:spcPts val="8112"/>
               </a:lnSpc>
             </a:pPr>
             <a:r>
-              <a:rPr b="0" sz="22500" spc="-900">
-                <a:solidFill>
-                  <a:srgbClr val="EA4C74"/>
-                </a:solidFill>
-                <a:latin typeface="Gilroy ExtraBold"/>
-                <a:ea typeface="Gilroy ExtraBold"/>
-                <a:cs typeface="Gilroy ExtraBold"/>
-              </a:rPr>
-              <a:t>2099</a:t>
-            </a:r>
-          </a:p>
-        </p:txBody>
-      </p:sp>
-      <p:sp>
-        <p:nvSpPr>
-          <p:cNvPr id="10" name="Текст 3"/>
+              <a:rPr sz="7800" b="0" spc="-156" dirty="0" err="1">
+                <a:solidFill>
+                  <a:srgbClr val="FFFFFF"/>
+                </a:solidFill>
+                <a:latin typeface="Gilroy SemiBold"/>
+                <a:ea typeface="Gilroy SemiBold"/>
+                <a:cs typeface="Gilroy SemiBold"/>
+              </a:rPr>
+              <a:t>Здесь</a:t>
+            </a:r>
+            <a:r>
+              <a:rPr sz="7800" b="0" spc="-156" dirty="0">
+                <a:solidFill>
+                  <a:srgbClr val="FFFFFF"/>
+                </a:solidFill>
+                <a:latin typeface="Gilroy SemiBold"/>
+                <a:ea typeface="Gilroy SemiBold"/>
+                <a:cs typeface="Gilroy SemiBold"/>
+              </a:rPr>
+              <a:t> </a:t>
+            </a:r>
+            <a:r>
+              <a:rPr sz="7800" b="0" spc="-156" dirty="0" err="1">
+                <a:solidFill>
+                  <a:srgbClr val="FFFFFF"/>
+                </a:solidFill>
+                <a:latin typeface="Gilroy SemiBold"/>
+                <a:ea typeface="Gilroy SemiBold"/>
+                <a:cs typeface="Gilroy SemiBold"/>
+              </a:rPr>
+              <a:t>будет</a:t>
+            </a:r>
+            <a:r>
+              <a:rPr dirty="0"/>
+              <a:t/>
+            </a:r>
+            <a:br>
+              <a:rPr dirty="0"/>
+            </a:br>
+            <a:r>
+              <a:rPr sz="7800" b="0" spc="-156" dirty="0" err="1">
+                <a:solidFill>
+                  <a:srgbClr val="FFFFFF"/>
+                </a:solidFill>
+                <a:latin typeface="Gilroy SemiBold"/>
+                <a:ea typeface="Gilroy SemiBold"/>
+                <a:cs typeface="Gilroy SemiBold"/>
+              </a:rPr>
+              <a:t>ваш</a:t>
+            </a:r>
+            <a:r>
+              <a:rPr sz="7800" b="0" spc="-156" dirty="0">
+                <a:solidFill>
+                  <a:srgbClr val="FFFFFF"/>
+                </a:solidFill>
+                <a:latin typeface="Gilroy SemiBold"/>
+                <a:ea typeface="Gilroy SemiBold"/>
+                <a:cs typeface="Gilroy SemiBold"/>
+              </a:rPr>
+              <a:t> </a:t>
+            </a:r>
+            <a:r>
+              <a:rPr sz="7800" b="0" spc="-156" dirty="0" err="1">
+                <a:solidFill>
+                  <a:srgbClr val="FFFFFF"/>
+                </a:solidFill>
+                <a:latin typeface="Gilroy SemiBold"/>
+                <a:ea typeface="Gilroy SemiBold"/>
+                <a:cs typeface="Gilroy SemiBold"/>
+              </a:rPr>
+              <a:t>заголовок</a:t>
+            </a:r>
+            <a:r>
+              <a:rPr dirty="0"/>
+              <a:t/>
+            </a:r>
+            <a:br>
+              <a:rPr dirty="0"/>
+            </a:br>
+            <a:r>
+              <a:rPr sz="7800" b="0" spc="-156" dirty="0" err="1">
+                <a:solidFill>
+                  <a:srgbClr val="FFFFFF"/>
+                </a:solidFill>
+                <a:latin typeface="Gilroy SemiBold"/>
+                <a:ea typeface="Gilroy SemiBold"/>
+                <a:cs typeface="Gilroy SemiBold"/>
+              </a:rPr>
+              <a:t>на</a:t>
+            </a:r>
+            <a:r>
+              <a:rPr sz="7800" b="0" spc="-156" dirty="0">
+                <a:solidFill>
+                  <a:srgbClr val="FFFFFF"/>
+                </a:solidFill>
+                <a:latin typeface="Gilroy SemiBold"/>
+                <a:ea typeface="Gilroy SemiBold"/>
+                <a:cs typeface="Gilroy SemiBold"/>
+              </a:rPr>
+              <a:t> </a:t>
+            </a:r>
+            <a:r>
+              <a:rPr sz="7800" b="0" spc="-156" dirty="0" err="1">
+                <a:solidFill>
+                  <a:srgbClr val="FFFFFF"/>
+                </a:solidFill>
+                <a:latin typeface="Gilroy SemiBold"/>
+                <a:ea typeface="Gilroy SemiBold"/>
+                <a:cs typeface="Gilroy SemiBold"/>
+              </a:rPr>
+              <a:t>три</a:t>
+            </a:r>
+            <a:r>
+              <a:rPr sz="7800" b="0" spc="-156" dirty="0">
+                <a:solidFill>
+                  <a:srgbClr val="FFFFFF"/>
+                </a:solidFill>
+                <a:latin typeface="Gilroy SemiBold"/>
+                <a:ea typeface="Gilroy SemiBold"/>
+                <a:cs typeface="Gilroy SemiBold"/>
+              </a:rPr>
+              <a:t> </a:t>
+            </a:r>
+            <a:r>
+              <a:rPr sz="7800" b="0" spc="-156" dirty="0" err="1">
+                <a:solidFill>
+                  <a:srgbClr val="FFFFFF"/>
+                </a:solidFill>
+                <a:latin typeface="Gilroy SemiBold"/>
+                <a:ea typeface="Gilroy SemiBold"/>
+                <a:cs typeface="Gilroy SemiBold"/>
+              </a:rPr>
+              <a:t>строки</a:t>
+            </a:r>
+            <a:endParaRPr sz="7800" b="0" spc="-156" dirty="0">
+              <a:solidFill>
+                <a:srgbClr val="FFFFFF"/>
+              </a:solidFill>
+              <a:latin typeface="Gilroy SemiBold"/>
+              <a:ea typeface="Gilroy SemiBold"/>
+              <a:cs typeface="Gilroy SemiBold"/>
+            </a:endParaRPr>
+          </a:p>
+        </p:txBody>
+      </p:sp>
+      <p:sp>
+        <p:nvSpPr>
+          <p:cNvPr id="9" name="Текст 3"/>
           <p:cNvSpPr txBox="1"/>
           <p:nvPr/>
         </p:nvSpPr>
         <p:spPr>
           <a:xfrm>
-            <a:off x="914400" y="7352332"/>
-            <a:ext cx="9144000" cy="523875"/>
+            <a:off x="914400" y="7537459"/>
+            <a:ext cx="9144000" cy="617220"/>
           </a:xfrm>
           <a:prstGeom prst="rect">
             <a:avLst/>
@@ -5457,25 +6344,110 @@
           <a:noFill/>
         </p:spPr>
         <p:txBody>
-          <a:bodyPr wrap="none" lIns="0" rIns="0" tIns="0" bIns="0" anchor="t"/>
+          <a:bodyPr wrap="none" lIns="0" tIns="0" rIns="0" bIns="0" anchor="t"/>
           <a:lstStyle/>
           <a:p>
             <a:pPr algn="l">
               <a:lnSpc>
-                <a:spcPts val="4125"/>
+                <a:spcPts val="4859"/>
               </a:lnSpc>
             </a:pPr>
             <a:r>
-              <a:rPr b="0" sz="3300" spc="-16">
-                <a:solidFill>
-                  <a:srgbClr val="B1B1B0"/>
+              <a:rPr sz="4050" b="0" spc="-20" dirty="0">
+                <a:solidFill>
+                  <a:srgbClr val="BABAB9"/>
                 </a:solidFill>
                 <a:latin typeface="Gilroy Medium"/>
                 <a:ea typeface="Gilroy Medium"/>
                 <a:cs typeface="Gilroy Medium"/>
               </a:rPr>
-              <a:t>Подпись под цифрой</a:t>
-            </a:r>
+              <a:t>с </a:t>
+            </a:r>
+            <a:r>
+              <a:rPr sz="4050" b="0" spc="-20" dirty="0" err="1" smtClean="0">
+                <a:solidFill>
+                  <a:srgbClr val="EA4C74"/>
+                </a:solidFill>
+                <a:latin typeface="Gilroy SemiBold"/>
+                <a:ea typeface="Gilroy SemiBold"/>
+                <a:cs typeface="Gilroy SemiBold"/>
+              </a:rPr>
+              <a:t>дат</a:t>
+            </a:r>
+            <a:r>
+              <a:rPr lang="ru-RU" sz="4050" b="0" spc="-20" dirty="0" smtClean="0">
+                <a:solidFill>
+                  <a:srgbClr val="EA4C74"/>
+                </a:solidFill>
+                <a:latin typeface="Gilroy SemiBold"/>
+                <a:ea typeface="Gilroy SemiBold"/>
+                <a:cs typeface="Gilroy SemiBold"/>
+              </a:rPr>
+              <a:t>ой</a:t>
+            </a:r>
+            <a:r>
+              <a:rPr sz="4050" b="0" spc="-20" dirty="0" smtClean="0">
+                <a:solidFill>
+                  <a:srgbClr val="EA4C74"/>
+                </a:solidFill>
+                <a:latin typeface="Gilroy SemiBold"/>
+                <a:ea typeface="Gilroy SemiBold"/>
+                <a:cs typeface="Gilroy SemiBold"/>
+              </a:rPr>
+              <a:t> </a:t>
+            </a:r>
+            <a:r>
+              <a:rPr sz="4050" b="0" spc="-20" dirty="0" err="1">
+                <a:solidFill>
+                  <a:srgbClr val="EA4C74"/>
+                </a:solidFill>
+                <a:latin typeface="Gilroy SemiBold"/>
+                <a:ea typeface="Gilroy SemiBold"/>
+                <a:cs typeface="Gilroy SemiBold"/>
+              </a:rPr>
+              <a:t>или</a:t>
+            </a:r>
+            <a:r>
+              <a:rPr sz="4050" b="0" spc="-20" dirty="0">
+                <a:solidFill>
+                  <a:srgbClr val="EA4C74"/>
+                </a:solidFill>
+                <a:latin typeface="Gilroy SemiBold"/>
+                <a:ea typeface="Gilroy SemiBold"/>
+                <a:cs typeface="Gilroy SemiBold"/>
+              </a:rPr>
+              <a:t> </a:t>
+            </a:r>
+            <a:r>
+              <a:rPr sz="4050" b="0" spc="-20" dirty="0" err="1" smtClean="0">
+                <a:solidFill>
+                  <a:srgbClr val="EA4C74"/>
+                </a:solidFill>
+                <a:latin typeface="Gilroy SemiBold"/>
+                <a:ea typeface="Gilroy SemiBold"/>
+                <a:cs typeface="Gilroy SemiBold"/>
+              </a:rPr>
+              <a:t>срок</a:t>
+            </a:r>
+            <a:r>
+              <a:rPr lang="ru-RU" sz="4050" b="0" spc="-20" dirty="0" smtClean="0">
+                <a:solidFill>
+                  <a:srgbClr val="EA4C74"/>
+                </a:solidFill>
+                <a:latin typeface="Gilroy SemiBold"/>
+                <a:ea typeface="Gilroy SemiBold"/>
+                <a:cs typeface="Gilroy SemiBold"/>
+              </a:rPr>
+              <a:t>ом</a:t>
+            </a:r>
+            <a:endParaRPr sz="4050" b="0" spc="-20" dirty="0">
+              <a:solidFill>
+                <a:srgbClr val="EA4C74"/>
+              </a:solidFill>
+              <a:latin typeface="Gilroy SemiBold"/>
+              <a:ea typeface="Gilroy SemiBold"/>
+              <a:cs typeface="Gilroy SemiBold"/>
+            </a:endParaRPr>
           </a:p>
         </p:txBody>
       </p:sp>
@@ -5487,67 +6459,26 @@
 </p:sld>
 </file>
 
-<file path=ppt/slides/slide12.xml><?xml version="1.0" encoding="utf-8"?>
-<p:sld xmlns:a="http://schemas.openxmlformats.org/drawingml/2006/main" xmlns:p="http://schemas.openxmlformats.org/presentationml/2006/main" xmlns:r="http://schemas.openxmlformats.org/officeDocument/2006/relationships">
-  <p:cSld name="U1-urgent-air-pink">
+<file path=ppt/slides/slide4.xml><?xml version="1.0" encoding="utf-8"?>
+<p:sld xmlns:a="http://schemas.openxmlformats.org/drawingml/2006/main" xmlns:r="http://schemas.openxmlformats.org/officeDocument/2006/relationships" xmlns:p="http://schemas.openxmlformats.org/presentationml/2006/main">
+  <p:cSld name="V14-graphite-hero-question">
     <p:spTree>
       <p:nvGrpSpPr>
         <p:cNvPr id="1" name=""/>
         <p:cNvGrpSpPr/>
         <p:nvPr/>
       </p:nvGrpSpPr>
-      <p:grpSpPr/>
-      <p:sp>
-        <p:nvSpPr>
-          <p:cNvPr id="2" name="Picture Placeholder 1"/>
-          <p:cNvSpPr>
-            <a:spLocks noGrp="1"/>
-          </p:cNvSpPr>
-          <p:nvPr>
-            <p:ph type="pic" idx="10"/>
-          </p:nvPr>
-        </p:nvSpPr>
-        <p:spPr/>
-      </p:sp>
-      <p:sp>
-        <p:nvSpPr>
-          <p:cNvPr id="3" name="Picture Placeholder 2"/>
-          <p:cNvSpPr>
-            <a:spLocks noGrp="1"/>
-          </p:cNvSpPr>
-          <p:nvPr>
-            <p:ph type="pic" idx="11"/>
-          </p:nvPr>
-        </p:nvSpPr>
-        <p:spPr/>
-      </p:sp>
+      <p:grpSpPr>
+        <a:xfrm>
+          <a:off x="0" y="0"/>
+          <a:ext cx="0" cy="0"/>
+          <a:chOff x="0" y="0"/>
+          <a:chExt cx="0" cy="0"/>
+        </a:xfrm>
+      </p:grpSpPr>
       <p:pic>
         <p:nvPicPr>
-          <p:cNvPr id="4" name="Фон (картинка, без текста)" descr="U1-urgent-air-pink-bg.png"/>
-          <p:cNvPicPr>
-            <a:picLocks noChangeAspect="1"/>
-          </p:cNvPicPr>
-          <p:nvPr/>
-        </p:nvPicPr>
-        <p:blipFill>
-          <a:blip r:embed="rId2"/>
-          <a:stretch>
-            <a:fillRect/>
-          </a:stretch>
-        </p:blipFill>
-        <p:spPr>
-          <a:xfrm>
-            <a:off x="0" y="0"/>
-            <a:ext cx="10287000" cy="10287000"/>
-          </a:xfrm>
-          <a:prstGeom prst="rect">
-            <a:avLst/>
-          </a:prstGeom>
-        </p:spPr>
-      </p:pic>
-      <p:pic>
-        <p:nvPicPr>
-          <p:cNvPr id="5" name="Логотип" descr="logo-full-white.png"/>
+          <p:cNvPr id="4" name="Фон (картинка, без текста)" descr="V14-graphite-hero-question-bg.png"/>
           <p:cNvPicPr>
             <a:picLocks noChangeAspect="1"/>
           </p:cNvPicPr>
@@ -5561,213 +6492,6 @@
         </p:blipFill>
         <p:spPr>
           <a:xfrm>
-            <a:off x="914400" y="914400"/>
-            <a:ext cx="1905000" cy="1162942"/>
-          </a:xfrm>
-          <a:prstGeom prst="rect">
-            <a:avLst/>
-          </a:prstGeom>
-        </p:spPr>
-      </p:pic>
-      <p:sp>
-        <p:nvSpPr>
-          <p:cNvPr id="6" name="Текст 1"/>
-          <p:cNvSpPr txBox="1"/>
-          <p:nvPr/>
-        </p:nvSpPr>
-        <p:spPr>
-          <a:xfrm>
-            <a:off x="1314450" y="2633811"/>
-            <a:ext cx="8743950" cy="342900"/>
-          </a:xfrm>
-          <a:prstGeom prst="rect">
-            <a:avLst/>
-          </a:prstGeom>
-          <a:noFill/>
-        </p:spPr>
-        <p:txBody>
-          <a:bodyPr wrap="none" lIns="0" rIns="0" tIns="0" bIns="0" anchor="t"/>
-          <a:lstStyle/>
-          <a:p>
-            <a:pPr algn="l">
-              <a:lnSpc>
-                <a:spcPts val="2700"/>
-              </a:lnSpc>
-            </a:pPr>
-            <a:r>
-              <a:rPr b="1" sz="2250" spc="495" cap="all">
-                <a:solidFill>
-                  <a:srgbClr val="EA4C74"/>
-                </a:solidFill>
-                <a:latin typeface="Gilroy"/>
-                <a:ea typeface="Gilroy"/>
-                <a:cs typeface="Gilroy"/>
-              </a:rPr>
-              <a:t>Срочные новости</a:t>
-            </a:r>
-          </a:p>
-        </p:txBody>
-      </p:sp>
-      <p:sp>
-        <p:nvSpPr>
-          <p:cNvPr id="7" name="Текст 2"/>
-          <p:cNvSpPr txBox="1"/>
-          <p:nvPr/>
-        </p:nvSpPr>
-        <p:spPr>
-          <a:xfrm>
-            <a:off x="914400" y="3717962"/>
-            <a:ext cx="9144000" cy="4005072"/>
-          </a:xfrm>
-          <a:prstGeom prst="rect">
-            <a:avLst/>
-          </a:prstGeom>
-          <a:noFill/>
-        </p:spPr>
-        <p:txBody>
-          <a:bodyPr wrap="none" lIns="0" rIns="0" tIns="0" bIns="0" anchor="t"/>
-          <a:lstStyle/>
-          <a:p>
-            <a:pPr algn="l">
-              <a:lnSpc>
-                <a:spcPts val="10512"/>
-              </a:lnSpc>
-            </a:pPr>
-            <a:r>
-              <a:rPr b="1" sz="10950" spc="-383">
-                <a:solidFill>
-                  <a:srgbClr val="FFFFFF"/>
-                </a:solidFill>
-                <a:latin typeface="Gilroy"/>
-                <a:ea typeface="Gilroy"/>
-                <a:cs typeface="Gilroy"/>
-              </a:rPr>
-              <a:t>Здесь будет</a:t>
-            </a:r>
-            <a:br/>
-            <a:r>
-              <a:rPr b="1" sz="10950" spc="-383">
-                <a:solidFill>
-                  <a:srgbClr val="FFFFFF"/>
-                </a:solidFill>
-                <a:latin typeface="Gilroy"/>
-                <a:ea typeface="Gilroy"/>
-                <a:cs typeface="Gilroy"/>
-              </a:rPr>
-              <a:t>заголовок</a:t>
-            </a:r>
-            <a:br/>
-            <a:r>
-              <a:rPr b="1" sz="10950" spc="-383">
-                <a:solidFill>
-                  <a:srgbClr val="FFFFFF"/>
-                </a:solidFill>
-                <a:latin typeface="Gilroy"/>
-                <a:ea typeface="Gilroy"/>
-                <a:cs typeface="Gilroy"/>
-              </a:rPr>
-              <a:t>новости</a:t>
-            </a:r>
-          </a:p>
-        </p:txBody>
-      </p:sp>
-      <p:sp>
-        <p:nvSpPr>
-          <p:cNvPr id="8" name="Текст 3"/>
-          <p:cNvSpPr txBox="1"/>
-          <p:nvPr/>
-        </p:nvSpPr>
-        <p:spPr>
-          <a:xfrm>
-            <a:off x="914400" y="8131343"/>
-            <a:ext cx="9144000" cy="548640"/>
-          </a:xfrm>
-          <a:prstGeom prst="rect">
-            <a:avLst/>
-          </a:prstGeom>
-          <a:noFill/>
-        </p:spPr>
-        <p:txBody>
-          <a:bodyPr wrap="none" lIns="0" rIns="0" tIns="0" bIns="0" anchor="t"/>
-          <a:lstStyle/>
-          <a:p>
-            <a:pPr algn="l">
-              <a:lnSpc>
-                <a:spcPts val="4320"/>
-              </a:lnSpc>
-            </a:pPr>
-            <a:r>
-              <a:rPr b="0" sz="3600">
-                <a:solidFill>
-                  <a:srgbClr val="BABAB9"/>
-                </a:solidFill>
-                <a:latin typeface="Gilroy Medium"/>
-                <a:ea typeface="Gilroy Medium"/>
-                <a:cs typeface="Gilroy Medium"/>
-              </a:rPr>
-              <a:t>здесь дата или срок</a:t>
-            </a:r>
-          </a:p>
-        </p:txBody>
-      </p:sp>
-    </p:spTree>
-  </p:cSld>
-  <p:clrMapOvr>
-    <a:masterClrMapping/>
-  </p:clrMapOvr>
-</p:sld>
-</file>
-
-<file path=ppt/slides/slide13.xml><?xml version="1.0" encoding="utf-8"?>
-<p:sld xmlns:a="http://schemas.openxmlformats.org/drawingml/2006/main" xmlns:p="http://schemas.openxmlformats.org/presentationml/2006/main" xmlns:r="http://schemas.openxmlformats.org/officeDocument/2006/relationships">
-  <p:cSld name="U2-urgent-air-green">
-    <p:spTree>
-      <p:nvGrpSpPr>
-        <p:cNvPr id="1" name=""/>
-        <p:cNvGrpSpPr/>
-        <p:nvPr/>
-      </p:nvGrpSpPr>
-      <p:grpSpPr/>
-      <p:sp>
-        <p:nvSpPr>
-          <p:cNvPr id="2" name="Picture Placeholder 1"/>
-          <p:cNvSpPr>
-            <a:spLocks noGrp="1"/>
-          </p:cNvSpPr>
-          <p:nvPr>
-            <p:ph type="pic" idx="10"/>
-          </p:nvPr>
-        </p:nvSpPr>
-        <p:spPr/>
-      </p:sp>
-      <p:sp>
-        <p:nvSpPr>
-          <p:cNvPr id="3" name="Picture Placeholder 2"/>
-          <p:cNvSpPr>
-            <a:spLocks noGrp="1"/>
-          </p:cNvSpPr>
-          <p:nvPr>
-            <p:ph type="pic" idx="11"/>
-          </p:nvPr>
-        </p:nvSpPr>
-        <p:spPr/>
-      </p:sp>
-      <p:pic>
-        <p:nvPicPr>
-          <p:cNvPr id="4" name="Фон (картинка, без текста)" descr="U2-urgent-air-green-bg.png"/>
-          <p:cNvPicPr>
-            <a:picLocks noChangeAspect="1"/>
-          </p:cNvPicPr>
-          <p:nvPr/>
-        </p:nvPicPr>
-        <p:blipFill>
-          <a:blip r:embed="rId2"/>
-          <a:stretch>
-            <a:fillRect/>
-          </a:stretch>
-        </p:blipFill>
-        <p:spPr>
-          <a:xfrm>
             <a:off x="0" y="0"/>
             <a:ext cx="10287000" cy="10287000"/>
           </a:xfrm>
@@ -5785,7 +6509,7 @@
           <p:nvPr/>
         </p:nvPicPr>
         <p:blipFill>
-          <a:blip r:embed="rId3"/>
+          <a:blip r:embed="rId4"/>
           <a:stretch>
             <a:fillRect/>
           </a:stretch>
@@ -5802,1183 +6526,13 @@
       </p:pic>
       <p:sp>
         <p:nvSpPr>
-          <p:cNvPr id="6" name="Текст 1"/>
-          <p:cNvSpPr txBox="1"/>
-          <p:nvPr/>
-        </p:nvSpPr>
-        <p:spPr>
-          <a:xfrm>
-            <a:off x="1314450" y="2633811"/>
-            <a:ext cx="8743950" cy="342900"/>
-          </a:xfrm>
-          <a:prstGeom prst="rect">
-            <a:avLst/>
-          </a:prstGeom>
-          <a:noFill/>
-        </p:spPr>
-        <p:txBody>
-          <a:bodyPr wrap="none" lIns="0" rIns="0" tIns="0" bIns="0" anchor="t"/>
-          <a:lstStyle/>
-          <a:p>
-            <a:pPr algn="l">
-              <a:lnSpc>
-                <a:spcPts val="2700"/>
-              </a:lnSpc>
-            </a:pPr>
-            <a:r>
-              <a:rPr b="1" sz="2250" spc="495" cap="all">
-                <a:solidFill>
-                  <a:srgbClr val="ABAD58"/>
-                </a:solidFill>
-                <a:latin typeface="Gilroy"/>
-                <a:ea typeface="Gilroy"/>
-                <a:cs typeface="Gilroy"/>
-              </a:rPr>
-              <a:t>Срочные новости</a:t>
-            </a:r>
-          </a:p>
-        </p:txBody>
-      </p:sp>
-      <p:sp>
-        <p:nvSpPr>
-          <p:cNvPr id="7" name="Текст 2"/>
-          <p:cNvSpPr txBox="1"/>
-          <p:nvPr/>
-        </p:nvSpPr>
-        <p:spPr>
-          <a:xfrm>
-            <a:off x="914400" y="3717962"/>
-            <a:ext cx="9144000" cy="4005072"/>
-          </a:xfrm>
-          <a:prstGeom prst="rect">
-            <a:avLst/>
-          </a:prstGeom>
-          <a:noFill/>
-        </p:spPr>
-        <p:txBody>
-          <a:bodyPr wrap="none" lIns="0" rIns="0" tIns="0" bIns="0" anchor="t"/>
-          <a:lstStyle/>
-          <a:p>
-            <a:pPr algn="l">
-              <a:lnSpc>
-                <a:spcPts val="10512"/>
-              </a:lnSpc>
-            </a:pPr>
-            <a:r>
-              <a:rPr b="1" sz="10950" spc="-383">
-                <a:solidFill>
-                  <a:srgbClr val="FFFFFF"/>
-                </a:solidFill>
-                <a:latin typeface="Gilroy"/>
-                <a:ea typeface="Gilroy"/>
-                <a:cs typeface="Gilroy"/>
-              </a:rPr>
-              <a:t>Здесь будет</a:t>
-            </a:r>
-            <a:br/>
-            <a:r>
-              <a:rPr b="1" sz="10950" spc="-383">
-                <a:solidFill>
-                  <a:srgbClr val="FFFFFF"/>
-                </a:solidFill>
-                <a:latin typeface="Gilroy"/>
-                <a:ea typeface="Gilroy"/>
-                <a:cs typeface="Gilroy"/>
-              </a:rPr>
-              <a:t>заголовок</a:t>
-            </a:r>
-            <a:br/>
-            <a:r>
-              <a:rPr b="1" sz="10950" spc="-383">
-                <a:solidFill>
-                  <a:srgbClr val="FFFFFF"/>
-                </a:solidFill>
-                <a:latin typeface="Gilroy"/>
-                <a:ea typeface="Gilroy"/>
-                <a:cs typeface="Gilroy"/>
-              </a:rPr>
-              <a:t>новости</a:t>
-            </a:r>
-          </a:p>
-        </p:txBody>
-      </p:sp>
-      <p:sp>
-        <p:nvSpPr>
-          <p:cNvPr id="8" name="Текст 3"/>
-          <p:cNvSpPr txBox="1"/>
-          <p:nvPr/>
-        </p:nvSpPr>
-        <p:spPr>
-          <a:xfrm>
-            <a:off x="914400" y="8131343"/>
-            <a:ext cx="9144000" cy="548640"/>
-          </a:xfrm>
-          <a:prstGeom prst="rect">
-            <a:avLst/>
-          </a:prstGeom>
-          <a:noFill/>
-        </p:spPr>
-        <p:txBody>
-          <a:bodyPr wrap="none" lIns="0" rIns="0" tIns="0" bIns="0" anchor="t"/>
-          <a:lstStyle/>
-          <a:p>
-            <a:pPr algn="l">
-              <a:lnSpc>
-                <a:spcPts val="4320"/>
-              </a:lnSpc>
-            </a:pPr>
-            <a:r>
-              <a:rPr b="0" sz="3600">
-                <a:solidFill>
-                  <a:srgbClr val="BABAB9"/>
-                </a:solidFill>
-                <a:latin typeface="Gilroy Medium"/>
-                <a:ea typeface="Gilroy Medium"/>
-                <a:cs typeface="Gilroy Medium"/>
-              </a:rPr>
-              <a:t>здесь дата или срок</a:t>
-            </a:r>
-          </a:p>
-        </p:txBody>
-      </p:sp>
-    </p:spTree>
-  </p:cSld>
-  <p:clrMapOvr>
-    <a:masterClrMapping/>
-  </p:clrMapOvr>
-</p:sld>
-</file>
-
-<file path=ppt/slides/slide14.xml><?xml version="1.0" encoding="utf-8"?>
-<p:sld xmlns:a="http://schemas.openxmlformats.org/drawingml/2006/main" xmlns:p="http://schemas.openxmlformats.org/presentationml/2006/main" xmlns:r="http://schemas.openxmlformats.org/officeDocument/2006/relationships">
-  <p:cSld name="U3-urgent-date-graphite-chip">
-    <p:spTree>
-      <p:nvGrpSpPr>
-        <p:cNvPr id="1" name=""/>
-        <p:cNvGrpSpPr/>
-        <p:nvPr/>
-      </p:nvGrpSpPr>
-      <p:grpSpPr/>
-      <p:sp>
-        <p:nvSpPr>
-          <p:cNvPr id="2" name="Picture Placeholder 1"/>
-          <p:cNvSpPr>
-            <a:spLocks noGrp="1"/>
-          </p:cNvSpPr>
-          <p:nvPr>
-            <p:ph type="pic" idx="10"/>
-          </p:nvPr>
-        </p:nvSpPr>
-        <p:spPr/>
-      </p:sp>
-      <p:sp>
-        <p:nvSpPr>
-          <p:cNvPr id="3" name="Picture Placeholder 2"/>
-          <p:cNvSpPr>
-            <a:spLocks noGrp="1"/>
-          </p:cNvSpPr>
-          <p:nvPr>
-            <p:ph type="pic" idx="11"/>
-          </p:nvPr>
-        </p:nvSpPr>
-        <p:spPr/>
-      </p:sp>
-      <p:pic>
-        <p:nvPicPr>
-          <p:cNvPr id="4" name="Фон (картинка, без текста)" descr="U3-urgent-date-graphite-chip-bg.png"/>
-          <p:cNvPicPr>
-            <a:picLocks noChangeAspect="1"/>
-          </p:cNvPicPr>
-          <p:nvPr/>
-        </p:nvPicPr>
-        <p:blipFill>
-          <a:blip r:embed="rId2"/>
-          <a:stretch>
-            <a:fillRect/>
-          </a:stretch>
-        </p:blipFill>
-        <p:spPr>
-          <a:xfrm>
-            <a:off x="0" y="0"/>
-            <a:ext cx="10287000" cy="10287000"/>
-          </a:xfrm>
-          <a:prstGeom prst="rect">
-            <a:avLst/>
-          </a:prstGeom>
-        </p:spPr>
-      </p:pic>
-      <p:pic>
-        <p:nvPicPr>
-          <p:cNvPr id="5" name="Логотип" descr="logo-full.png"/>
-          <p:cNvPicPr>
-            <a:picLocks noChangeAspect="1"/>
-          </p:cNvPicPr>
-          <p:nvPr/>
-        </p:nvPicPr>
-        <p:blipFill>
-          <a:blip r:embed="rId3"/>
-          <a:stretch>
-            <a:fillRect/>
-          </a:stretch>
-        </p:blipFill>
-        <p:spPr>
-          <a:xfrm>
-            <a:off x="914400" y="914400"/>
-            <a:ext cx="1905000" cy="1162942"/>
-          </a:xfrm>
-          <a:prstGeom prst="rect">
-            <a:avLst/>
-          </a:prstGeom>
-        </p:spPr>
-      </p:pic>
-      <p:sp>
-        <p:nvSpPr>
-          <p:cNvPr id="6" name="Текст 1"/>
-          <p:cNvSpPr txBox="1"/>
-          <p:nvPr/>
-        </p:nvSpPr>
-        <p:spPr>
-          <a:xfrm>
-            <a:off x="1543050" y="3022386"/>
-            <a:ext cx="8515350" cy="388620"/>
-          </a:xfrm>
-          <a:prstGeom prst="rect">
-            <a:avLst/>
-          </a:prstGeom>
-          <a:noFill/>
-        </p:spPr>
-        <p:txBody>
-          <a:bodyPr wrap="none" lIns="0" rIns="0" tIns="0" bIns="0" anchor="t"/>
-          <a:lstStyle/>
-          <a:p>
-            <a:pPr algn="l">
-              <a:lnSpc>
-                <a:spcPts val="3060"/>
-              </a:lnSpc>
-            </a:pPr>
-            <a:r>
-              <a:rPr b="1" sz="2550" spc="408" cap="all">
-                <a:solidFill>
-                  <a:srgbClr val="FFFFFF"/>
-                </a:solidFill>
-                <a:latin typeface="Gilroy"/>
-                <a:ea typeface="Gilroy"/>
-                <a:cs typeface="Gilroy"/>
-              </a:rPr>
-              <a:t>Срочные новости</a:t>
-            </a:r>
-          </a:p>
-        </p:txBody>
-      </p:sp>
-      <p:sp>
-        <p:nvSpPr>
-          <p:cNvPr id="7" name="Текст 2"/>
-          <p:cNvSpPr txBox="1"/>
-          <p:nvPr/>
-        </p:nvSpPr>
-        <p:spPr>
-          <a:xfrm>
-            <a:off x="914400" y="3993022"/>
-            <a:ext cx="9144000" cy="1680210"/>
-          </a:xfrm>
-          <a:prstGeom prst="rect">
-            <a:avLst/>
-          </a:prstGeom>
-          <a:noFill/>
-        </p:spPr>
-        <p:txBody>
-          <a:bodyPr wrap="none" lIns="0" rIns="0" tIns="0" bIns="0" anchor="t"/>
-          <a:lstStyle/>
-          <a:p>
-            <a:pPr algn="l">
-              <a:lnSpc>
-                <a:spcPts val="13230"/>
-              </a:lnSpc>
-            </a:pPr>
-            <a:r>
-              <a:rPr b="0" sz="14700" spc="-662">
-                <a:solidFill>
-                  <a:srgbClr val="D73A61"/>
-                </a:solidFill>
-                <a:latin typeface="Gilroy ExtraBold"/>
-                <a:ea typeface="Gilroy ExtraBold"/>
-                <a:cs typeface="Gilroy ExtraBold"/>
-              </a:rPr>
-              <a:t>12 мая</a:t>
-            </a:r>
-          </a:p>
-        </p:txBody>
-      </p:sp>
-      <p:sp>
-        <p:nvSpPr>
-          <p:cNvPr id="8" name="Текст 3"/>
-          <p:cNvSpPr txBox="1"/>
-          <p:nvPr/>
-        </p:nvSpPr>
-        <p:spPr>
-          <a:xfrm>
-            <a:off x="914400" y="5790262"/>
-            <a:ext cx="9144000" cy="822959"/>
-          </a:xfrm>
-          <a:prstGeom prst="rect">
-            <a:avLst/>
-          </a:prstGeom>
-          <a:noFill/>
-        </p:spPr>
-        <p:txBody>
-          <a:bodyPr wrap="none" lIns="0" rIns="0" tIns="0" bIns="0" anchor="t"/>
-          <a:lstStyle/>
-          <a:p>
-            <a:pPr algn="l">
-              <a:lnSpc>
-                <a:spcPts val="6480"/>
-              </a:lnSpc>
-            </a:pPr>
-            <a:r>
-              <a:rPr b="1" sz="5400" spc="-108">
-                <a:solidFill>
-                  <a:srgbClr val="1C1A17"/>
-                </a:solidFill>
-                <a:latin typeface="Gilroy"/>
-                <a:ea typeface="Gilroy"/>
-                <a:cs typeface="Gilroy"/>
-              </a:rPr>
-              <a:t>2027 года</a:t>
-            </a:r>
-          </a:p>
-        </p:txBody>
-      </p:sp>
-      <p:sp>
-        <p:nvSpPr>
-          <p:cNvPr id="9" name="Текст 4"/>
-          <p:cNvSpPr txBox="1"/>
-          <p:nvPr/>
-        </p:nvSpPr>
-        <p:spPr>
-          <a:xfrm>
-            <a:off x="914400" y="7046609"/>
-            <a:ext cx="9144000" cy="1383030"/>
-          </a:xfrm>
-          <a:prstGeom prst="rect">
-            <a:avLst/>
-          </a:prstGeom>
-          <a:noFill/>
-        </p:spPr>
-        <p:txBody>
-          <a:bodyPr wrap="none" lIns="0" rIns="0" tIns="0" bIns="0" anchor="t"/>
-          <a:lstStyle/>
-          <a:p>
-            <a:pPr algn="l">
-              <a:lnSpc>
-                <a:spcPts val="5445"/>
-              </a:lnSpc>
-            </a:pPr>
-            <a:r>
-              <a:rPr b="0" sz="4950" spc="-99">
-                <a:solidFill>
-                  <a:srgbClr val="1C1A17"/>
-                </a:solidFill>
-                <a:latin typeface="Gilroy SemiBold"/>
-                <a:ea typeface="Gilroy SemiBold"/>
-                <a:cs typeface="Gilroy SemiBold"/>
-              </a:rPr>
-              <a:t>Здесь заголовок</a:t>
-            </a:r>
-            <a:br/>
-            <a:r>
-              <a:rPr b="0" sz="4950" spc="-99">
-                <a:solidFill>
-                  <a:srgbClr val="1C1A17"/>
-                </a:solidFill>
-                <a:latin typeface="Gilroy SemiBold"/>
-                <a:ea typeface="Gilroy SemiBold"/>
-                <a:cs typeface="Gilroy SemiBold"/>
-              </a:rPr>
-              <a:t>срочной новости</a:t>
-            </a:r>
-          </a:p>
-        </p:txBody>
-      </p:sp>
-    </p:spTree>
-  </p:cSld>
-  <p:clrMapOvr>
-    <a:masterClrMapping/>
-  </p:clrMapOvr>
-</p:sld>
-</file>
-
-<file path=ppt/slides/slide15.xml><?xml version="1.0" encoding="utf-8"?>
-<p:sld xmlns:a="http://schemas.openxmlformats.org/drawingml/2006/main" xmlns:p="http://schemas.openxmlformats.org/presentationml/2006/main" xmlns:r="http://schemas.openxmlformats.org/officeDocument/2006/relationships">
-  <p:cSld name="U4-urgent-date-crimson-chip">
-    <p:spTree>
-      <p:nvGrpSpPr>
-        <p:cNvPr id="1" name=""/>
-        <p:cNvGrpSpPr/>
-        <p:nvPr/>
-      </p:nvGrpSpPr>
-      <p:grpSpPr/>
-      <p:sp>
-        <p:nvSpPr>
-          <p:cNvPr id="2" name="Picture Placeholder 1"/>
-          <p:cNvSpPr>
-            <a:spLocks noGrp="1"/>
-          </p:cNvSpPr>
-          <p:nvPr>
-            <p:ph type="pic" idx="10"/>
-          </p:nvPr>
-        </p:nvSpPr>
-        <p:spPr/>
-      </p:sp>
-      <p:sp>
-        <p:nvSpPr>
-          <p:cNvPr id="3" name="Picture Placeholder 2"/>
-          <p:cNvSpPr>
-            <a:spLocks noGrp="1"/>
-          </p:cNvSpPr>
-          <p:nvPr>
-            <p:ph type="pic" idx="11"/>
-          </p:nvPr>
-        </p:nvSpPr>
-        <p:spPr/>
-      </p:sp>
-      <p:pic>
-        <p:nvPicPr>
-          <p:cNvPr id="4" name="Фон (картинка, без текста)" descr="U4-urgent-date-crimson-chip-bg.png"/>
-          <p:cNvPicPr>
-            <a:picLocks noChangeAspect="1"/>
-          </p:cNvPicPr>
-          <p:nvPr/>
-        </p:nvPicPr>
-        <p:blipFill>
-          <a:blip r:embed="rId2"/>
-          <a:stretch>
-            <a:fillRect/>
-          </a:stretch>
-        </p:blipFill>
-        <p:spPr>
-          <a:xfrm>
-            <a:off x="0" y="0"/>
-            <a:ext cx="10287000" cy="10287000"/>
-          </a:xfrm>
-          <a:prstGeom prst="rect">
-            <a:avLst/>
-          </a:prstGeom>
-        </p:spPr>
-      </p:pic>
-      <p:pic>
-        <p:nvPicPr>
-          <p:cNvPr id="5" name="Логотип" descr="logo-full.png"/>
-          <p:cNvPicPr>
-            <a:picLocks noChangeAspect="1"/>
-          </p:cNvPicPr>
-          <p:nvPr/>
-        </p:nvPicPr>
-        <p:blipFill>
-          <a:blip r:embed="rId3"/>
-          <a:stretch>
-            <a:fillRect/>
-          </a:stretch>
-        </p:blipFill>
-        <p:spPr>
-          <a:xfrm>
-            <a:off x="914400" y="914400"/>
-            <a:ext cx="1905000" cy="1162942"/>
-          </a:xfrm>
-          <a:prstGeom prst="rect">
-            <a:avLst/>
-          </a:prstGeom>
-        </p:spPr>
-      </p:pic>
-      <p:sp>
-        <p:nvSpPr>
-          <p:cNvPr id="6" name="Текст 1"/>
-          <p:cNvSpPr txBox="1"/>
-          <p:nvPr/>
-        </p:nvSpPr>
-        <p:spPr>
-          <a:xfrm>
-            <a:off x="1543050" y="3022386"/>
-            <a:ext cx="8515350" cy="388620"/>
-          </a:xfrm>
-          <a:prstGeom prst="rect">
-            <a:avLst/>
-          </a:prstGeom>
-          <a:noFill/>
-        </p:spPr>
-        <p:txBody>
-          <a:bodyPr wrap="none" lIns="0" rIns="0" tIns="0" bIns="0" anchor="t"/>
-          <a:lstStyle/>
-          <a:p>
-            <a:pPr algn="l">
-              <a:lnSpc>
-                <a:spcPts val="3060"/>
-              </a:lnSpc>
-            </a:pPr>
-            <a:r>
-              <a:rPr b="1" sz="2550" spc="408" cap="all">
-                <a:solidFill>
-                  <a:srgbClr val="FFFFFF"/>
-                </a:solidFill>
-                <a:latin typeface="Gilroy"/>
-                <a:ea typeface="Gilroy"/>
-                <a:cs typeface="Gilroy"/>
-              </a:rPr>
-              <a:t>Срочные новости</a:t>
-            </a:r>
-          </a:p>
-        </p:txBody>
-      </p:sp>
-      <p:sp>
-        <p:nvSpPr>
-          <p:cNvPr id="7" name="Текст 2"/>
-          <p:cNvSpPr txBox="1"/>
-          <p:nvPr/>
-        </p:nvSpPr>
-        <p:spPr>
-          <a:xfrm>
-            <a:off x="914400" y="3993022"/>
-            <a:ext cx="9144000" cy="1680210"/>
-          </a:xfrm>
-          <a:prstGeom prst="rect">
-            <a:avLst/>
-          </a:prstGeom>
-          <a:noFill/>
-        </p:spPr>
-        <p:txBody>
-          <a:bodyPr wrap="none" lIns="0" rIns="0" tIns="0" bIns="0" anchor="t"/>
-          <a:lstStyle/>
-          <a:p>
-            <a:pPr algn="l">
-              <a:lnSpc>
-                <a:spcPts val="13230"/>
-              </a:lnSpc>
-            </a:pPr>
-            <a:r>
-              <a:rPr b="0" sz="14700" spc="-662">
-                <a:solidFill>
-                  <a:srgbClr val="D73A61"/>
-                </a:solidFill>
-                <a:latin typeface="Gilroy ExtraBold"/>
-                <a:ea typeface="Gilroy ExtraBold"/>
-                <a:cs typeface="Gilroy ExtraBold"/>
-              </a:rPr>
-              <a:t>12 мая</a:t>
-            </a:r>
-          </a:p>
-        </p:txBody>
-      </p:sp>
-      <p:sp>
-        <p:nvSpPr>
-          <p:cNvPr id="8" name="Текст 3"/>
-          <p:cNvSpPr txBox="1"/>
-          <p:nvPr/>
-        </p:nvSpPr>
-        <p:spPr>
-          <a:xfrm>
-            <a:off x="914400" y="5790262"/>
-            <a:ext cx="9144000" cy="822959"/>
-          </a:xfrm>
-          <a:prstGeom prst="rect">
-            <a:avLst/>
-          </a:prstGeom>
-          <a:noFill/>
-        </p:spPr>
-        <p:txBody>
-          <a:bodyPr wrap="none" lIns="0" rIns="0" tIns="0" bIns="0" anchor="t"/>
-          <a:lstStyle/>
-          <a:p>
-            <a:pPr algn="l">
-              <a:lnSpc>
-                <a:spcPts val="6480"/>
-              </a:lnSpc>
-            </a:pPr>
-            <a:r>
-              <a:rPr b="1" sz="5400" spc="-108">
-                <a:solidFill>
-                  <a:srgbClr val="1C1A17"/>
-                </a:solidFill>
-                <a:latin typeface="Gilroy"/>
-                <a:ea typeface="Gilroy"/>
-                <a:cs typeface="Gilroy"/>
-              </a:rPr>
-              <a:t>2027 года</a:t>
-            </a:r>
-          </a:p>
-        </p:txBody>
-      </p:sp>
-      <p:sp>
-        <p:nvSpPr>
-          <p:cNvPr id="9" name="Текст 4"/>
-          <p:cNvSpPr txBox="1"/>
-          <p:nvPr/>
-        </p:nvSpPr>
-        <p:spPr>
-          <a:xfrm>
-            <a:off x="914400" y="7046609"/>
-            <a:ext cx="9144000" cy="1383030"/>
-          </a:xfrm>
-          <a:prstGeom prst="rect">
-            <a:avLst/>
-          </a:prstGeom>
-          <a:noFill/>
-        </p:spPr>
-        <p:txBody>
-          <a:bodyPr wrap="none" lIns="0" rIns="0" tIns="0" bIns="0" anchor="t"/>
-          <a:lstStyle/>
-          <a:p>
-            <a:pPr algn="l">
-              <a:lnSpc>
-                <a:spcPts val="5445"/>
-              </a:lnSpc>
-            </a:pPr>
-            <a:r>
-              <a:rPr b="0" sz="4950" spc="-99">
-                <a:solidFill>
-                  <a:srgbClr val="1C1A17"/>
-                </a:solidFill>
-                <a:latin typeface="Gilroy SemiBold"/>
-                <a:ea typeface="Gilroy SemiBold"/>
-                <a:cs typeface="Gilroy SemiBold"/>
-              </a:rPr>
-              <a:t>Здесь заголовок</a:t>
-            </a:r>
-            <a:br/>
-            <a:r>
-              <a:rPr b="0" sz="4950" spc="-99">
-                <a:solidFill>
-                  <a:srgbClr val="1C1A17"/>
-                </a:solidFill>
-                <a:latin typeface="Gilroy SemiBold"/>
-                <a:ea typeface="Gilroy SemiBold"/>
-                <a:cs typeface="Gilroy SemiBold"/>
-              </a:rPr>
-              <a:t>срочной новости</a:t>
-            </a:r>
-          </a:p>
-        </p:txBody>
-      </p:sp>
-    </p:spTree>
-  </p:cSld>
-  <p:clrMapOvr>
-    <a:masterClrMapping/>
-  </p:clrMapOvr>
-</p:sld>
-</file>
-
-<file path=ppt/slides/slide16.xml><?xml version="1.0" encoding="utf-8"?>
-<p:sld xmlns:a="http://schemas.openxmlformats.org/drawingml/2006/main" xmlns:p="http://schemas.openxmlformats.org/presentationml/2006/main" xmlns:r="http://schemas.openxmlformats.org/officeDocument/2006/relationships">
-  <p:cSld name="U5-urgent-newspaper">
-    <p:spTree>
-      <p:nvGrpSpPr>
-        <p:cNvPr id="1" name=""/>
-        <p:cNvGrpSpPr/>
-        <p:nvPr/>
-      </p:nvGrpSpPr>
-      <p:grpSpPr/>
-      <p:sp>
-        <p:nvSpPr>
-          <p:cNvPr id="2" name="Picture Placeholder 1"/>
-          <p:cNvSpPr>
-            <a:spLocks noGrp="1"/>
-          </p:cNvSpPr>
-          <p:nvPr>
-            <p:ph type="pic" idx="10"/>
-          </p:nvPr>
-        </p:nvSpPr>
-        <p:spPr/>
-      </p:sp>
-      <p:sp>
-        <p:nvSpPr>
-          <p:cNvPr id="3" name="Picture Placeholder 2"/>
-          <p:cNvSpPr>
-            <a:spLocks noGrp="1"/>
-          </p:cNvSpPr>
-          <p:nvPr>
-            <p:ph type="pic" idx="11"/>
-          </p:nvPr>
-        </p:nvSpPr>
-        <p:spPr/>
-      </p:sp>
-      <p:pic>
-        <p:nvPicPr>
-          <p:cNvPr id="4" name="Фон (картинка, без текста)" descr="U5-urgent-newspaper-bg.png"/>
-          <p:cNvPicPr>
-            <a:picLocks noChangeAspect="1"/>
-          </p:cNvPicPr>
-          <p:nvPr/>
-        </p:nvPicPr>
-        <p:blipFill>
-          <a:blip r:embed="rId2"/>
-          <a:stretch>
-            <a:fillRect/>
-          </a:stretch>
-        </p:blipFill>
-        <p:spPr>
-          <a:xfrm>
-            <a:off x="0" y="0"/>
-            <a:ext cx="10287000" cy="10287000"/>
-          </a:xfrm>
-          <a:prstGeom prst="rect">
-            <a:avLst/>
-          </a:prstGeom>
-        </p:spPr>
-      </p:pic>
-      <p:pic>
-        <p:nvPicPr>
-          <p:cNvPr id="5" name="Логотип" descr="logo-full.png"/>
-          <p:cNvPicPr>
-            <a:picLocks noChangeAspect="1"/>
-          </p:cNvPicPr>
-          <p:nvPr/>
-        </p:nvPicPr>
-        <p:blipFill>
-          <a:blip r:embed="rId3"/>
-          <a:stretch>
-            <a:fillRect/>
-          </a:stretch>
-        </p:blipFill>
-        <p:spPr>
-          <a:xfrm>
-            <a:off x="914400" y="914400"/>
-            <a:ext cx="1905000" cy="1162942"/>
-          </a:xfrm>
-          <a:prstGeom prst="rect">
-            <a:avLst/>
-          </a:prstGeom>
-        </p:spPr>
-      </p:pic>
-      <p:sp>
-        <p:nvSpPr>
-          <p:cNvPr id="6" name="Текст 1"/>
-          <p:cNvSpPr txBox="1"/>
-          <p:nvPr/>
-        </p:nvSpPr>
-        <p:spPr>
-          <a:xfrm>
-            <a:off x="1276350" y="2819400"/>
-            <a:ext cx="8782050" cy="342900"/>
-          </a:xfrm>
-          <a:prstGeom prst="rect">
-            <a:avLst/>
-          </a:prstGeom>
-          <a:noFill/>
-        </p:spPr>
-        <p:txBody>
-          <a:bodyPr wrap="none" lIns="0" rIns="0" tIns="0" bIns="0" anchor="t"/>
-          <a:lstStyle/>
-          <a:p>
-            <a:pPr algn="l">
-              <a:lnSpc>
-                <a:spcPts val="2700"/>
-              </a:lnSpc>
-            </a:pPr>
-            <a:r>
-              <a:rPr b="1" sz="2250" spc="495" cap="all">
-                <a:solidFill>
-                  <a:srgbClr val="1C1A17"/>
-                </a:solidFill>
-                <a:latin typeface="Gilroy"/>
-                <a:ea typeface="Gilroy"/>
-                <a:cs typeface="Gilroy"/>
-              </a:rPr>
-              <a:t>Срочные новости</a:t>
-            </a:r>
-          </a:p>
-        </p:txBody>
-      </p:sp>
-      <p:sp>
-        <p:nvSpPr>
-          <p:cNvPr id="7" name="Текст 2"/>
-          <p:cNvSpPr txBox="1"/>
-          <p:nvPr/>
-        </p:nvSpPr>
-        <p:spPr>
-          <a:xfrm>
-            <a:off x="914400" y="4000058"/>
-            <a:ext cx="9144000" cy="3696462"/>
-          </a:xfrm>
-          <a:prstGeom prst="rect">
-            <a:avLst/>
-          </a:prstGeom>
-          <a:noFill/>
-        </p:spPr>
-        <p:txBody>
-          <a:bodyPr wrap="none" lIns="0" rIns="0" tIns="0" bIns="0" anchor="t"/>
-          <a:lstStyle/>
-          <a:p>
-            <a:pPr algn="l">
-              <a:lnSpc>
-                <a:spcPts val="9702"/>
-              </a:lnSpc>
-            </a:pPr>
-            <a:r>
-              <a:rPr b="0" sz="9900" spc="-346">
-                <a:solidFill>
-                  <a:srgbClr val="1C1A17"/>
-                </a:solidFill>
-                <a:latin typeface="Gilroy ExtraBold"/>
-                <a:ea typeface="Gilroy ExtraBold"/>
-                <a:cs typeface="Gilroy ExtraBold"/>
-              </a:rPr>
-              <a:t>Здесь будет</a:t>
-            </a:r>
-            <a:br/>
-            <a:r>
-              <a:rPr b="0" sz="9900" spc="-346">
-                <a:solidFill>
-                  <a:srgbClr val="1C1A17"/>
-                </a:solidFill>
-                <a:latin typeface="Gilroy ExtraBold"/>
-                <a:ea typeface="Gilroy ExtraBold"/>
-                <a:cs typeface="Gilroy ExtraBold"/>
-              </a:rPr>
-              <a:t>заголовок</a:t>
-            </a:r>
-            <a:br/>
-            <a:r>
-              <a:rPr b="0" sz="9900" spc="-346">
-                <a:solidFill>
-                  <a:srgbClr val="1C1A17"/>
-                </a:solidFill>
-                <a:latin typeface="Gilroy ExtraBold"/>
-                <a:ea typeface="Gilroy ExtraBold"/>
-                <a:cs typeface="Gilroy ExtraBold"/>
-              </a:rPr>
-              <a:t>новости</a:t>
-            </a:r>
-          </a:p>
-        </p:txBody>
-      </p:sp>
-      <p:sp>
-        <p:nvSpPr>
-          <p:cNvPr id="8" name="Текст 3"/>
-          <p:cNvSpPr txBox="1"/>
-          <p:nvPr/>
-        </p:nvSpPr>
-        <p:spPr>
-          <a:xfrm>
-            <a:off x="914400" y="8843962"/>
-            <a:ext cx="9144000" cy="523875"/>
-          </a:xfrm>
-          <a:prstGeom prst="rect">
-            <a:avLst/>
-          </a:prstGeom>
-          <a:noFill/>
-        </p:spPr>
-        <p:txBody>
-          <a:bodyPr wrap="none" lIns="0" rIns="0" tIns="0" bIns="0" anchor="t"/>
-          <a:lstStyle/>
-          <a:p>
-            <a:pPr algn="l">
-              <a:lnSpc>
-                <a:spcPts val="4125"/>
-              </a:lnSpc>
-            </a:pPr>
-            <a:r>
-              <a:rPr b="0" sz="3300" spc="-16">
-                <a:solidFill>
-                  <a:srgbClr val="6A6965"/>
-                </a:solidFill>
-                <a:latin typeface="Gilroy Medium"/>
-                <a:ea typeface="Gilroy Medium"/>
-                <a:cs typeface="Gilroy Medium"/>
-              </a:rPr>
-              <a:t>здесь дата или срок</a:t>
-            </a:r>
-          </a:p>
-        </p:txBody>
-      </p:sp>
-    </p:spTree>
-  </p:cSld>
-  <p:clrMapOvr>
-    <a:masterClrMapping/>
-  </p:clrMapOvr>
-</p:sld>
-</file>
-
-<file path=ppt/slides/slide17.xml><?xml version="1.0" encoding="utf-8"?>
-<p:sld xmlns:a="http://schemas.openxmlformats.org/drawingml/2006/main" xmlns:p="http://schemas.openxmlformats.org/presentationml/2006/main" xmlns:r="http://schemas.openxmlformats.org/officeDocument/2006/relationships">
-  <p:cSld name="U6-urgent-ticker-green">
-    <p:spTree>
-      <p:nvGrpSpPr>
-        <p:cNvPr id="1" name=""/>
-        <p:cNvGrpSpPr/>
-        <p:nvPr/>
-      </p:nvGrpSpPr>
-      <p:grpSpPr/>
-      <p:sp>
-        <p:nvSpPr>
-          <p:cNvPr id="2" name="Picture Placeholder 1"/>
-          <p:cNvSpPr>
-            <a:spLocks noGrp="1"/>
-          </p:cNvSpPr>
-          <p:nvPr>
-            <p:ph type="pic" idx="10"/>
-          </p:nvPr>
-        </p:nvSpPr>
-        <p:spPr/>
-      </p:sp>
-      <p:sp>
-        <p:nvSpPr>
-          <p:cNvPr id="3" name="Picture Placeholder 2"/>
-          <p:cNvSpPr>
-            <a:spLocks noGrp="1"/>
-          </p:cNvSpPr>
-          <p:nvPr>
-            <p:ph type="pic" idx="11"/>
-          </p:nvPr>
-        </p:nvSpPr>
-        <p:spPr/>
-      </p:sp>
-      <p:pic>
-        <p:nvPicPr>
-          <p:cNvPr id="4" name="Фон (картинка, без текста)" descr="U6-urgent-ticker-green-bg.png"/>
-          <p:cNvPicPr>
-            <a:picLocks noChangeAspect="1"/>
-          </p:cNvPicPr>
-          <p:nvPr/>
-        </p:nvPicPr>
-        <p:blipFill>
-          <a:blip r:embed="rId2"/>
-          <a:stretch>
-            <a:fillRect/>
-          </a:stretch>
-        </p:blipFill>
-        <p:spPr>
-          <a:xfrm>
-            <a:off x="0" y="0"/>
-            <a:ext cx="10287000" cy="10287000"/>
-          </a:xfrm>
-          <a:prstGeom prst="rect">
-            <a:avLst/>
-          </a:prstGeom>
-        </p:spPr>
-      </p:pic>
-      <p:pic>
-        <p:nvPicPr>
-          <p:cNvPr id="5" name="Логотип" descr="logo-full-white.png"/>
-          <p:cNvPicPr>
-            <a:picLocks noChangeAspect="1"/>
-          </p:cNvPicPr>
-          <p:nvPr/>
-        </p:nvPicPr>
-        <p:blipFill>
-          <a:blip r:embed="rId3"/>
-          <a:stretch>
-            <a:fillRect/>
-          </a:stretch>
-        </p:blipFill>
-        <p:spPr>
-          <a:xfrm>
-            <a:off x="914400" y="2195363"/>
-            <a:ext cx="1905000" cy="1162942"/>
-          </a:xfrm>
-          <a:prstGeom prst="rect">
-            <a:avLst/>
-          </a:prstGeom>
-        </p:spPr>
-      </p:pic>
-      <p:sp>
-        <p:nvSpPr>
-          <p:cNvPr id="6" name="Текст 1"/>
-          <p:cNvSpPr txBox="1"/>
-          <p:nvPr/>
-        </p:nvSpPr>
-        <p:spPr>
-          <a:xfrm>
-            <a:off x="914400" y="3833032"/>
-            <a:ext cx="9144000" cy="3380994"/>
-          </a:xfrm>
-          <a:prstGeom prst="rect">
-            <a:avLst/>
-          </a:prstGeom>
-          <a:noFill/>
-        </p:spPr>
-        <p:txBody>
-          <a:bodyPr wrap="none" lIns="0" rIns="0" tIns="0" bIns="0" anchor="t"/>
-          <a:lstStyle/>
-          <a:p>
-            <a:pPr algn="l">
-              <a:lnSpc>
-                <a:spcPts val="8874"/>
-              </a:lnSpc>
-            </a:pPr>
-            <a:r>
-              <a:rPr b="1" sz="8700" spc="-261">
-                <a:solidFill>
-                  <a:srgbClr val="FFFFFF"/>
-                </a:solidFill>
-                <a:latin typeface="Gilroy"/>
-                <a:ea typeface="Gilroy"/>
-                <a:cs typeface="Gilroy"/>
-              </a:rPr>
-              <a:t>Здесь будет</a:t>
-            </a:r>
-            <a:br/>
-            <a:r>
-              <a:rPr b="1" sz="8700" spc="-261">
-                <a:solidFill>
-                  <a:srgbClr val="FFFFFF"/>
-                </a:solidFill>
-                <a:latin typeface="Gilroy"/>
-                <a:ea typeface="Gilroy"/>
-                <a:cs typeface="Gilroy"/>
-              </a:rPr>
-              <a:t>заголовок</a:t>
-            </a:r>
-            <a:br/>
-            <a:r>
-              <a:rPr b="1" sz="8700" spc="-261">
-                <a:solidFill>
-                  <a:srgbClr val="FFFFFF"/>
-                </a:solidFill>
-                <a:latin typeface="Gilroy"/>
-                <a:ea typeface="Gilroy"/>
-                <a:cs typeface="Gilroy"/>
-              </a:rPr>
-              <a:t>новости</a:t>
-            </a:r>
-          </a:p>
-        </p:txBody>
-      </p:sp>
-      <p:sp>
-        <p:nvSpPr>
-          <p:cNvPr id="7" name="Текст 2"/>
-          <p:cNvSpPr txBox="1"/>
-          <p:nvPr/>
-        </p:nvSpPr>
-        <p:spPr>
-          <a:xfrm>
-            <a:off x="914400" y="7541091"/>
-            <a:ext cx="9144000" cy="548640"/>
-          </a:xfrm>
-          <a:prstGeom prst="rect">
-            <a:avLst/>
-          </a:prstGeom>
-          <a:noFill/>
-        </p:spPr>
-        <p:txBody>
-          <a:bodyPr wrap="none" lIns="0" rIns="0" tIns="0" bIns="0" anchor="t"/>
-          <a:lstStyle/>
-          <a:p>
-            <a:pPr algn="l">
-              <a:lnSpc>
-                <a:spcPts val="4320"/>
-              </a:lnSpc>
-            </a:pPr>
-            <a:r>
-              <a:rPr b="0" sz="3600">
-                <a:solidFill>
-                  <a:srgbClr val="BABAB9"/>
-                </a:solidFill>
-                <a:latin typeface="Gilroy Medium"/>
-                <a:ea typeface="Gilroy Medium"/>
-                <a:cs typeface="Gilroy Medium"/>
-              </a:rPr>
-              <a:t>здесь дата или срок</a:t>
-            </a:r>
-          </a:p>
-        </p:txBody>
-      </p:sp>
-    </p:spTree>
-  </p:cSld>
-  <p:clrMapOvr>
-    <a:masterClrMapping/>
-  </p:clrMapOvr>
-</p:sld>
-</file>
-
-<file path=ppt/slides/slide2.xml><?xml version="1.0" encoding="utf-8"?>
-<p:sld xmlns:a="http://schemas.openxmlformats.org/drawingml/2006/main" xmlns:p="http://schemas.openxmlformats.org/presentationml/2006/main" xmlns:r="http://schemas.openxmlformats.org/officeDocument/2006/relationships">
-  <p:cSld name="V13-photo-hero-question">
-    <p:spTree>
-      <p:nvGrpSpPr>
-        <p:cNvPr id="1" name=""/>
-        <p:cNvGrpSpPr/>
-        <p:nvPr/>
-      </p:nvGrpSpPr>
-      <p:grpSpPr/>
-      <p:sp>
-        <p:nvSpPr>
-          <p:cNvPr id="2" name="Picture Placeholder 1"/>
-          <p:cNvSpPr>
-            <a:spLocks noGrp="1"/>
-          </p:cNvSpPr>
-          <p:nvPr>
-            <p:ph type="pic" idx="10"/>
-          </p:nvPr>
-        </p:nvSpPr>
-        <p:spPr/>
-      </p:sp>
-      <p:sp>
-        <p:nvSpPr>
-          <p:cNvPr id="3" name="Picture Placeholder 2"/>
-          <p:cNvSpPr>
-            <a:spLocks noGrp="1"/>
-          </p:cNvSpPr>
-          <p:nvPr>
-            <p:ph type="pic" idx="11"/>
-          </p:nvPr>
-        </p:nvSpPr>
-        <p:spPr/>
-      </p:sp>
-      <p:pic>
-        <p:nvPicPr>
-          <p:cNvPr id="4" name="Фон (картинка, без текста)" descr="V13-photo-hero-question-bg.png"/>
-          <p:cNvPicPr>
-            <a:picLocks noChangeAspect="1"/>
-          </p:cNvPicPr>
-          <p:nvPr/>
-        </p:nvPicPr>
-        <p:blipFill>
-          <a:blip r:embed="rId2"/>
-          <a:stretch>
-            <a:fillRect/>
-          </a:stretch>
-        </p:blipFill>
-        <p:spPr>
-          <a:xfrm>
-            <a:off x="0" y="0"/>
-            <a:ext cx="10287000" cy="10287000"/>
-          </a:xfrm>
-          <a:prstGeom prst="rect">
-            <a:avLst/>
-          </a:prstGeom>
-        </p:spPr>
-      </p:pic>
-      <p:pic>
-        <p:nvPicPr>
-          <p:cNvPr id="5" name="Логотип" descr="logo-full-white.png"/>
-          <p:cNvPicPr>
-            <a:picLocks noChangeAspect="1"/>
-          </p:cNvPicPr>
-          <p:nvPr/>
-        </p:nvPicPr>
-        <p:blipFill>
-          <a:blip r:embed="rId3"/>
-          <a:stretch>
-            <a:fillRect/>
-          </a:stretch>
-        </p:blipFill>
-        <p:spPr>
-          <a:xfrm>
-            <a:off x="914400" y="914400"/>
-            <a:ext cx="1905000" cy="1162942"/>
-          </a:xfrm>
-          <a:prstGeom prst="rect">
-            <a:avLst/>
-          </a:prstGeom>
-        </p:spPr>
-      </p:pic>
-      <p:sp>
-        <p:nvSpPr>
           <p:cNvPr id="6" name="Малиновая черта"/>
           <p:cNvSpPr/>
           <p:nvPr/>
         </p:nvSpPr>
         <p:spPr>
           <a:xfrm>
-            <a:off x="914400" y="2362200"/>
+            <a:off x="914400" y="4142035"/>
             <a:ext cx="609600" cy="38100"/>
           </a:xfrm>
           <a:prstGeom prst="rect">
@@ -7011,6 +6565,7 @@
           <a:lstStyle/>
           <a:p>
             <a:pPr algn="ctr"/>
+            <a:endParaRPr/>
           </a:p>
         </p:txBody>
       </p:sp>
@@ -7022,7 +6577,7 @@
         </p:nvSpPr>
         <p:spPr>
           <a:xfrm>
-            <a:off x="914400" y="2678430"/>
+            <a:off x="914400" y="4458265"/>
             <a:ext cx="9144000" cy="1173480"/>
           </a:xfrm>
           <a:prstGeom prst="rect">
@@ -7031,7 +6586,7 @@
           <a:noFill/>
         </p:spPr>
         <p:txBody>
-          <a:bodyPr wrap="none" lIns="0" rIns="0" tIns="0" bIns="0" anchor="t"/>
+          <a:bodyPr wrap="none" lIns="0" tIns="0" rIns="0" bIns="0" anchor="t"/>
           <a:lstStyle/>
           <a:p>
             <a:pPr algn="l">
@@ -7040,7 +6595,7 @@
               </a:lnSpc>
             </a:pPr>
             <a:r>
-              <a:rPr b="0" sz="4200" spc="-84">
+              <a:rPr sz="4200" b="0" spc="-84">
                 <a:solidFill>
                   <a:srgbClr val="FFFFFF"/>
                 </a:solidFill>
@@ -7050,9 +6605,12 @@
               </a:rPr>
               <a:t>Контекст в две строки,</a:t>
             </a:r>
+            <a:r>
+              <a:t/>
+            </a:r>
             <a:br/>
             <a:r>
-              <a:rPr b="0" sz="4200" spc="-84">
+              <a:rPr sz="4200" b="0" spc="-84">
                 <a:solidFill>
                   <a:srgbClr val="FFFFFF"/>
                 </a:solidFill>
@@ -7073,7 +6631,7 @@
         </p:nvSpPr>
         <p:spPr>
           <a:xfrm>
-            <a:off x="914400" y="4117595"/>
+            <a:off x="914400" y="5935531"/>
             <a:ext cx="9144000" cy="1248727"/>
           </a:xfrm>
           <a:prstGeom prst="rect">
@@ -7082,7 +6640,7 @@
           <a:noFill/>
         </p:spPr>
         <p:txBody>
-          <a:bodyPr wrap="none" lIns="0" rIns="0" tIns="0" bIns="0" anchor="t"/>
+          <a:bodyPr wrap="none" lIns="0" tIns="0" rIns="0" bIns="0" anchor="t"/>
           <a:lstStyle/>
           <a:p>
             <a:pPr algn="l">
@@ -7091,7 +6649,7 @@
               </a:lnSpc>
             </a:pPr>
             <a:r>
-              <a:rPr b="0" sz="10350" spc="-362">
+              <a:rPr sz="10350" b="0" spc="-362">
                 <a:solidFill>
                   <a:srgbClr val="EA4C74"/>
                 </a:solidFill>
@@ -7112,67 +6670,26 @@
 </p:sld>
 </file>
 
-<file path=ppt/slides/slide3.xml><?xml version="1.0" encoding="utf-8"?>
-<p:sld xmlns:a="http://schemas.openxmlformats.org/drawingml/2006/main" xmlns:p="http://schemas.openxmlformats.org/presentationml/2006/main" xmlns:r="http://schemas.openxmlformats.org/officeDocument/2006/relationships">
-  <p:cSld name="V02-news-graphite">
+<file path=ppt/slides/slide5.xml><?xml version="1.0" encoding="utf-8"?>
+<p:sld xmlns:a="http://schemas.openxmlformats.org/drawingml/2006/main" xmlns:r="http://schemas.openxmlformats.org/officeDocument/2006/relationships" xmlns:p="http://schemas.openxmlformats.org/presentationml/2006/main">
+  <p:cSld name="V03-news-green">
     <p:spTree>
       <p:nvGrpSpPr>
         <p:cNvPr id="1" name=""/>
         <p:cNvGrpSpPr/>
         <p:nvPr/>
       </p:nvGrpSpPr>
-      <p:grpSpPr/>
-      <p:sp>
-        <p:nvSpPr>
-          <p:cNvPr id="2" name="Picture Placeholder 1"/>
-          <p:cNvSpPr>
-            <a:spLocks noGrp="1"/>
-          </p:cNvSpPr>
-          <p:nvPr>
-            <p:ph type="pic" idx="10"/>
-          </p:nvPr>
-        </p:nvSpPr>
-        <p:spPr/>
-      </p:sp>
-      <p:sp>
-        <p:nvSpPr>
-          <p:cNvPr id="3" name="Picture Placeholder 2"/>
-          <p:cNvSpPr>
-            <a:spLocks noGrp="1"/>
-          </p:cNvSpPr>
-          <p:nvPr>
-            <p:ph type="pic" idx="11"/>
-          </p:nvPr>
-        </p:nvSpPr>
-        <p:spPr/>
-      </p:sp>
+      <p:grpSpPr>
+        <a:xfrm>
+          <a:off x="0" y="0"/>
+          <a:ext cx="0" cy="0"/>
+          <a:chOff x="0" y="0"/>
+          <a:chExt cx="0" cy="0"/>
+        </a:xfrm>
+      </p:grpSpPr>
       <p:pic>
         <p:nvPicPr>
-          <p:cNvPr id="4" name="Фон (картинка, без текста)" descr="V02-news-graphite-bg.png"/>
-          <p:cNvPicPr>
-            <a:picLocks noChangeAspect="1"/>
-          </p:cNvPicPr>
-          <p:nvPr/>
-        </p:nvPicPr>
-        <p:blipFill>
-          <a:blip r:embed="rId2"/>
-          <a:stretch>
-            <a:fillRect/>
-          </a:stretch>
-        </p:blipFill>
-        <p:spPr>
-          <a:xfrm>
-            <a:off x="0" y="0"/>
-            <a:ext cx="10287000" cy="10287000"/>
-          </a:xfrm>
-          <a:prstGeom prst="rect">
-            <a:avLst/>
-          </a:prstGeom>
-        </p:spPr>
-      </p:pic>
-      <p:pic>
-        <p:nvPicPr>
-          <p:cNvPr id="5" name="Логотип" descr="logo-full-white.png"/>
+          <p:cNvPr id="4" name="Фон (картинка, без текста)" descr="V03-news-green-bg.png"/>
           <p:cNvPicPr>
             <a:picLocks noChangeAspect="1"/>
           </p:cNvPicPr>
@@ -7186,14 +6703,38 @@
         </p:blipFill>
         <p:spPr>
           <a:xfrm>
-            <a:off x="914400" y="914400"/>
-            <a:ext cx="1905000" cy="1162942"/>
+            <a:off x="0" y="0"/>
+            <a:ext cx="10287000" cy="10287000"/>
           </a:xfrm>
           <a:prstGeom prst="rect">
             <a:avLst/>
           </a:prstGeom>
         </p:spPr>
       </p:pic>
+      <p:pic>
+        <p:nvPicPr>
+          <p:cNvPr id="5" name="Логотип" descr="logo-full-white.png"/>
+          <p:cNvPicPr>
+            <a:picLocks noChangeAspect="1"/>
+          </p:cNvPicPr>
+          <p:nvPr/>
+        </p:nvPicPr>
+        <p:blipFill>
+          <a:blip r:embed="rId4"/>
+          <a:stretch>
+            <a:fillRect/>
+          </a:stretch>
+        </p:blipFill>
+        <p:spPr>
+          <a:xfrm>
+            <a:off x="914400" y="914400"/>
+            <a:ext cx="1905000" cy="1162942"/>
+          </a:xfrm>
+          <a:prstGeom prst="rect">
+            <a:avLst/>
+          </a:prstGeom>
+        </p:spPr>
+      </p:pic>
       <p:sp>
         <p:nvSpPr>
           <p:cNvPr id="6" name="Малиновая черта"/>
@@ -7202,7 +6743,7 @@
         </p:nvSpPr>
         <p:spPr>
           <a:xfrm>
-            <a:off x="914400" y="3155305"/>
+            <a:off x="914400" y="2702867"/>
             <a:ext cx="609600" cy="38100"/>
           </a:xfrm>
           <a:prstGeom prst="rect">
@@ -7235,6 +6776,7 @@
           <a:lstStyle/>
           <a:p>
             <a:pPr algn="ctr"/>
+            <a:endParaRPr/>
           </a:p>
         </p:txBody>
       </p:sp>
@@ -7246,7 +6788,7 @@
         </p:nvSpPr>
         <p:spPr>
           <a:xfrm>
-            <a:off x="914400" y="3477250"/>
+            <a:off x="914400" y="3024812"/>
             <a:ext cx="9144000" cy="251460"/>
           </a:xfrm>
           <a:prstGeom prst="rect">
@@ -7255,7 +6797,7 @@
           <a:noFill/>
         </p:spPr>
         <p:txBody>
-          <a:bodyPr wrap="none" lIns="0" rIns="0" tIns="0" bIns="0" anchor="t"/>
+          <a:bodyPr wrap="none" lIns="0" tIns="0" rIns="0" bIns="0" anchor="t"/>
           <a:lstStyle/>
           <a:p>
             <a:pPr algn="l">
@@ -7264,9 +6806,9 @@
               </a:lnSpc>
             </a:pPr>
             <a:r>
-              <a:rPr b="0" sz="1650" spc="231" cap="all">
-                <a:solidFill>
-                  <a:srgbClr val="D2BE8C"/>
+              <a:rPr sz="1650" b="0" cap="all" spc="231">
+                <a:solidFill>
+                  <a:srgbClr val="E0E1C9"/>
                 </a:solidFill>
                 <a:latin typeface="Gilroy Medium"/>
                 <a:ea typeface="Gilroy Medium"/>
@@ -7285,8 +6827,8 @@
         </p:nvSpPr>
         <p:spPr>
           <a:xfrm>
-            <a:off x="914400" y="4002268"/>
-            <a:ext cx="9144000" cy="3090672"/>
+            <a:off x="857250" y="3563180"/>
+            <a:ext cx="9201150" cy="4005072"/>
           </a:xfrm>
           <a:prstGeom prst="rect">
             <a:avLst/>
@@ -7294,49 +6836,113 @@
           <a:noFill/>
         </p:spPr>
         <p:txBody>
-          <a:bodyPr wrap="none" lIns="0" rIns="0" tIns="0" bIns="0" anchor="t"/>
+          <a:bodyPr wrap="none" lIns="0" tIns="0" rIns="0" bIns="0" anchor="t"/>
           <a:lstStyle/>
           <a:p>
             <a:pPr algn="l">
               <a:lnSpc>
-                <a:spcPts val="8112"/>
+                <a:spcPts val="10512"/>
               </a:lnSpc>
             </a:pPr>
             <a:r>
-              <a:rPr b="0" sz="7800" spc="-156">
+              <a:rPr sz="10950" b="1" spc="-383" dirty="0" err="1">
                 <a:solidFill>
                   <a:srgbClr val="FFFFFF"/>
                 </a:solidFill>
-                <a:latin typeface="Gilroy SemiBold"/>
-                <a:ea typeface="Gilroy SemiBold"/>
-                <a:cs typeface="Gilroy SemiBold"/>
-              </a:rPr>
-              <a:t>Здесь будет</a:t>
-            </a:r>
-            <a:br/>
-            <a:r>
-              <a:rPr b="0" sz="7800" spc="-156">
+                <a:latin typeface="Gilroy"/>
+                <a:ea typeface="Gilroy"/>
+                <a:cs typeface="Gilroy"/>
+              </a:rPr>
+              <a:t>Здесь</a:t>
+            </a:r>
+            <a:r>
+              <a:rPr sz="10950" b="1" spc="-383" dirty="0">
                 <a:solidFill>
                   <a:srgbClr val="FFFFFF"/>
                 </a:solidFill>
-                <a:latin typeface="Gilroy SemiBold"/>
-                <a:ea typeface="Gilroy SemiBold"/>
-                <a:cs typeface="Gilroy SemiBold"/>
-              </a:rPr>
-              <a:t>ваш заголовок</a:t>
-            </a:r>
-            <a:br/>
-            <a:r>
-              <a:rPr b="0" sz="7800" spc="-156">
+                <a:latin typeface="Gilroy"/>
+                <a:ea typeface="Gilroy"/>
+                <a:cs typeface="Gilroy"/>
+              </a:rPr>
+              <a:t> </a:t>
+            </a:r>
+            <a:r>
+              <a:rPr sz="10950" b="1" spc="-383" dirty="0" err="1">
                 <a:solidFill>
                   <a:srgbClr val="FFFFFF"/>
                 </a:solidFill>
-                <a:latin typeface="Gilroy SemiBold"/>
-                <a:ea typeface="Gilroy SemiBold"/>
-                <a:cs typeface="Gilroy SemiBold"/>
-              </a:rPr>
-              <a:t>на три строки</a:t>
-            </a:r>
+                <a:latin typeface="Gilroy"/>
+                <a:ea typeface="Gilroy"/>
+                <a:cs typeface="Gilroy"/>
+              </a:rPr>
+              <a:t>будет</a:t>
+            </a:r>
+            <a:r>
+              <a:rPr dirty="0"/>
+              <a:t/>
+            </a:r>
+            <a:br>
+              <a:rPr dirty="0"/>
+            </a:br>
+            <a:r>
+              <a:rPr sz="10950" b="1" spc="-383" dirty="0" err="1">
+                <a:solidFill>
+                  <a:srgbClr val="FFFFFF"/>
+                </a:solidFill>
+                <a:latin typeface="Gilroy"/>
+                <a:ea typeface="Gilroy"/>
+                <a:cs typeface="Gilroy"/>
+              </a:rPr>
+              <a:t>ваш</a:t>
+            </a:r>
+            <a:r>
+              <a:rPr sz="10950" b="1" spc="-383" dirty="0">
+                <a:solidFill>
+                  <a:srgbClr val="FFFFFF"/>
+                </a:solidFill>
+                <a:latin typeface="Gilroy"/>
+                <a:ea typeface="Gilroy"/>
+                <a:cs typeface="Gilroy"/>
+              </a:rPr>
+              <a:t> </a:t>
+            </a:r>
+            <a:r>
+              <a:rPr sz="10950" b="1" spc="-383" dirty="0" err="1">
+                <a:solidFill>
+                  <a:srgbClr val="FFFFFF"/>
+                </a:solidFill>
+                <a:latin typeface="Gilroy"/>
+                <a:ea typeface="Gilroy"/>
+                <a:cs typeface="Gilroy"/>
+              </a:rPr>
+              <a:t>крупный</a:t>
+            </a:r>
+            <a:r>
+              <a:rPr dirty="0"/>
+              <a:t/>
+            </a:r>
+            <a:br>
+              <a:rPr dirty="0"/>
+            </a:br>
+            <a:r>
+              <a:rPr sz="10950" b="1" spc="-383" dirty="0" err="1">
+                <a:solidFill>
+                  <a:srgbClr val="FFFFFF"/>
+                </a:solidFill>
+                <a:latin typeface="Gilroy"/>
+                <a:ea typeface="Gilroy"/>
+                <a:cs typeface="Gilroy"/>
+              </a:rPr>
+              <a:t>заголовок</a:t>
+            </a:r>
+            <a:endParaRPr sz="10950" b="1" spc="-383" dirty="0">
+              <a:solidFill>
+                <a:srgbClr val="FFFFFF"/>
+              </a:solidFill>
+              <a:latin typeface="Gilroy"/>
+              <a:ea typeface="Gilroy"/>
+              <a:cs typeface="Gilroy"/>
+            </a:endParaRPr>
           </a:p>
         </p:txBody>
       </p:sp>
@@ -7348,7 +6954,7 @@
         </p:nvSpPr>
         <p:spPr>
           <a:xfrm>
-            <a:off x="914400" y="7537459"/>
+            <a:off x="914400" y="7985134"/>
             <a:ext cx="9144000" cy="617220"/>
           </a:xfrm>
           <a:prstGeom prst="rect">
@@ -7357,7 +6963,7 @@
           <a:noFill/>
         </p:spPr>
         <p:txBody>
-          <a:bodyPr wrap="none" lIns="0" rIns="0" tIns="0" bIns="0" anchor="t"/>
+          <a:bodyPr wrap="none" lIns="0" tIns="0" rIns="0" bIns="0" anchor="t"/>
           <a:lstStyle/>
           <a:p>
             <a:pPr algn="l">
@@ -7366,27 +6972,129 @@
               </a:lnSpc>
             </a:pPr>
             <a:r>
-              <a:rPr b="0" sz="4050" spc="-20">
-                <a:solidFill>
-                  <a:srgbClr val="BABAB9"/>
+              <a:rPr sz="4050" b="0">
+                <a:solidFill>
+                  <a:srgbClr val="E4E4D2"/>
                 </a:solidFill>
                 <a:latin typeface="Gilroy Medium"/>
                 <a:ea typeface="Gilroy Medium"/>
                 <a:cs typeface="Gilroy Medium"/>
               </a:rPr>
-              <a:t>с </a:t>
-            </a:r>
-            <a:r>
-              <a:rPr b="0" sz="4050" spc="-20">
-                <a:solidFill>
-                  <a:srgbClr val="EA4C74"/>
-                </a:solidFill>
-                <a:latin typeface="Gilroy SemiBold"/>
-                <a:ea typeface="Gilroy SemiBold"/>
-                <a:cs typeface="Gilroy SemiBold"/>
-              </a:rPr>
-              <a:t>дата или срок</a:t>
-            </a:r>
+              <a:t>с</a:t>
+            </a:r>
+          </a:p>
+        </p:txBody>
+      </p:sp>
+      <p:sp>
+        <p:nvSpPr>
+          <p:cNvPr id="10" name="Текст 4"/>
+          <p:cNvSpPr txBox="1"/>
+          <p:nvPr/>
+        </p:nvSpPr>
+        <p:spPr>
+          <a:xfrm>
+            <a:off x="1348233" y="7980372"/>
+            <a:ext cx="8710166" cy="617220"/>
+          </a:xfrm>
+          <a:prstGeom prst="rect">
+            <a:avLst/>
+          </a:prstGeom>
+          <a:noFill/>
+        </p:spPr>
+        <p:txBody>
+          <a:bodyPr wrap="none" lIns="0" tIns="0" rIns="0" bIns="0" anchor="t"/>
+          <a:lstStyle/>
+          <a:p>
+            <a:pPr algn="l">
+              <a:lnSpc>
+                <a:spcPts val="4859"/>
+              </a:lnSpc>
+            </a:pPr>
+            <a:r>
+              <a:rPr sz="4050" b="1" dirty="0" err="1" smtClean="0">
+                <a:solidFill>
+                  <a:srgbClr val="FFFFFF"/>
+                </a:solidFill>
+                <a:latin typeface="Gilroy"/>
+                <a:ea typeface="Gilroy"/>
+                <a:cs typeface="Gilroy"/>
+              </a:rPr>
+              <a:t>дат</a:t>
+            </a:r>
+            <a:r>
+              <a:rPr lang="ru-RU" sz="4050" b="1" dirty="0" smtClean="0">
+                <a:solidFill>
+                  <a:srgbClr val="FFFFFF"/>
+                </a:solidFill>
+                <a:latin typeface="Gilroy"/>
+                <a:ea typeface="Gilroy"/>
+                <a:cs typeface="Gilroy"/>
+              </a:rPr>
+              <a:t>ой</a:t>
+            </a:r>
+            <a:r>
+              <a:rPr sz="4050" b="1" dirty="0" smtClean="0">
+                <a:solidFill>
+                  <a:srgbClr val="FFFFFF"/>
+                </a:solidFill>
+                <a:latin typeface="Gilroy"/>
+                <a:ea typeface="Gilroy"/>
+                <a:cs typeface="Gilroy"/>
+              </a:rPr>
+              <a:t> </a:t>
+            </a:r>
+            <a:r>
+              <a:rPr sz="4050" b="1" dirty="0" err="1">
+                <a:solidFill>
+                  <a:srgbClr val="FFFFFF"/>
+                </a:solidFill>
+                <a:latin typeface="Gilroy"/>
+                <a:ea typeface="Gilroy"/>
+                <a:cs typeface="Gilroy"/>
+              </a:rPr>
+              <a:t>или</a:t>
+            </a:r>
+            <a:r>
+              <a:rPr sz="4050" b="1" dirty="0">
+                <a:solidFill>
+                  <a:srgbClr val="FFFFFF"/>
+                </a:solidFill>
+                <a:latin typeface="Gilroy"/>
+                <a:ea typeface="Gilroy"/>
+                <a:cs typeface="Gilroy"/>
+              </a:rPr>
+              <a:t> </a:t>
+            </a:r>
+            <a:r>
+              <a:rPr sz="4050" b="1" dirty="0" err="1" smtClean="0">
+                <a:solidFill>
+                  <a:srgbClr val="FFFFFF"/>
+                </a:solidFill>
+                <a:latin typeface="Gilroy"/>
+                <a:ea typeface="Gilroy"/>
+                <a:cs typeface="Gilroy"/>
+              </a:rPr>
+              <a:t>срок</a:t>
+            </a:r>
+            <a:r>
+              <a:rPr lang="ru-RU" sz="4050" b="1" dirty="0" smtClean="0">
+                <a:solidFill>
+                  <a:srgbClr val="FFFFFF"/>
+                </a:solidFill>
+                <a:latin typeface="Gilroy"/>
+                <a:ea typeface="Gilroy"/>
+                <a:cs typeface="Gilroy"/>
+              </a:rPr>
+              <a:t>ом</a:t>
+            </a:r>
+            <a:endParaRPr sz="4050" b="1" dirty="0">
+              <a:solidFill>
+                <a:srgbClr val="FFFFFF"/>
+              </a:solidFill>
+              <a:latin typeface="Gilroy"/>
+              <a:ea typeface="Gilroy"/>
+              <a:cs typeface="Gilroy"/>
+            </a:endParaRPr>
           </a:p>
         </p:txBody>
       </p:sp>
@@ -7398,50 +7106,60 @@
 </p:sld>
 </file>
 
-<file path=ppt/slides/slide4.xml><?xml version="1.0" encoding="utf-8"?>
-<p:sld xmlns:a="http://schemas.openxmlformats.org/drawingml/2006/main" xmlns:p="http://schemas.openxmlformats.org/presentationml/2006/main" xmlns:r="http://schemas.openxmlformats.org/officeDocument/2006/relationships">
-  <p:cSld name="V14-graphite-hero-question">
+<file path=ppt/slides/slide6.xml><?xml version="1.0" encoding="utf-8"?>
+<p:sld xmlns:a="http://schemas.openxmlformats.org/drawingml/2006/main" xmlns:r="http://schemas.openxmlformats.org/officeDocument/2006/relationships" xmlns:p="http://schemas.openxmlformats.org/presentationml/2006/main">
+  <p:cSld name="V06-team">
     <p:spTree>
       <p:nvGrpSpPr>
         <p:cNvPr id="1" name=""/>
         <p:cNvGrpSpPr/>
         <p:nvPr/>
       </p:nvGrpSpPr>
-      <p:grpSpPr/>
-      <p:sp>
-        <p:nvSpPr>
-          <p:cNvPr id="2" name="Picture Placeholder 1"/>
-          <p:cNvSpPr>
-            <a:spLocks noGrp="1"/>
-          </p:cNvSpPr>
-          <p:nvPr>
-            <p:ph type="pic" idx="10"/>
-          </p:nvPr>
-        </p:nvSpPr>
-        <p:spPr/>
-      </p:sp>
-      <p:sp>
-        <p:nvSpPr>
-          <p:cNvPr id="3" name="Picture Placeholder 2"/>
-          <p:cNvSpPr>
-            <a:spLocks noGrp="1"/>
-          </p:cNvSpPr>
-          <p:nvPr>
-            <p:ph type="pic" idx="11"/>
-          </p:nvPr>
-        </p:nvSpPr>
-        <p:spPr/>
-      </p:sp>
+      <p:grpSpPr>
+        <a:xfrm>
+          <a:off x="0" y="0"/>
+          <a:ext cx="0" cy="0"/>
+          <a:chOff x="0" y="0"/>
+          <a:chExt cx="0" cy="0"/>
+        </a:xfrm>
+      </p:grpSpPr>
       <p:pic>
         <p:nvPicPr>
-          <p:cNvPr id="4" name="Фон (картинка, без текста)" descr="V14-graphite-hero-question-bg.png"/>
+          <p:cNvPr id="4" name="Фото (заменить: Изменить рисунок)" descr="studio-0484.jpg"/>
+          <p:cNvPicPr>
+            <a:picLocks noGrp="1" noChangeAspect="1"/>
+          </p:cNvPicPr>
+          <p:nvPr>
+            <p:ph type="pic" idx="10"/>
+          </p:nvPr>
+        </p:nvPicPr>
+        <p:blipFill>
+          <a:blip r:embed="rId3"/>
+          <a:srcRect/>
+          <a:stretch>
+            <a:fillRect/>
+          </a:stretch>
+        </p:blipFill>
+        <p:spPr>
+          <a:xfrm>
+            <a:off x="0" y="2571750"/>
+            <a:ext cx="10287000" cy="7715250"/>
+          </a:xfrm>
+          <a:prstGeom prst="rect">
+            <a:avLst/>
+          </a:prstGeom>
+        </p:spPr>
+      </p:pic>
+      <p:pic>
+        <p:nvPicPr>
+          <p:cNvPr id="5" name="Фон (картинка, без текста)" descr="V06-team-bg-fade.png"/>
           <p:cNvPicPr>
             <a:picLocks noChangeAspect="1"/>
           </p:cNvPicPr>
           <p:nvPr/>
         </p:nvPicPr>
         <p:blipFill>
-          <a:blip r:embed="rId2"/>
+          <a:blip r:embed="rId4"/>
           <a:stretch>
             <a:fillRect/>
           </a:stretch>
@@ -7458,14 +7176,14 @@
       </p:pic>
       <p:pic>
         <p:nvPicPr>
-          <p:cNvPr id="5" name="Логотип" descr="logo-full-white.png"/>
+          <p:cNvPr id="6" name="Логотип" descr="logo-full.png"/>
           <p:cNvPicPr>
             <a:picLocks noChangeAspect="1"/>
           </p:cNvPicPr>
           <p:nvPr/>
         </p:nvPicPr>
         <p:blipFill>
-          <a:blip r:embed="rId3"/>
+          <a:blip r:embed="rId5"/>
           <a:stretch>
             <a:fillRect/>
           </a:stretch>
@@ -7482,13 +7200,13 @@
       </p:pic>
       <p:sp>
         <p:nvSpPr>
-          <p:cNvPr id="6" name="Малиновая черта"/>
+          <p:cNvPr id="7" name="Малиновая черта"/>
           <p:cNvSpPr/>
           <p:nvPr/>
         </p:nvSpPr>
         <p:spPr>
           <a:xfrm>
-            <a:off x="914400" y="4142035"/>
+            <a:off x="914400" y="2362200"/>
             <a:ext cx="609600" cy="38100"/>
           </a:xfrm>
           <a:prstGeom prst="rect">
@@ -7521,19 +7239,20 @@
           <a:lstStyle/>
           <a:p>
             <a:pPr algn="ctr"/>
-          </a:p>
-        </p:txBody>
-      </p:sp>
-      <p:sp>
-        <p:nvSpPr>
-          <p:cNvPr id="7" name="Текст 1"/>
+            <a:endParaRPr/>
+          </a:p>
+        </p:txBody>
+      </p:sp>
+      <p:sp>
+        <p:nvSpPr>
+          <p:cNvPr id="8" name="Текст 1"/>
           <p:cNvSpPr txBox="1"/>
           <p:nvPr/>
         </p:nvSpPr>
         <p:spPr>
           <a:xfrm>
-            <a:off x="914400" y="4458265"/>
-            <a:ext cx="9144000" cy="1173480"/>
+            <a:off x="914400" y="2685288"/>
+            <a:ext cx="9144000" cy="2060448"/>
           </a:xfrm>
           <a:prstGeom prst="rect">
             <a:avLst/>
@@ -7541,76 +7260,117 @@
           <a:noFill/>
         </p:spPr>
         <p:txBody>
-          <a:bodyPr wrap="none" lIns="0" rIns="0" tIns="0" bIns="0" anchor="t"/>
+          <a:bodyPr wrap="none" lIns="0" tIns="0" rIns="0" bIns="0" anchor="t"/>
           <a:lstStyle/>
           <a:p>
             <a:pPr algn="l">
               <a:lnSpc>
-                <a:spcPts val="4620"/>
+                <a:spcPts val="8112"/>
               </a:lnSpc>
             </a:pPr>
             <a:r>
-              <a:rPr b="0" sz="4200" spc="-84">
-                <a:solidFill>
-                  <a:srgbClr val="FFFFFF"/>
+              <a:rPr sz="7800" b="0" spc="-156" dirty="0" err="1">
+                <a:solidFill>
+                  <a:srgbClr val="1C1A17"/>
                 </a:solidFill>
                 <a:latin typeface="Gilroy SemiBold"/>
                 <a:ea typeface="Gilroy SemiBold"/>
                 <a:cs typeface="Gilroy SemiBold"/>
               </a:rPr>
-              <a:t>Контекст в две строки,</a:t>
-            </a:r>
-            <a:br/>
-            <a:r>
-              <a:rPr b="0" sz="4200" spc="-84">
-                <a:solidFill>
-                  <a:srgbClr val="FFFFFF"/>
+              <a:t>Как</a:t>
+            </a:r>
+            <a:r>
+              <a:rPr sz="7800" b="0" spc="-156" dirty="0">
+                <a:solidFill>
+                  <a:srgbClr val="1C1A17"/>
                 </a:solidFill>
                 <a:latin typeface="Gilroy SemiBold"/>
                 <a:ea typeface="Gilroy SemiBold"/>
                 <a:cs typeface="Gilroy SemiBold"/>
               </a:rPr>
-              <a:t>коротко и ясно</a:t>
-            </a:r>
-          </a:p>
-        </p:txBody>
-      </p:sp>
-      <p:sp>
-        <p:nvSpPr>
-          <p:cNvPr id="8" name="Текст 2"/>
-          <p:cNvSpPr txBox="1"/>
-          <p:nvPr/>
-        </p:nvSpPr>
-        <p:spPr>
-          <a:xfrm>
-            <a:off x="914400" y="5935531"/>
-            <a:ext cx="9144000" cy="1248727"/>
-          </a:xfrm>
-          <a:prstGeom prst="rect">
-            <a:avLst/>
-          </a:prstGeom>
-          <a:noFill/>
-        </p:spPr>
-        <p:txBody>
-          <a:bodyPr wrap="none" lIns="0" rIns="0" tIns="0" bIns="0" anchor="t"/>
-          <a:lstStyle/>
-          <a:p>
-            <a:pPr algn="l">
-              <a:lnSpc>
-                <a:spcPts val="9832"/>
-              </a:lnSpc>
-            </a:pPr>
-            <a:r>
-              <a:rPr b="0" sz="10350" spc="-362">
-                <a:solidFill>
-                  <a:srgbClr val="EA4C74"/>
-                </a:solidFill>
-                <a:latin typeface="Gilroy ExtraBold"/>
-                <a:ea typeface="Gilroy ExtraBold"/>
-                <a:cs typeface="Gilroy ExtraBold"/>
-              </a:rPr>
-              <a:t>Тут вопрос?</a:t>
-            </a:r>
+              <a:t> </a:t>
+            </a:r>
+            <a:r>
+              <a:rPr sz="7800" b="0" spc="-156" dirty="0" err="1">
+                <a:solidFill>
+                  <a:srgbClr val="1C1A17"/>
+                </a:solidFill>
+                <a:latin typeface="Gilroy SemiBold"/>
+                <a:ea typeface="Gilroy SemiBold"/>
+                <a:cs typeface="Gilroy SemiBold"/>
+              </a:rPr>
+              <a:t>мы</a:t>
+            </a:r>
+            <a:r>
+              <a:rPr sz="7800" b="0" spc="-156" dirty="0">
+                <a:solidFill>
+                  <a:srgbClr val="1C1A17"/>
+                </a:solidFill>
+                <a:latin typeface="Gilroy SemiBold"/>
+                <a:ea typeface="Gilroy SemiBold"/>
+                <a:cs typeface="Gilroy SemiBold"/>
+              </a:rPr>
+              <a:t> </a:t>
+            </a:r>
+            <a:r>
+              <a:rPr sz="7800" b="0" spc="-156" dirty="0" err="1">
+                <a:solidFill>
+                  <a:srgbClr val="D73A61"/>
+                </a:solidFill>
+                <a:latin typeface="Gilroy SemiBold"/>
+                <a:ea typeface="Gilroy SemiBold"/>
+                <a:cs typeface="Gilroy SemiBold"/>
+              </a:rPr>
+              <a:t>делаем</a:t>
+            </a:r>
+            <a:r>
+              <a:rPr dirty="0"/>
+              <a:t/>
+            </a:r>
+            <a:br>
+              <a:rPr dirty="0"/>
+            </a:br>
+            <a:r>
+              <a:rPr sz="7800" b="0" spc="-156" dirty="0" err="1">
+                <a:solidFill>
+                  <a:srgbClr val="1C1A17"/>
+                </a:solidFill>
+                <a:latin typeface="Gilroy SemiBold"/>
+                <a:ea typeface="Gilroy SemiBold"/>
+                <a:cs typeface="Gilroy SemiBold"/>
+              </a:rPr>
+              <a:t>что-то</a:t>
+            </a:r>
+            <a:r>
+              <a:rPr sz="7800" b="0" spc="-156" dirty="0">
+                <a:solidFill>
+                  <a:srgbClr val="1C1A17"/>
+                </a:solidFill>
+                <a:latin typeface="Gilroy SemiBold"/>
+                <a:ea typeface="Gilroy SemiBold"/>
+                <a:cs typeface="Gilroy SemiBold"/>
+              </a:rPr>
+              <a:t> </a:t>
+            </a:r>
+            <a:r>
+              <a:rPr sz="7800" b="0" spc="-156" dirty="0" err="1">
+                <a:solidFill>
+                  <a:srgbClr val="1C1A17"/>
+                </a:solidFill>
+                <a:latin typeface="Gilroy SemiBold"/>
+                <a:ea typeface="Gilroy SemiBold"/>
+                <a:cs typeface="Gilroy SemiBold"/>
+              </a:rPr>
+              <a:t>важное</a:t>
+            </a:r>
+            <a:endParaRPr sz="7800" b="0" spc="-156" dirty="0">
+              <a:solidFill>
+                <a:srgbClr val="1C1A17"/>
+              </a:solidFill>
+              <a:latin typeface="Gilroy SemiBold"/>
+              <a:ea typeface="Gilroy SemiBold"/>
+              <a:cs typeface="Gilroy SemiBold"/>
+            </a:endParaRPr>
           </a:p>
         </p:txBody>
       </p:sp>
@@ -7622,67 +7382,26 @@
 </p:sld>
 </file>
 
-<file path=ppt/slides/slide5.xml><?xml version="1.0" encoding="utf-8"?>
-<p:sld xmlns:a="http://schemas.openxmlformats.org/drawingml/2006/main" xmlns:p="http://schemas.openxmlformats.org/presentationml/2006/main" xmlns:r="http://schemas.openxmlformats.org/officeDocument/2006/relationships">
-  <p:cSld name="V03-news-green">
+<file path=ppt/slides/slide7.xml><?xml version="1.0" encoding="utf-8"?>
+<p:sld xmlns:a="http://schemas.openxmlformats.org/drawingml/2006/main" xmlns:r="http://schemas.openxmlformats.org/officeDocument/2006/relationships" xmlns:p="http://schemas.openxmlformats.org/presentationml/2006/main">
+  <p:cSld name="V08-fragment">
     <p:spTree>
       <p:nvGrpSpPr>
         <p:cNvPr id="1" name=""/>
         <p:cNvGrpSpPr/>
         <p:nvPr/>
       </p:nvGrpSpPr>
-      <p:grpSpPr/>
-      <p:sp>
-        <p:nvSpPr>
-          <p:cNvPr id="2" name="Picture Placeholder 1"/>
-          <p:cNvSpPr>
-            <a:spLocks noGrp="1"/>
-          </p:cNvSpPr>
-          <p:nvPr>
-            <p:ph type="pic" idx="10"/>
-          </p:nvPr>
-        </p:nvSpPr>
-        <p:spPr/>
-      </p:sp>
-      <p:sp>
-        <p:nvSpPr>
-          <p:cNvPr id="3" name="Picture Placeholder 2"/>
-          <p:cNvSpPr>
-            <a:spLocks noGrp="1"/>
-          </p:cNvSpPr>
-          <p:nvPr>
-            <p:ph type="pic" idx="11"/>
-          </p:nvPr>
-        </p:nvSpPr>
-        <p:spPr/>
-      </p:sp>
+      <p:grpSpPr>
+        <a:xfrm>
+          <a:off x="0" y="0"/>
+          <a:ext cx="0" cy="0"/>
+          <a:chOff x="0" y="0"/>
+          <a:chExt cx="0" cy="0"/>
+        </a:xfrm>
+      </p:grpSpPr>
       <p:pic>
         <p:nvPicPr>
-          <p:cNvPr id="4" name="Фон (картинка, без текста)" descr="V03-news-green-bg.png"/>
-          <p:cNvPicPr>
-            <a:picLocks noChangeAspect="1"/>
-          </p:cNvPicPr>
-          <p:nvPr/>
-        </p:nvPicPr>
-        <p:blipFill>
-          <a:blip r:embed="rId2"/>
-          <a:stretch>
-            <a:fillRect/>
-          </a:stretch>
-        </p:blipFill>
-        <p:spPr>
-          <a:xfrm>
-            <a:off x="0" y="0"/>
-            <a:ext cx="10287000" cy="10287000"/>
-          </a:xfrm>
-          <a:prstGeom prst="rect">
-            <a:avLst/>
-          </a:prstGeom>
-        </p:spPr>
-      </p:pic>
-      <p:pic>
-        <p:nvPicPr>
-          <p:cNvPr id="5" name="Логотип" descr="logo-full-white.png"/>
+          <p:cNvPr id="4" name="Фон (картинка, без текста)" descr="V05-list-bg.png"/>
           <p:cNvPicPr>
             <a:picLocks noChangeAspect="1"/>
           </p:cNvPicPr>
@@ -7696,23 +7415,74 @@
         </p:blipFill>
         <p:spPr>
           <a:xfrm>
-            <a:off x="914400" y="914400"/>
-            <a:ext cx="1905000" cy="1162942"/>
+            <a:off x="0" y="0"/>
+            <a:ext cx="10287000" cy="10287000"/>
           </a:xfrm>
           <a:prstGeom prst="rect">
             <a:avLst/>
           </a:prstGeom>
         </p:spPr>
       </p:pic>
-      <p:sp>
-        <p:nvSpPr>
-          <p:cNvPr id="6" name="Малиновая черта"/>
+      <p:pic>
+        <p:nvPicPr>
+          <p:cNvPr id="5" name="Фото (фрагмент) (заменить: Изменить рисунок)" descr="flatlay-band.jpg"/>
+          <p:cNvPicPr>
+            <a:picLocks noGrp="1" noChangeAspect="1"/>
+          </p:cNvPicPr>
+          <p:nvPr>
+            <p:ph type="pic" idx="10"/>
+          </p:nvPr>
+        </p:nvPicPr>
+        <p:blipFill>
+          <a:blip r:embed="rId4"/>
+          <a:srcRect t="1136" b="1136"/>
+          <a:stretch>
+            <a:fillRect/>
+          </a:stretch>
+        </p:blipFill>
+        <p:spPr>
+          <a:xfrm>
+            <a:off x="0" y="6191250"/>
+            <a:ext cx="10287000" cy="4095750"/>
+          </a:xfrm>
+          <a:prstGeom prst="rect">
+            <a:avLst/>
+          </a:prstGeom>
+        </p:spPr>
+      </p:pic>
+      <p:pic>
+        <p:nvPicPr>
+          <p:cNvPr id="6" name="Логотип" descr="logo-full.png"/>
+          <p:cNvPicPr>
+            <a:picLocks noChangeAspect="1"/>
+          </p:cNvPicPr>
+          <p:nvPr/>
+        </p:nvPicPr>
+        <p:blipFill>
+          <a:blip r:embed="rId5"/>
+          <a:stretch>
+            <a:fillRect/>
+          </a:stretch>
+        </p:blipFill>
+        <p:spPr>
+          <a:xfrm>
+            <a:off x="914400" y="914400"/>
+            <a:ext cx="1905000" cy="1162942"/>
+          </a:xfrm>
+          <a:prstGeom prst="rect">
+            <a:avLst/>
+          </a:prstGeom>
+        </p:spPr>
+      </p:pic>
+      <p:sp>
+        <p:nvSpPr>
+          <p:cNvPr id="7" name="Малиновая черта"/>
           <p:cNvSpPr/>
           <p:nvPr/>
         </p:nvSpPr>
         <p:spPr>
           <a:xfrm>
-            <a:off x="914400" y="2702867"/>
+            <a:off x="914400" y="2362200"/>
             <a:ext cx="609600" cy="38100"/>
           </a:xfrm>
           <a:prstGeom prst="rect">
@@ -7745,19 +7515,20 @@
           <a:lstStyle/>
           <a:p>
             <a:pPr algn="ctr"/>
-          </a:p>
-        </p:txBody>
-      </p:sp>
-      <p:sp>
-        <p:nvSpPr>
-          <p:cNvPr id="7" name="Текст 1"/>
+            <a:endParaRPr/>
+          </a:p>
+        </p:txBody>
+      </p:sp>
+      <p:sp>
+        <p:nvSpPr>
+          <p:cNvPr id="8" name="Текст 1"/>
           <p:cNvSpPr txBox="1"/>
           <p:nvPr/>
         </p:nvSpPr>
         <p:spPr>
           <a:xfrm>
-            <a:off x="914400" y="3024812"/>
-            <a:ext cx="9144000" cy="251460"/>
+            <a:off x="914400" y="2676906"/>
+            <a:ext cx="9144000" cy="1941576"/>
           </a:xfrm>
           <a:prstGeom prst="rect">
             <a:avLst/>
@@ -7765,38 +7536,108 @@
           <a:noFill/>
         </p:spPr>
         <p:txBody>
-          <a:bodyPr wrap="none" lIns="0" rIns="0" tIns="0" bIns="0" anchor="t"/>
+          <a:bodyPr wrap="none" lIns="0" tIns="0" rIns="0" bIns="0" anchor="t"/>
           <a:lstStyle/>
           <a:p>
             <a:pPr algn="l">
               <a:lnSpc>
-                <a:spcPts val="1979"/>
+                <a:spcPts val="7644"/>
               </a:lnSpc>
             </a:pPr>
             <a:r>
-              <a:rPr b="0" sz="1650" spc="231" cap="all">
-                <a:solidFill>
-                  <a:srgbClr val="E0E1C9"/>
-                </a:solidFill>
-                <a:latin typeface="Gilroy Medium"/>
-                <a:ea typeface="Gilroy Medium"/>
-                <a:cs typeface="Gilroy Medium"/>
-              </a:rPr>
-              <a:t>Рубрика или тема</a:t>
-            </a:r>
-          </a:p>
-        </p:txBody>
-      </p:sp>
-      <p:sp>
-        <p:nvSpPr>
-          <p:cNvPr id="8" name="Текст 2"/>
+              <a:rPr sz="7350" b="0" spc="-147" dirty="0" err="1">
+                <a:solidFill>
+                  <a:srgbClr val="1C1A17"/>
+                </a:solidFill>
+                <a:latin typeface="Gilroy SemiBold"/>
+                <a:ea typeface="Gilroy SemiBold"/>
+                <a:cs typeface="Gilroy SemiBold"/>
+              </a:rPr>
+              <a:t>Заголовок</a:t>
+            </a:r>
+            <a:r>
+              <a:rPr sz="7350" b="0" spc="-147" dirty="0">
+                <a:solidFill>
+                  <a:srgbClr val="1C1A17"/>
+                </a:solidFill>
+                <a:latin typeface="Gilroy SemiBold"/>
+                <a:ea typeface="Gilroy SemiBold"/>
+                <a:cs typeface="Gilroy SemiBold"/>
+              </a:rPr>
+              <a:t> </a:t>
+            </a:r>
+            <a:r>
+              <a:rPr sz="7350" b="0" spc="-147" dirty="0" err="1">
+                <a:solidFill>
+                  <a:srgbClr val="1C1A17"/>
+                </a:solidFill>
+                <a:latin typeface="Gilroy SemiBold"/>
+                <a:ea typeface="Gilroy SemiBold"/>
+                <a:cs typeface="Gilroy SemiBold"/>
+              </a:rPr>
+              <a:t>про</a:t>
+            </a:r>
+            <a:r>
+              <a:rPr dirty="0"/>
+              <a:t/>
+            </a:r>
+            <a:br>
+              <a:rPr dirty="0"/>
+            </a:br>
+            <a:r>
+              <a:rPr sz="7350" b="0" spc="-147" dirty="0" err="1">
+                <a:solidFill>
+                  <a:srgbClr val="1C1A17"/>
+                </a:solidFill>
+                <a:latin typeface="Gilroy SemiBold"/>
+                <a:ea typeface="Gilroy SemiBold"/>
+                <a:cs typeface="Gilroy SemiBold"/>
+              </a:rPr>
+              <a:t>нас</a:t>
+            </a:r>
+            <a:r>
+              <a:rPr sz="7350" b="0" spc="-147" dirty="0">
+                <a:solidFill>
+                  <a:srgbClr val="1C1A17"/>
+                </a:solidFill>
+                <a:latin typeface="Gilroy SemiBold"/>
+                <a:ea typeface="Gilroy SemiBold"/>
+                <a:cs typeface="Gilroy SemiBold"/>
+              </a:rPr>
+              <a:t> с </a:t>
+            </a:r>
+            <a:r>
+              <a:rPr sz="7350" b="0" spc="-147" dirty="0" err="1">
+                <a:solidFill>
+                  <a:srgbClr val="D73A61"/>
+                </a:solidFill>
+                <a:latin typeface="Gilroy SemiBold"/>
+                <a:ea typeface="Gilroy SemiBold"/>
+                <a:cs typeface="Gilroy SemiBold"/>
+              </a:rPr>
+              <a:t>акцентом</a:t>
+            </a:r>
+            <a:endParaRPr sz="7350" b="0" spc="-147" dirty="0">
+              <a:solidFill>
+                <a:srgbClr val="D73A61"/>
+              </a:solidFill>
+              <a:latin typeface="Gilroy SemiBold"/>
+              <a:ea typeface="Gilroy SemiBold"/>
+              <a:cs typeface="Gilroy SemiBold"/>
+            </a:endParaRPr>
+          </a:p>
+        </p:txBody>
+      </p:sp>
+      <p:sp>
+        <p:nvSpPr>
+          <p:cNvPr id="9" name="Текст 2"/>
           <p:cNvSpPr txBox="1"/>
           <p:nvPr/>
         </p:nvSpPr>
         <p:spPr>
           <a:xfrm>
-            <a:off x="857250" y="3563180"/>
-            <a:ext cx="9201150" cy="4005072"/>
+            <a:off x="914400" y="4872632"/>
+            <a:ext cx="9144000" cy="1000125"/>
           </a:xfrm>
           <a:prstGeom prst="rect">
             <a:avLst/>
@@ -7804,126 +7645,39 @@
           <a:noFill/>
         </p:spPr>
         <p:txBody>
-          <a:bodyPr wrap="none" lIns="0" rIns="0" tIns="0" bIns="0" anchor="t"/>
+          <a:bodyPr wrap="none" lIns="0" tIns="0" rIns="0" bIns="0" anchor="t"/>
           <a:lstStyle/>
           <a:p>
             <a:pPr algn="l">
               <a:lnSpc>
-                <a:spcPts val="10512"/>
+                <a:spcPts val="3937"/>
               </a:lnSpc>
             </a:pPr>
             <a:r>
-              <a:rPr b="1" sz="10950" spc="-383">
-                <a:solidFill>
-                  <a:srgbClr val="FFFFFF"/>
-                </a:solidFill>
-                <a:latin typeface="Gilroy"/>
-                <a:ea typeface="Gilroy"/>
-                <a:cs typeface="Gilroy"/>
-              </a:rPr>
-              <a:t>Здесь будет</a:t>
-            </a:r>
-            <a:br/>
-            <a:r>
-              <a:rPr b="1" sz="10950" spc="-383">
-                <a:solidFill>
-                  <a:srgbClr val="FFFFFF"/>
-                </a:solidFill>
-                <a:latin typeface="Gilroy"/>
-                <a:ea typeface="Gilroy"/>
-                <a:cs typeface="Gilroy"/>
-              </a:rPr>
-              <a:t>ваш крупный</a:t>
-            </a:r>
-            <a:br/>
-            <a:r>
-              <a:rPr b="1" sz="10950" spc="-383">
-                <a:solidFill>
-                  <a:srgbClr val="FFFFFF"/>
-                </a:solidFill>
-                <a:latin typeface="Gilroy"/>
-                <a:ea typeface="Gilroy"/>
-                <a:cs typeface="Gilroy"/>
-              </a:rPr>
-              <a:t>заголовок</a:t>
-            </a:r>
-          </a:p>
-        </p:txBody>
-      </p:sp>
-      <p:sp>
-        <p:nvSpPr>
-          <p:cNvPr id="9" name="Текст 3"/>
-          <p:cNvSpPr txBox="1"/>
-          <p:nvPr/>
-        </p:nvSpPr>
-        <p:spPr>
-          <a:xfrm>
-            <a:off x="914400" y="7985134"/>
-            <a:ext cx="9144000" cy="617220"/>
-          </a:xfrm>
-          <a:prstGeom prst="rect">
-            <a:avLst/>
-          </a:prstGeom>
-          <a:noFill/>
-        </p:spPr>
-        <p:txBody>
-          <a:bodyPr wrap="none" lIns="0" rIns="0" tIns="0" bIns="0" anchor="t"/>
-          <a:lstStyle/>
-          <a:p>
-            <a:pPr algn="l">
-              <a:lnSpc>
-                <a:spcPts val="4859"/>
-              </a:lnSpc>
-            </a:pPr>
-            <a:r>
-              <a:rPr b="0" sz="4050">
-                <a:solidFill>
-                  <a:srgbClr val="E4E4D2"/>
+              <a:rPr sz="3150" b="0" spc="-16">
+                <a:solidFill>
+                  <a:srgbClr val="6A6965"/>
                 </a:solidFill>
                 <a:latin typeface="Gilroy Medium"/>
                 <a:ea typeface="Gilroy Medium"/>
                 <a:cs typeface="Gilroy Medium"/>
               </a:rPr>
-              <a:t>с</a:t>
-            </a:r>
-          </a:p>
-        </p:txBody>
-      </p:sp>
-      <p:sp>
-        <p:nvSpPr>
-          <p:cNvPr id="10" name="Текст 4"/>
-          <p:cNvSpPr txBox="1"/>
-          <p:nvPr/>
-        </p:nvSpPr>
-        <p:spPr>
-          <a:xfrm>
-            <a:off x="1348233" y="7980372"/>
-            <a:ext cx="8710166" cy="617220"/>
-          </a:xfrm>
-          <a:prstGeom prst="rect">
-            <a:avLst/>
-          </a:prstGeom>
-          <a:noFill/>
-        </p:spPr>
-        <p:txBody>
-          <a:bodyPr wrap="none" lIns="0" rIns="0" tIns="0" bIns="0" anchor="t"/>
-          <a:lstStyle/>
-          <a:p>
-            <a:pPr algn="l">
-              <a:lnSpc>
-                <a:spcPts val="4859"/>
-              </a:lnSpc>
-            </a:pPr>
-            <a:r>
-              <a:rPr b="1" sz="4050">
-                <a:solidFill>
-                  <a:srgbClr val="FFFFFF"/>
-                </a:solidFill>
-                <a:latin typeface="Gilroy"/>
-                <a:ea typeface="Gilroy"/>
-                <a:cs typeface="Gilroy"/>
-              </a:rPr>
-              <a:t>дата или срок</a:t>
+              <a:t>Подзаголовок в одну-две строки,</a:t>
+            </a:r>
+            <a:r>
+              <a:t/>
+            </a:r>
+            <a:br/>
+            <a:r>
+              <a:rPr sz="3150" b="0" spc="-16">
+                <a:solidFill>
+                  <a:srgbClr val="6A6965"/>
+                </a:solidFill>
+                <a:latin typeface="Gilroy Medium"/>
+                <a:ea typeface="Gilroy Medium"/>
+                <a:cs typeface="Gilroy Medium"/>
+              </a:rPr>
+              <a:t>поясняет суть предложения</a:t>
             </a:r>
           </a:p>
         </p:txBody>
@@ -7936,40 +7690,23 @@
 </p:sld>
 </file>
 
-<file path=ppt/slides/slide6.xml><?xml version="1.0" encoding="utf-8"?>
-<p:sld xmlns:a="http://schemas.openxmlformats.org/drawingml/2006/main" xmlns:p="http://schemas.openxmlformats.org/presentationml/2006/main" xmlns:r="http://schemas.openxmlformats.org/officeDocument/2006/relationships">
-  <p:cSld name="V05-list">
+<file path=ppt/slides/slide8.xml><?xml version="1.0" encoding="utf-8"?>
+<p:sld xmlns:a="http://schemas.openxmlformats.org/drawingml/2006/main" xmlns:r="http://schemas.openxmlformats.org/officeDocument/2006/relationships" xmlns:p="http://schemas.openxmlformats.org/presentationml/2006/main">
+  <p:cSld name="V09-case">
     <p:spTree>
       <p:nvGrpSpPr>
         <p:cNvPr id="1" name=""/>
         <p:cNvGrpSpPr/>
         <p:nvPr/>
       </p:nvGrpSpPr>
-      <p:grpSpPr/>
-      <p:sp>
-        <p:nvSpPr>
-          <p:cNvPr id="2" name="Picture Placeholder 1"/>
-          <p:cNvSpPr>
-            <a:spLocks noGrp="1"/>
-          </p:cNvSpPr>
-          <p:nvPr>
-            <p:ph type="pic" idx="10"/>
-          </p:nvPr>
-        </p:nvSpPr>
-        <p:spPr/>
-      </p:sp>
-      <p:sp>
-        <p:nvSpPr>
-          <p:cNvPr id="3" name="Picture Placeholder 2"/>
-          <p:cNvSpPr>
-            <a:spLocks noGrp="1"/>
-          </p:cNvSpPr>
-          <p:nvPr>
-            <p:ph type="pic" idx="11"/>
-          </p:nvPr>
-        </p:nvSpPr>
-        <p:spPr/>
-      </p:sp>
+      <p:grpSpPr>
+        <a:xfrm>
+          <a:off x="0" y="0"/>
+          <a:ext cx="0" cy="0"/>
+          <a:chOff x="0" y="0"/>
+          <a:chExt cx="0" cy="0"/>
+        </a:xfrm>
+      </p:grpSpPr>
       <p:pic>
         <p:nvPicPr>
           <p:cNvPr id="4" name="Фон (картинка, без текста)" descr="V05-list-bg.png"/>
@@ -7979,32 +7716,6 @@
           <p:nvPr/>
         </p:nvPicPr>
         <p:blipFill>
-          <a:blip r:embed="rId2"/>
-          <a:stretch>
-            <a:fillRect/>
-          </a:stretch>
-        </p:blipFill>
-        <p:spPr>
-          <a:xfrm>
-            <a:off x="0" y="0"/>
-            <a:ext cx="10287000" cy="10287000"/>
-          </a:xfrm>
-          <a:prstGeom prst="rect">
-            <a:avLst/>
-          </a:prstGeom>
-        </p:spPr>
-      </p:pic>
-      <p:pic>
-        <p:nvPicPr>
-          <p:cNvPr id="5" name="Иконка (водяной знак) (заменить: Изменить рисунок)" descr="V05-list-icon.png"/>
-          <p:cNvPicPr>
-            <a:picLocks noChangeAspect="1"/>
-          </p:cNvPicPr>
-          <p:nvPr>
-            <p:ph type="pic" idx="11"/>
-          </p:nvPr>
-        </p:nvPicPr>
-        <p:blipFill>
           <a:blip r:embed="rId3"/>
           <a:stretch>
             <a:fillRect/>
@@ -8012,8 +7723,8 @@
         </p:blipFill>
         <p:spPr>
           <a:xfrm>
-            <a:off x="6000750" y="6000750"/>
-            <a:ext cx="4953000" cy="4953000"/>
+            <a:off x="0" y="0"/>
+            <a:ext cx="10287000" cy="10287000"/>
           </a:xfrm>
           <a:prstGeom prst="rect">
             <a:avLst/>
@@ -8022,7 +7733,7 @@
       </p:pic>
       <p:pic>
         <p:nvPicPr>
-          <p:cNvPr id="6" name="Логотип" descr="logo-full.png"/>
+          <p:cNvPr id="5" name="Логотип" descr="logo-full.png"/>
           <p:cNvPicPr>
             <a:picLocks noChangeAspect="1"/>
           </p:cNvPicPr>
@@ -8038,6 +7749,32 @@
           <a:xfrm>
             <a:off x="914400" y="914400"/>
             <a:ext cx="1905000" cy="1162942"/>
+          </a:xfrm>
+          <a:prstGeom prst="rect">
+            <a:avLst/>
+          </a:prstGeom>
+        </p:spPr>
+      </p:pic>
+      <p:pic>
+        <p:nvPicPr>
+          <p:cNvPr id="6" name="Фото сотрудника, вырезка PNG (заменить: Изменить рисунок)" descr="ivlikova-olga.png"/>
+          <p:cNvPicPr>
+            <a:picLocks noGrp="1" noChangeAspect="1"/>
+          </p:cNvPicPr>
+          <p:nvPr>
+            <p:ph type="pic" idx="10"/>
+          </p:nvPr>
+        </p:nvPicPr>
+        <p:blipFill>
+          <a:blip r:embed="rId5"/>
+          <a:stretch>
+            <a:fillRect/>
+          </a:stretch>
+        </p:blipFill>
+        <p:spPr>
+          <a:xfrm>
+            <a:off x="4405745" y="2087361"/>
+            <a:ext cx="6664037" cy="8199640"/>
           </a:xfrm>
           <a:prstGeom prst="rect">
             <a:avLst/>
@@ -8085,6 +7822,7 @@
           <a:lstStyle/>
           <a:p>
             <a:pPr algn="ctr"/>
+            <a:endParaRPr/>
           </a:p>
         </p:txBody>
       </p:sp>
@@ -8096,8 +7834,8 @@
         </p:nvSpPr>
         <p:spPr>
           <a:xfrm>
-            <a:off x="914400" y="2685288"/>
-            <a:ext cx="9144000" cy="2060448"/>
+            <a:off x="914400" y="2684145"/>
+            <a:ext cx="9144000" cy="251460"/>
           </a:xfrm>
           <a:prstGeom prst="rect">
             <a:avLst/>
@@ -8105,36 +7843,24 @@
           <a:noFill/>
         </p:spPr>
         <p:txBody>
-          <a:bodyPr wrap="none" lIns="0" rIns="0" tIns="0" bIns="0" anchor="t"/>
+          <a:bodyPr wrap="none" lIns="0" tIns="0" rIns="0" bIns="0" anchor="t"/>
           <a:lstStyle/>
           <a:p>
             <a:pPr algn="l">
               <a:lnSpc>
-                <a:spcPts val="8112"/>
+                <a:spcPts val="1979"/>
               </a:lnSpc>
             </a:pPr>
             <a:r>
-              <a:rPr b="0" sz="7800" spc="-156">
-                <a:solidFill>
-                  <a:srgbClr val="1C1A17"/>
-                </a:solidFill>
-                <a:latin typeface="Gilroy SemiBold"/>
-                <a:ea typeface="Gilroy SemiBold"/>
-                <a:cs typeface="Gilroy SemiBold"/>
-              </a:rPr>
-              <a:t>Название услуги</a:t>
-            </a:r>
-            <a:br/>
-            <a:r>
-              <a:rPr b="0" sz="7800" spc="-156">
-                <a:solidFill>
-                  <a:srgbClr val="1C1A17"/>
-                </a:solidFill>
-                <a:latin typeface="Gilroy SemiBold"/>
-                <a:ea typeface="Gilroy SemiBold"/>
-                <a:cs typeface="Gilroy SemiBold"/>
-              </a:rPr>
-              <a:t>в две строки</a:t>
+              <a:rPr sz="1650" b="0" cap="all" spc="231">
+                <a:solidFill>
+                  <a:srgbClr val="6A6965"/>
+                </a:solidFill>
+                <a:latin typeface="Gilroy Medium"/>
+                <a:ea typeface="Gilroy Medium"/>
+                <a:cs typeface="Gilroy Medium"/>
+              </a:rPr>
+              <a:t>Рубрика</a:t>
             </a:r>
           </a:p>
         </p:txBody>
@@ -8147,8 +7873,8 @@
         </p:nvSpPr>
         <p:spPr>
           <a:xfrm>
-            <a:off x="1447800" y="5212199"/>
-            <a:ext cx="8610600" cy="421005"/>
+            <a:off x="914400" y="3204210"/>
+            <a:ext cx="9144000" cy="2560320"/>
           </a:xfrm>
           <a:prstGeom prst="rect">
             <a:avLst/>
@@ -8156,25 +7882,219 @@
           <a:noFill/>
         </p:spPr>
         <p:txBody>
-          <a:bodyPr wrap="none" lIns="0" rIns="0" tIns="0" bIns="0" anchor="t"/>
+          <a:bodyPr wrap="none" lIns="0" tIns="0" rIns="0" bIns="0" anchor="t"/>
           <a:lstStyle/>
           <a:p>
             <a:pPr algn="l">
               <a:lnSpc>
-                <a:spcPts val="3315"/>
+                <a:spcPts val="5040"/>
               </a:lnSpc>
             </a:pPr>
             <a:r>
-              <a:rPr b="0" sz="2550">
+              <a:rPr sz="4500" b="0" spc="-90" dirty="0" err="1">
                 <a:solidFill>
                   <a:srgbClr val="1C1A17"/>
                 </a:solidFill>
-                <a:latin typeface="Gilroy"/>
-                <a:ea typeface="Gilroy"/>
-                <a:cs typeface="Gilroy"/>
-              </a:rPr>
-              <a:t>Первый пункт: коротко и по делу</a:t>
-            </a:r>
+                <a:latin typeface="Gilroy SemiBold"/>
+                <a:ea typeface="Gilroy SemiBold"/>
+                <a:cs typeface="Gilroy SemiBold"/>
+              </a:rPr>
+              <a:t>Здесь</a:t>
+            </a:r>
+            <a:r>
+              <a:rPr sz="4500" b="0" spc="-90" dirty="0">
+                <a:solidFill>
+                  <a:srgbClr val="1C1A17"/>
+                </a:solidFill>
+                <a:latin typeface="Gilroy SemiBold"/>
+                <a:ea typeface="Gilroy SemiBold"/>
+                <a:cs typeface="Gilroy SemiBold"/>
+              </a:rPr>
+              <a:t> </a:t>
+            </a:r>
+            <a:r>
+              <a:rPr sz="4500" b="0" spc="-90" dirty="0" err="1">
+                <a:solidFill>
+                  <a:srgbClr val="1C1A17"/>
+                </a:solidFill>
+                <a:latin typeface="Gilroy SemiBold"/>
+                <a:ea typeface="Gilroy SemiBold"/>
+                <a:cs typeface="Gilroy SemiBold"/>
+              </a:rPr>
+              <a:t>результат</a:t>
+            </a:r>
+            <a:r>
+              <a:rPr dirty="0"/>
+              <a:t/>
+            </a:r>
+            <a:br>
+              <a:rPr dirty="0"/>
+            </a:br>
+            <a:r>
+              <a:rPr sz="4500" b="0" spc="-90" dirty="0" err="1">
+                <a:solidFill>
+                  <a:srgbClr val="1C1A17"/>
+                </a:solidFill>
+                <a:latin typeface="Gilroy SemiBold"/>
+                <a:ea typeface="Gilroy SemiBold"/>
+                <a:cs typeface="Gilroy SemiBold"/>
+              </a:rPr>
+              <a:t>для</a:t>
+            </a:r>
+            <a:r>
+              <a:rPr sz="4500" b="0" spc="-90" dirty="0">
+                <a:solidFill>
+                  <a:srgbClr val="1C1A17"/>
+                </a:solidFill>
+                <a:latin typeface="Gilroy SemiBold"/>
+                <a:ea typeface="Gilroy SemiBold"/>
+                <a:cs typeface="Gilroy SemiBold"/>
+              </a:rPr>
+              <a:t> </a:t>
+            </a:r>
+            <a:r>
+              <a:rPr sz="4500" b="0" spc="-90" dirty="0" err="1">
+                <a:solidFill>
+                  <a:srgbClr val="1C1A17"/>
+                </a:solidFill>
+                <a:latin typeface="Gilroy SemiBold"/>
+                <a:ea typeface="Gilroy SemiBold"/>
+                <a:cs typeface="Gilroy SemiBold"/>
+              </a:rPr>
+              <a:t>клиента</a:t>
+            </a:r>
+            <a:r>
+              <a:rPr sz="4500" b="0" spc="-90" dirty="0">
+                <a:solidFill>
+                  <a:srgbClr val="1C1A17"/>
+                </a:solidFill>
+                <a:latin typeface="Gilroy SemiBold"/>
+                <a:ea typeface="Gilroy SemiBold"/>
+                <a:cs typeface="Gilroy SemiBold"/>
+              </a:rPr>
+              <a:t>:</a:t>
+            </a:r>
+            <a:r>
+              <a:rPr dirty="0"/>
+              <a:t/>
+            </a:r>
+            <a:br>
+              <a:rPr dirty="0"/>
+            </a:br>
+            <a:r>
+              <a:rPr sz="4500" b="0" spc="-90" dirty="0" err="1">
+                <a:solidFill>
+                  <a:srgbClr val="D73A61"/>
+                </a:solidFill>
+                <a:latin typeface="Gilroy SemiBold"/>
+                <a:ea typeface="Gilroy SemiBold"/>
+                <a:cs typeface="Gilroy SemiBold"/>
+              </a:rPr>
+              <a:t>сумма</a:t>
+            </a:r>
+            <a:r>
+              <a:rPr sz="4500" b="0" spc="-90" dirty="0">
+                <a:solidFill>
+                  <a:srgbClr val="1C1A17"/>
+                </a:solidFill>
+                <a:latin typeface="Gilroy SemiBold"/>
+                <a:ea typeface="Gilroy SemiBold"/>
+                <a:cs typeface="Gilroy SemiBold"/>
+              </a:rPr>
+              <a:t> </a:t>
+            </a:r>
+            <a:r>
+              <a:rPr sz="4500" b="0" spc="-90" dirty="0" err="1">
+                <a:solidFill>
+                  <a:srgbClr val="1C1A17"/>
+                </a:solidFill>
+                <a:latin typeface="Gilroy SemiBold"/>
+                <a:ea typeface="Gilroy SemiBold"/>
+                <a:cs typeface="Gilroy SemiBold"/>
+              </a:rPr>
+              <a:t>или</a:t>
+            </a:r>
+            <a:r>
+              <a:rPr sz="4500" b="0" spc="-90" dirty="0">
+                <a:solidFill>
+                  <a:srgbClr val="1C1A17"/>
+                </a:solidFill>
+                <a:latin typeface="Gilroy SemiBold"/>
+                <a:ea typeface="Gilroy SemiBold"/>
+                <a:cs typeface="Gilroy SemiBold"/>
+              </a:rPr>
+              <a:t> </a:t>
+            </a:r>
+            <a:r>
+              <a:rPr sz="4500" b="0" spc="-90" dirty="0" err="1">
+                <a:solidFill>
+                  <a:srgbClr val="1C1A17"/>
+                </a:solidFill>
+                <a:latin typeface="Gilroy SemiBold"/>
+                <a:ea typeface="Gilroy SemiBold"/>
+                <a:cs typeface="Gilroy SemiBold"/>
+              </a:rPr>
+              <a:t>цель</a:t>
+            </a:r>
+            <a:r>
+              <a:rPr dirty="0"/>
+              <a:t/>
+            </a:r>
+            <a:br>
+              <a:rPr dirty="0"/>
+            </a:br>
+            <a:r>
+              <a:rPr sz="4500" b="0" spc="-90" dirty="0">
+                <a:solidFill>
+                  <a:srgbClr val="1C1A17"/>
+                </a:solidFill>
+                <a:latin typeface="Gilroy SemiBold"/>
+                <a:ea typeface="Gilroy SemiBold"/>
+                <a:cs typeface="Gilroy SemiBold"/>
+              </a:rPr>
+              <a:t>в </a:t>
+            </a:r>
+            <a:r>
+              <a:rPr sz="4500" b="0" spc="-90" dirty="0" err="1">
+                <a:solidFill>
+                  <a:srgbClr val="1C1A17"/>
+                </a:solidFill>
+                <a:latin typeface="Gilroy SemiBold"/>
+                <a:ea typeface="Gilroy SemiBold"/>
+                <a:cs typeface="Gilroy SemiBold"/>
+              </a:rPr>
+              <a:t>одну</a:t>
+            </a:r>
+            <a:r>
+              <a:rPr sz="4500" b="0" spc="-90" dirty="0">
+                <a:solidFill>
+                  <a:srgbClr val="1C1A17"/>
+                </a:solidFill>
+                <a:latin typeface="Gilroy SemiBold"/>
+                <a:ea typeface="Gilroy SemiBold"/>
+                <a:cs typeface="Gilroy SemiBold"/>
+              </a:rPr>
+              <a:t> </a:t>
+            </a:r>
+            <a:r>
+              <a:rPr sz="4500" b="0" spc="-90" dirty="0" err="1">
+                <a:solidFill>
+                  <a:srgbClr val="1C1A17"/>
+                </a:solidFill>
+                <a:latin typeface="Gilroy SemiBold"/>
+                <a:ea typeface="Gilroy SemiBold"/>
+                <a:cs typeface="Gilroy SemiBold"/>
+              </a:rPr>
+              <a:t>строку</a:t>
+            </a:r>
+            <a:endParaRPr sz="4500" b="0" spc="-90" dirty="0">
+              <a:solidFill>
+                <a:srgbClr val="1C1A17"/>
+              </a:solidFill>
+              <a:latin typeface="Gilroy SemiBold"/>
+              <a:ea typeface="Gilroy SemiBold"/>
+              <a:cs typeface="Gilroy SemiBold"/>
+            </a:endParaRPr>
           </a:p>
         </p:txBody>
       </p:sp>
@@ -8186,8 +8106,8 @@
         </p:nvSpPr>
         <p:spPr>
           <a:xfrm>
-            <a:off x="1447800" y="5890260"/>
-            <a:ext cx="8610600" cy="421005"/>
+            <a:off x="914400" y="8397240"/>
+            <a:ext cx="9144000" cy="502920"/>
           </a:xfrm>
           <a:prstGeom prst="rect">
             <a:avLst/>
@@ -8195,24 +8115,24 @@
           <a:noFill/>
         </p:spPr>
         <p:txBody>
-          <a:bodyPr wrap="none" lIns="0" rIns="0" tIns="0" bIns="0" anchor="t"/>
+          <a:bodyPr wrap="none" lIns="0" tIns="0" rIns="0" bIns="0" anchor="t"/>
           <a:lstStyle/>
           <a:p>
             <a:pPr algn="l">
               <a:lnSpc>
-                <a:spcPts val="3315"/>
+                <a:spcPts val="3959"/>
               </a:lnSpc>
             </a:pPr>
             <a:r>
-              <a:rPr b="0" sz="2550">
+              <a:rPr sz="3300" b="0" spc="-33">
                 <a:solidFill>
                   <a:srgbClr val="1C1A17"/>
                 </a:solidFill>
-                <a:latin typeface="Gilroy"/>
-                <a:ea typeface="Gilroy"/>
-                <a:cs typeface="Gilroy"/>
-              </a:rPr>
-              <a:t>Второй пункт чуть длиннее, но в одну строку</a:t>
+                <a:latin typeface="Gilroy SemiBold"/>
+                <a:ea typeface="Gilroy SemiBold"/>
+                <a:cs typeface="Gilroy SemiBold"/>
+              </a:rPr>
+              <a:t>Имя Фамилия</a:t>
             </a:r>
           </a:p>
         </p:txBody>
@@ -8225,8 +8145,8 @@
         </p:nvSpPr>
         <p:spPr>
           <a:xfrm>
-            <a:off x="1447800" y="6568320"/>
-            <a:ext cx="8610600" cy="421005"/>
+            <a:off x="914400" y="8996362"/>
+            <a:ext cx="9144000" cy="371475"/>
           </a:xfrm>
           <a:prstGeom prst="rect">
             <a:avLst/>
@@ -8234,297 +8154,24 @@
           <a:noFill/>
         </p:spPr>
         <p:txBody>
-          <a:bodyPr wrap="none" lIns="0" rIns="0" tIns="0" bIns="0" anchor="t"/>
+          <a:bodyPr wrap="none" lIns="0" tIns="0" rIns="0" bIns="0" anchor="t"/>
           <a:lstStyle/>
           <a:p>
             <a:pPr algn="l">
               <a:lnSpc>
-                <a:spcPts val="3315"/>
+                <a:spcPts val="2925"/>
               </a:lnSpc>
             </a:pPr>
             <a:r>
-              <a:rPr b="0" sz="2550">
-                <a:solidFill>
-                  <a:srgbClr val="1C1A17"/>
+              <a:rPr sz="2250" b="0">
+                <a:solidFill>
+                  <a:srgbClr val="6A6965"/>
                 </a:solidFill>
                 <a:latin typeface="Gilroy"/>
                 <a:ea typeface="Gilroy"/>
                 <a:cs typeface="Gilroy"/>
               </a:rPr>
-              <a:t>Третий пункт</a:t>
-            </a:r>
-          </a:p>
-        </p:txBody>
-      </p:sp>
-      <p:sp>
-        <p:nvSpPr>
-          <p:cNvPr id="12" name="Текст 5"/>
-          <p:cNvSpPr txBox="1"/>
-          <p:nvPr/>
-        </p:nvSpPr>
-        <p:spPr>
-          <a:xfrm>
-            <a:off x="1447800" y="7246381"/>
-            <a:ext cx="8610600" cy="421005"/>
-          </a:xfrm>
-          <a:prstGeom prst="rect">
-            <a:avLst/>
-          </a:prstGeom>
-          <a:noFill/>
-        </p:spPr>
-        <p:txBody>
-          <a:bodyPr wrap="none" lIns="0" rIns="0" tIns="0" bIns="0" anchor="t"/>
-          <a:lstStyle/>
-          <a:p>
-            <a:pPr algn="l">
-              <a:lnSpc>
-                <a:spcPts val="3315"/>
-              </a:lnSpc>
-            </a:pPr>
-            <a:r>
-              <a:rPr b="0" sz="2550">
-                <a:solidFill>
-                  <a:srgbClr val="1C1A17"/>
-                </a:solidFill>
-                <a:latin typeface="Gilroy"/>
-                <a:ea typeface="Gilroy"/>
-                <a:cs typeface="Gilroy"/>
-              </a:rPr>
-              <a:t>Четвёртый пункт без воды</a:t>
-            </a:r>
-          </a:p>
-        </p:txBody>
-      </p:sp>
-      <p:sp>
-        <p:nvSpPr>
-          <p:cNvPr id="13" name="Текст 6"/>
-          <p:cNvSpPr txBox="1"/>
-          <p:nvPr/>
-        </p:nvSpPr>
-        <p:spPr>
-          <a:xfrm>
-            <a:off x="1447800" y="7924442"/>
-            <a:ext cx="8610600" cy="421005"/>
-          </a:xfrm>
-          <a:prstGeom prst="rect">
-            <a:avLst/>
-          </a:prstGeom>
-          <a:noFill/>
-        </p:spPr>
-        <p:txBody>
-          <a:bodyPr wrap="none" lIns="0" rIns="0" tIns="0" bIns="0" anchor="t"/>
-          <a:lstStyle/>
-          <a:p>
-            <a:pPr algn="l">
-              <a:lnSpc>
-                <a:spcPts val="3315"/>
-              </a:lnSpc>
-            </a:pPr>
-            <a:r>
-              <a:rPr b="0" sz="2550">
-                <a:solidFill>
-                  <a:srgbClr val="1C1A17"/>
-                </a:solidFill>
-                <a:latin typeface="Gilroy"/>
-                <a:ea typeface="Gilroy"/>
-                <a:cs typeface="Gilroy"/>
-              </a:rPr>
-              <a:t>Пятый, последний пункт</a:t>
-            </a:r>
-          </a:p>
-        </p:txBody>
-      </p:sp>
-      <p:sp>
-        <p:nvSpPr>
-          <p:cNvPr id="14" name="Маркер списка"/>
-          <p:cNvSpPr txBox="1"/>
-          <p:nvPr/>
-        </p:nvSpPr>
-        <p:spPr>
-          <a:xfrm>
-            <a:off x="914400" y="5184576"/>
-            <a:ext cx="9144000" cy="419100"/>
-          </a:xfrm>
-          <a:prstGeom prst="rect">
-            <a:avLst/>
-          </a:prstGeom>
-          <a:noFill/>
-        </p:spPr>
-        <p:txBody>
-          <a:bodyPr wrap="none" lIns="0" rIns="0" tIns="0" bIns="0" anchor="t"/>
-          <a:lstStyle/>
-          <a:p>
-            <a:pPr algn="l">
-              <a:lnSpc>
-                <a:spcPts val="3300"/>
-              </a:lnSpc>
-            </a:pPr>
-            <a:r>
-              <a:rPr b="1" sz="3300">
-                <a:solidFill>
-                  <a:srgbClr val="D73A61"/>
-                </a:solidFill>
-                <a:latin typeface="Gilroy"/>
-                <a:ea typeface="Gilroy"/>
-                <a:cs typeface="Gilroy"/>
-              </a:rPr>
-              <a:t>+</a:t>
-            </a:r>
-          </a:p>
-        </p:txBody>
-      </p:sp>
-      <p:sp>
-        <p:nvSpPr>
-          <p:cNvPr id="15" name="Маркер списка"/>
-          <p:cNvSpPr txBox="1"/>
-          <p:nvPr/>
-        </p:nvSpPr>
-        <p:spPr>
-          <a:xfrm>
-            <a:off x="914400" y="5862637"/>
-            <a:ext cx="9144000" cy="419100"/>
-          </a:xfrm>
-          <a:prstGeom prst="rect">
-            <a:avLst/>
-          </a:prstGeom>
-          <a:noFill/>
-        </p:spPr>
-        <p:txBody>
-          <a:bodyPr wrap="none" lIns="0" rIns="0" tIns="0" bIns="0" anchor="t"/>
-          <a:lstStyle/>
-          <a:p>
-            <a:pPr algn="l">
-              <a:lnSpc>
-                <a:spcPts val="3300"/>
-              </a:lnSpc>
-            </a:pPr>
-            <a:r>
-              <a:rPr b="1" sz="3300">
-                <a:solidFill>
-                  <a:srgbClr val="D73A61"/>
-                </a:solidFill>
-                <a:latin typeface="Gilroy"/>
-                <a:ea typeface="Gilroy"/>
-                <a:cs typeface="Gilroy"/>
-              </a:rPr>
-              <a:t>+</a:t>
-            </a:r>
-          </a:p>
-        </p:txBody>
-      </p:sp>
-      <p:sp>
-        <p:nvSpPr>
-          <p:cNvPr id="16" name="Маркер списка"/>
-          <p:cNvSpPr txBox="1"/>
-          <p:nvPr/>
-        </p:nvSpPr>
-        <p:spPr>
-          <a:xfrm>
-            <a:off x="914400" y="6540698"/>
-            <a:ext cx="9144000" cy="419100"/>
-          </a:xfrm>
-          <a:prstGeom prst="rect">
-            <a:avLst/>
-          </a:prstGeom>
-          <a:noFill/>
-        </p:spPr>
-        <p:txBody>
-          <a:bodyPr wrap="none" lIns="0" rIns="0" tIns="0" bIns="0" anchor="t"/>
-          <a:lstStyle/>
-          <a:p>
-            <a:pPr algn="l">
-              <a:lnSpc>
-                <a:spcPts val="3300"/>
-              </a:lnSpc>
-            </a:pPr>
-            <a:r>
-              <a:rPr b="1" sz="3300">
-                <a:solidFill>
-                  <a:srgbClr val="D73A61"/>
-                </a:solidFill>
-                <a:latin typeface="Gilroy"/>
-                <a:ea typeface="Gilroy"/>
-                <a:cs typeface="Gilroy"/>
-              </a:rPr>
-              <a:t>+</a:t>
-            </a:r>
-          </a:p>
-        </p:txBody>
-      </p:sp>
-      <p:sp>
-        <p:nvSpPr>
-          <p:cNvPr id="17" name="Маркер списка"/>
-          <p:cNvSpPr txBox="1"/>
-          <p:nvPr/>
-        </p:nvSpPr>
-        <p:spPr>
-          <a:xfrm>
-            <a:off x="914400" y="7218759"/>
-            <a:ext cx="9144000" cy="419100"/>
-          </a:xfrm>
-          <a:prstGeom prst="rect">
-            <a:avLst/>
-          </a:prstGeom>
-          <a:noFill/>
-        </p:spPr>
-        <p:txBody>
-          <a:bodyPr wrap="none" lIns="0" rIns="0" tIns="0" bIns="0" anchor="t"/>
-          <a:lstStyle/>
-          <a:p>
-            <a:pPr algn="l">
-              <a:lnSpc>
-                <a:spcPts val="3300"/>
-              </a:lnSpc>
-            </a:pPr>
-            <a:r>
-              <a:rPr b="1" sz="3300">
-                <a:solidFill>
-                  <a:srgbClr val="D73A61"/>
-                </a:solidFill>
-                <a:latin typeface="Gilroy"/>
-                <a:ea typeface="Gilroy"/>
-                <a:cs typeface="Gilroy"/>
-              </a:rPr>
-              <a:t>+</a:t>
-            </a:r>
-          </a:p>
-        </p:txBody>
-      </p:sp>
-      <p:sp>
-        <p:nvSpPr>
-          <p:cNvPr id="18" name="Маркер списка"/>
-          <p:cNvSpPr txBox="1"/>
-          <p:nvPr/>
-        </p:nvSpPr>
-        <p:spPr>
-          <a:xfrm>
-            <a:off x="914400" y="7896820"/>
-            <a:ext cx="9144000" cy="419100"/>
-          </a:xfrm>
-          <a:prstGeom prst="rect">
-            <a:avLst/>
-          </a:prstGeom>
-          <a:noFill/>
-        </p:spPr>
-        <p:txBody>
-          <a:bodyPr wrap="none" lIns="0" rIns="0" tIns="0" bIns="0" anchor="t"/>
-          <a:lstStyle/>
-          <a:p>
-            <a:pPr algn="l">
-              <a:lnSpc>
-                <a:spcPts val="3300"/>
-              </a:lnSpc>
-            </a:pPr>
-            <a:r>
-              <a:rPr b="1" sz="3300">
-                <a:solidFill>
-                  <a:srgbClr val="D73A61"/>
-                </a:solidFill>
-                <a:latin typeface="Gilroy"/>
-                <a:ea typeface="Gilroy"/>
-                <a:cs typeface="Gilroy"/>
-              </a:rPr>
-              <a:t>+</a:t>
+              <a:t>Должность сотрудника</a:t>
             </a:r>
           </a:p>
         </p:txBody>
@@ -8537,70 +8184,26 @@
 </p:sld>
 </file>
 
-<file path=ppt/slides/slide7.xml><?xml version="1.0" encoding="utf-8"?>
-<p:sld xmlns:a="http://schemas.openxmlformats.org/drawingml/2006/main" xmlns:p="http://schemas.openxmlformats.org/presentationml/2006/main" xmlns:r="http://schemas.openxmlformats.org/officeDocument/2006/relationships">
-  <p:cSld name="V06-team">
+<file path=ppt/slides/slide9.xml><?xml version="1.0" encoding="utf-8"?>
+<p:sld xmlns:a="http://schemas.openxmlformats.org/drawingml/2006/main" xmlns:r="http://schemas.openxmlformats.org/officeDocument/2006/relationships" xmlns:p="http://schemas.openxmlformats.org/presentationml/2006/main">
+  <p:cSld name="V11-photo-frame">
     <p:spTree>
       <p:nvGrpSpPr>
         <p:cNvPr id="1" name=""/>
         <p:cNvGrpSpPr/>
         <p:nvPr/>
       </p:nvGrpSpPr>
-      <p:grpSpPr/>
-      <p:sp>
-        <p:nvSpPr>
-          <p:cNvPr id="2" name="Picture Placeholder 1"/>
-          <p:cNvSpPr>
-            <a:spLocks noGrp="1"/>
-          </p:cNvSpPr>
-          <p:nvPr>
-            <p:ph type="pic" idx="10"/>
-          </p:nvPr>
-        </p:nvSpPr>
-        <p:spPr/>
-      </p:sp>
-      <p:sp>
-        <p:nvSpPr>
-          <p:cNvPr id="3" name="Picture Placeholder 2"/>
-          <p:cNvSpPr>
-            <a:spLocks noGrp="1"/>
-          </p:cNvSpPr>
-          <p:nvPr>
-            <p:ph type="pic" idx="11"/>
-          </p:nvPr>
-        </p:nvSpPr>
-        <p:spPr/>
-      </p:sp>
+      <p:grpSpPr>
+        <a:xfrm>
+          <a:off x="0" y="0"/>
+          <a:ext cx="0" cy="0"/>
+          <a:chOff x="0" y="0"/>
+          <a:chExt cx="0" cy="0"/>
+        </a:xfrm>
+      </p:grpSpPr>
       <p:pic>
         <p:nvPicPr>
-          <p:cNvPr id="4" name="Фото (заменить: Изменить рисунок)" descr="studio-0484.jpg"/>
-          <p:cNvPicPr>
-            <a:picLocks noChangeAspect="1"/>
-          </p:cNvPicPr>
-          <p:nvPr>
-            <p:ph type="pic" idx="10"/>
-          </p:nvPr>
-        </p:nvPicPr>
-        <p:blipFill>
-          <a:blip r:embed="rId2"/>
-          <a:srcRect/>
-          <a:stretch>
-            <a:fillRect/>
-          </a:stretch>
-        </p:blipFill>
-        <p:spPr>
-          <a:xfrm>
-            <a:off x="0" y="2571750"/>
-            <a:ext cx="10287000" cy="7715250"/>
-          </a:xfrm>
-          <a:prstGeom prst="rect">
-            <a:avLst/>
-          </a:prstGeom>
-        </p:spPr>
-      </p:pic>
-      <p:pic>
-        <p:nvPicPr>
-          <p:cNvPr id="5" name="Фон (картинка, без текста)" descr="V06-team-bg-fade.png"/>
+          <p:cNvPr id="4" name="Фон (картинка, без текста)" descr="V05-list-bg.png"/>
           <p:cNvPicPr>
             <a:picLocks noChangeAspect="1"/>
           </p:cNvPicPr>
@@ -8624,14 +8227,69 @@
       </p:pic>
       <p:pic>
         <p:nvPicPr>
-          <p:cNvPr id="6" name="Логотип" descr="logo-full.png"/>
+          <p:cNvPr id="5" name="Фото в рамке (заменить: Изменить рисунок)" descr="V11-photo-frame-photo.jpg"/>
+          <p:cNvPicPr>
+            <a:picLocks noGrp="1" noChangeAspect="1"/>
+          </p:cNvPicPr>
+          <p:nvPr>
+            <p:ph type="pic" idx="10"/>
+          </p:nvPr>
+        </p:nvPicPr>
+        <p:blipFill>
+          <a:blip r:embed="rId4"/>
+          <a:srcRect t="8243" b="12365"/>
+          <a:stretch>
+            <a:fillRect/>
+          </a:stretch>
+        </p:blipFill>
+        <p:spPr>
+          <a:xfrm>
+            <a:off x="914400" y="4895850"/>
+            <a:ext cx="8458200" cy="4476750"/>
+          </a:xfrm>
+          <a:prstGeom prst="roundRect">
+            <a:avLst>
+              <a:gd name="adj" fmla="val 1702"/>
+            </a:avLst>
+          </a:prstGeom>
+        </p:spPr>
+      </p:pic>
+      <p:pic>
+        <p:nvPicPr>
+          <p:cNvPr id="6" name="Иконка (водяной знак) (заменить: Изменить рисунок)" descr="V11-photo-frame-icon.png"/>
+          <p:cNvPicPr>
+            <a:picLocks noGrp="1" noChangeAspect="1"/>
+          </p:cNvPicPr>
+          <p:nvPr>
+            <p:ph type="pic" idx="11"/>
+          </p:nvPr>
+        </p:nvPicPr>
+        <p:blipFill>
+          <a:blip r:embed="rId5"/>
+          <a:stretch>
+            <a:fillRect/>
+          </a:stretch>
+        </p:blipFill>
+        <p:spPr>
+          <a:xfrm>
+            <a:off x="7810500" y="-1619250"/>
+            <a:ext cx="3810000" cy="3810000"/>
+          </a:xfrm>
+          <a:prstGeom prst="rect">
+            <a:avLst/>
+          </a:prstGeom>
+        </p:spPr>
+      </p:pic>
+      <p:pic>
+        <p:nvPicPr>
+          <p:cNvPr id="7" name="Логотип" descr="logo-full.png"/>
           <p:cNvPicPr>
             <a:picLocks noChangeAspect="1"/>
           </p:cNvPicPr>
           <p:nvPr/>
         </p:nvPicPr>
         <p:blipFill>
-          <a:blip r:embed="rId4"/>
+          <a:blip r:embed="rId6"/>
           <a:stretch>
             <a:fillRect/>
           </a:stretch>
@@ -8648,7 +8306,7 @@
       </p:pic>
       <p:sp>
         <p:nvSpPr>
-          <p:cNvPr id="7" name="Малиновая черта"/>
+          <p:cNvPr id="8" name="Малиновая черта"/>
           <p:cNvSpPr/>
           <p:nvPr/>
         </p:nvSpPr>
@@ -8687,19 +8345,20 @@
           <a:lstStyle/>
           <a:p>
             <a:pPr algn="ctr"/>
-          </a:p>
-        </p:txBody>
-      </p:sp>
-      <p:sp>
-        <p:nvSpPr>
-          <p:cNvPr id="8" name="Текст 1"/>
+            <a:endParaRPr/>
+          </a:p>
+        </p:txBody>
+      </p:sp>
+      <p:sp>
+        <p:nvSpPr>
+          <p:cNvPr id="9" name="Текст 1"/>
           <p:cNvSpPr txBox="1"/>
           <p:nvPr/>
         </p:nvSpPr>
         <p:spPr>
           <a:xfrm>
-            <a:off x="914400" y="2685288"/>
-            <a:ext cx="9144000" cy="2060448"/>
+            <a:off x="914399" y="2983747"/>
+            <a:ext cx="8849533" cy="1340280"/>
           </a:xfrm>
           <a:prstGeom prst="rect">
             <a:avLst/>
@@ -8707,16 +8366,16 @@
           <a:noFill/>
         </p:spPr>
         <p:txBody>
-          <a:bodyPr wrap="none" lIns="0" rIns="0" tIns="0" bIns="0" anchor="t"/>
+          <a:bodyPr wrap="none" lIns="0" tIns="0" rIns="0" bIns="0" anchor="t"/>
           <a:lstStyle/>
           <a:p>
             <a:pPr algn="l">
               <a:lnSpc>
-                <a:spcPts val="8112"/>
+                <a:spcPts val="4950"/>
               </a:lnSpc>
             </a:pPr>
             <a:r>
-              <a:rPr b="0" sz="7800" spc="-156">
+              <a:rPr sz="4500" b="0" spc="-90" dirty="0" err="1">
                 <a:solidFill>
                   <a:srgbClr val="1C1A17"/>
                 </a:solidFill>
@@ -8724,22 +8383,21 @@
                 <a:ea typeface="Gilroy SemiBold"/>
                 <a:cs typeface="Gilroy SemiBold"/>
               </a:rPr>
-              <a:t>Как мы </a:t>
-            </a:r>
-            <a:r>
-              <a:rPr b="0" sz="7800" spc="-156">
-                <a:solidFill>
-                  <a:srgbClr val="D73A61"/>
+              <a:t>Здесь</a:t>
+            </a:r>
+            <a:r>
+              <a:rPr sz="4500" b="0" spc="-90" dirty="0">
+                <a:solidFill>
+                  <a:srgbClr val="1C1A17"/>
                 </a:solidFill>
                 <a:latin typeface="Gilroy SemiBold"/>
                 <a:ea typeface="Gilroy SemiBold"/>
                 <a:cs typeface="Gilroy SemiBold"/>
               </a:rPr>
-              <a:t>делаем</a:t>
-            </a:r>
-            <a:br/>
-            <a:r>
-              <a:rPr b="0" sz="7800" spc="-156">
+              <a:t> </a:t>
+            </a:r>
+            <a:r>
+              <a:rPr sz="4500" b="0" spc="-90" dirty="0" err="1" smtClean="0">
                 <a:solidFill>
                   <a:srgbClr val="1C1A17"/>
                 </a:solidFill>
@@ -8747,645 +8405,53 @@
                 <a:ea typeface="Gilroy SemiBold"/>
                 <a:cs typeface="Gilroy SemiBold"/>
               </a:rPr>
-              <a:t>что-то важное</a:t>
-            </a:r>
-          </a:p>
-        </p:txBody>
-      </p:sp>
-    </p:spTree>
-  </p:cSld>
-  <p:clrMapOvr>
-    <a:masterClrMapping/>
-  </p:clrMapOvr>
-</p:sld>
-</file>
-
-<file path=ppt/slides/slide8.xml><?xml version="1.0" encoding="utf-8"?>
-<p:sld xmlns:a="http://schemas.openxmlformats.org/drawingml/2006/main" xmlns:p="http://schemas.openxmlformats.org/presentationml/2006/main" xmlns:r="http://schemas.openxmlformats.org/officeDocument/2006/relationships">
-  <p:cSld name="V08-fragment">
-    <p:spTree>
-      <p:nvGrpSpPr>
-        <p:cNvPr id="1" name=""/>
-        <p:cNvGrpSpPr/>
-        <p:nvPr/>
-      </p:nvGrpSpPr>
-      <p:grpSpPr/>
-      <p:sp>
-        <p:nvSpPr>
-          <p:cNvPr id="2" name="Picture Placeholder 1"/>
-          <p:cNvSpPr>
-            <a:spLocks noGrp="1"/>
-          </p:cNvSpPr>
-          <p:nvPr>
-            <p:ph type="pic" idx="10"/>
-          </p:nvPr>
-        </p:nvSpPr>
-        <p:spPr/>
-      </p:sp>
-      <p:sp>
-        <p:nvSpPr>
-          <p:cNvPr id="3" name="Picture Placeholder 2"/>
-          <p:cNvSpPr>
-            <a:spLocks noGrp="1"/>
-          </p:cNvSpPr>
-          <p:nvPr>
-            <p:ph type="pic" idx="11"/>
-          </p:nvPr>
-        </p:nvSpPr>
-        <p:spPr/>
-      </p:sp>
-      <p:pic>
-        <p:nvPicPr>
-          <p:cNvPr id="4" name="Фон (картинка, без текста)" descr="V05-list-bg.png"/>
-          <p:cNvPicPr>
-            <a:picLocks noChangeAspect="1"/>
-          </p:cNvPicPr>
-          <p:nvPr/>
-        </p:nvPicPr>
-        <p:blipFill>
-          <a:blip r:embed="rId2"/>
-          <a:stretch>
-            <a:fillRect/>
-          </a:stretch>
-        </p:blipFill>
-        <p:spPr>
-          <a:xfrm>
-            <a:off x="0" y="0"/>
-            <a:ext cx="10287000" cy="10287000"/>
-          </a:xfrm>
-          <a:prstGeom prst="rect">
-            <a:avLst/>
-          </a:prstGeom>
-        </p:spPr>
-      </p:pic>
-      <p:pic>
-        <p:nvPicPr>
-          <p:cNvPr id="5" name="Фото (фрагмент) (заменить: Изменить рисунок)" descr="flatlay-band.jpg"/>
-          <p:cNvPicPr>
-            <a:picLocks noChangeAspect="1"/>
-          </p:cNvPicPr>
-          <p:nvPr>
-            <p:ph type="pic" idx="10"/>
-          </p:nvPr>
-        </p:nvPicPr>
-        <p:blipFill>
-          <a:blip r:embed="rId3"/>
-          <a:srcRect t="1136" b="1136"/>
-          <a:stretch>
-            <a:fillRect/>
-          </a:stretch>
-        </p:blipFill>
-        <p:spPr>
-          <a:xfrm>
-            <a:off x="0" y="6191250"/>
-            <a:ext cx="10287000" cy="4095750"/>
-          </a:xfrm>
-          <a:prstGeom prst="rect">
-            <a:avLst/>
-          </a:prstGeom>
-        </p:spPr>
-      </p:pic>
-      <p:pic>
-        <p:nvPicPr>
-          <p:cNvPr id="6" name="Логотип" descr="logo-full.png"/>
-          <p:cNvPicPr>
-            <a:picLocks noChangeAspect="1"/>
-          </p:cNvPicPr>
-          <p:nvPr/>
-        </p:nvPicPr>
-        <p:blipFill>
-          <a:blip r:embed="rId4"/>
-          <a:stretch>
-            <a:fillRect/>
-          </a:stretch>
-        </p:blipFill>
-        <p:spPr>
-          <a:xfrm>
-            <a:off x="914400" y="914400"/>
-            <a:ext cx="1905000" cy="1162942"/>
-          </a:xfrm>
-          <a:prstGeom prst="rect">
-            <a:avLst/>
-          </a:prstGeom>
-        </p:spPr>
-      </p:pic>
-      <p:sp>
-        <p:nvSpPr>
-          <p:cNvPr id="7" name="Малиновая черта"/>
-          <p:cNvSpPr/>
-          <p:nvPr/>
-        </p:nvSpPr>
-        <p:spPr>
-          <a:xfrm>
-            <a:off x="914400" y="2362200"/>
-            <a:ext cx="609600" cy="38100"/>
-          </a:xfrm>
-          <a:prstGeom prst="rect">
-            <a:avLst/>
-          </a:prstGeom>
-          <a:solidFill>
-            <a:srgbClr val="D73A61"/>
-          </a:solidFill>
-          <a:ln>
-            <a:noFill/>
-          </a:ln>
-          <a:effectLst/>
-        </p:spPr>
-        <p:style>
-          <a:lnRef idx="1">
-            <a:schemeClr val="accent1"/>
-          </a:lnRef>
-          <a:fillRef idx="3">
-            <a:schemeClr val="accent1"/>
-          </a:fillRef>
-          <a:effectRef idx="2">
-            <a:schemeClr val="accent1"/>
-          </a:effectRef>
-          <a:fontRef idx="minor">
-            <a:schemeClr val="lt1"/>
-          </a:fontRef>
-        </p:style>
-        <p:txBody>
-          <a:bodyPr rtlCol="0" anchor="ctr"/>
-          <a:lstStyle/>
-          <a:p>
-            <a:pPr algn="ctr"/>
-          </a:p>
-        </p:txBody>
-      </p:sp>
-      <p:sp>
-        <p:nvSpPr>
-          <p:cNvPr id="8" name="Текст 1"/>
-          <p:cNvSpPr txBox="1"/>
-          <p:nvPr/>
-        </p:nvSpPr>
-        <p:spPr>
-          <a:xfrm>
-            <a:off x="914400" y="2676906"/>
-            <a:ext cx="9144000" cy="1941576"/>
-          </a:xfrm>
-          <a:prstGeom prst="rect">
-            <a:avLst/>
-          </a:prstGeom>
-          <a:noFill/>
-        </p:spPr>
-        <p:txBody>
-          <a:bodyPr wrap="none" lIns="0" rIns="0" tIns="0" bIns="0" anchor="t"/>
-          <a:lstStyle/>
+              <a:t>заголовок</a:t>
+            </a:r>
+            <a:r>
+              <a:rPr lang="ru-RU" dirty="0" smtClean="0"/>
+              <a:t>, </a:t>
+            </a:r>
+            <a:r>
+              <a:rPr lang="ru-RU" sz="4500" dirty="0" smtClean="0">
+                <a:latin typeface="Gilroy SemiBold" charset="-52"/>
+              </a:rPr>
+              <a:t>а фото ниже вы </a:t>
+            </a:r>
+            <a:endParaRPr lang="en-US" sz="4500" dirty="0" smtClean="0">
+              <a:latin typeface="Gilroy SemiBold" charset="-52"/>
+            </a:endParaRPr>
+          </a:p>
           <a:p>
             <a:pPr algn="l">
               <a:lnSpc>
-                <a:spcPts val="7644"/>
+                <a:spcPts val="4950"/>
               </a:lnSpc>
             </a:pPr>
             <a:r>
-              <a:rPr b="0" sz="7350" spc="-147">
-                <a:solidFill>
-                  <a:srgbClr val="1C1A17"/>
+              <a:rPr lang="ru-RU" sz="4500" dirty="0" smtClean="0">
+                <a:latin typeface="Gilroy SemiBold" charset="-52"/>
+              </a:rPr>
+              <a:t>можете поменять </a:t>
+            </a:r>
+            <a:r>
+              <a:rPr lang="ru-RU" sz="4500" b="0" spc="-90" dirty="0" smtClean="0">
+                <a:solidFill>
+                  <a:srgbClr val="D73A61"/>
                 </a:solidFill>
                 <a:latin typeface="Gilroy SemiBold"/>
                 <a:ea typeface="Gilroy SemiBold"/>
                 <a:cs typeface="Gilroy SemiBold"/>
               </a:rPr>
-              <a:t>Заголовок про</a:t>
-            </a:r>
-            <a:br/>
-            <a:r>
-              <a:rPr b="0" sz="7350" spc="-147">
-                <a:solidFill>
-                  <a:srgbClr val="1C1A17"/>
-                </a:solidFill>
-                <a:latin typeface="Gilroy SemiBold"/>
-                <a:ea typeface="Gilroy SemiBold"/>
-                <a:cs typeface="Gilroy SemiBold"/>
-              </a:rPr>
-              <a:t>нас с </a:t>
-            </a:r>
-            <a:r>
-              <a:rPr b="0" sz="7350" spc="-147">
-                <a:solidFill>
-                  <a:srgbClr val="D73A61"/>
-                </a:solidFill>
-                <a:latin typeface="Gilroy SemiBold"/>
-                <a:ea typeface="Gilroy SemiBold"/>
-                <a:cs typeface="Gilroy SemiBold"/>
-              </a:rPr>
-              <a:t>акцентом</a:t>
-            </a:r>
-          </a:p>
-        </p:txBody>
-      </p:sp>
-      <p:sp>
-        <p:nvSpPr>
-          <p:cNvPr id="9" name="Текст 2"/>
-          <p:cNvSpPr txBox="1"/>
-          <p:nvPr/>
-        </p:nvSpPr>
-        <p:spPr>
-          <a:xfrm>
-            <a:off x="914400" y="4872632"/>
-            <a:ext cx="9144000" cy="1000125"/>
-          </a:xfrm>
-          <a:prstGeom prst="rect">
-            <a:avLst/>
-          </a:prstGeom>
-          <a:noFill/>
-        </p:spPr>
-        <p:txBody>
-          <a:bodyPr wrap="none" lIns="0" rIns="0" tIns="0" bIns="0" anchor="t"/>
-          <a:lstStyle/>
-          <a:p>
-            <a:pPr algn="l">
-              <a:lnSpc>
-                <a:spcPts val="3937"/>
-              </a:lnSpc>
-            </a:pPr>
-            <a:r>
-              <a:rPr b="0" sz="3150" spc="-16">
-                <a:solidFill>
-                  <a:srgbClr val="6A6965"/>
-                </a:solidFill>
-                <a:latin typeface="Gilroy Medium"/>
-                <a:ea typeface="Gilroy Medium"/>
-                <a:cs typeface="Gilroy Medium"/>
-              </a:rPr>
-              <a:t>Подзаголовок в одну-две строки,</a:t>
-            </a:r>
-            <a:br/>
-            <a:r>
-              <a:rPr b="0" sz="3150" spc="-16">
-                <a:solidFill>
-                  <a:srgbClr val="6A6965"/>
-                </a:solidFill>
-                <a:latin typeface="Gilroy Medium"/>
-                <a:ea typeface="Gilroy Medium"/>
-                <a:cs typeface="Gilroy Medium"/>
-              </a:rPr>
-              <a:t>поясняет суть предложения</a:t>
-            </a:r>
-          </a:p>
-        </p:txBody>
-      </p:sp>
-    </p:spTree>
-  </p:cSld>
-  <p:clrMapOvr>
-    <a:masterClrMapping/>
-  </p:clrMapOvr>
-</p:sld>
-</file>
-
-<file path=ppt/slides/slide9.xml><?xml version="1.0" encoding="utf-8"?>
-<p:sld xmlns:a="http://schemas.openxmlformats.org/drawingml/2006/main" xmlns:p="http://schemas.openxmlformats.org/presentationml/2006/main" xmlns:r="http://schemas.openxmlformats.org/officeDocument/2006/relationships">
-  <p:cSld name="V09-case">
-    <p:spTree>
-      <p:nvGrpSpPr>
-        <p:cNvPr id="1" name=""/>
-        <p:cNvGrpSpPr/>
-        <p:nvPr/>
-      </p:nvGrpSpPr>
-      <p:grpSpPr/>
-      <p:sp>
-        <p:nvSpPr>
-          <p:cNvPr id="2" name="Picture Placeholder 1"/>
-          <p:cNvSpPr>
-            <a:spLocks noGrp="1"/>
-          </p:cNvSpPr>
-          <p:nvPr>
-            <p:ph type="pic" idx="10"/>
-          </p:nvPr>
-        </p:nvSpPr>
-        <p:spPr/>
-      </p:sp>
-      <p:sp>
-        <p:nvSpPr>
-          <p:cNvPr id="3" name="Picture Placeholder 2"/>
-          <p:cNvSpPr>
-            <a:spLocks noGrp="1"/>
-          </p:cNvSpPr>
-          <p:nvPr>
-            <p:ph type="pic" idx="11"/>
-          </p:nvPr>
-        </p:nvSpPr>
-        <p:spPr/>
-      </p:sp>
-      <p:pic>
-        <p:nvPicPr>
-          <p:cNvPr id="4" name="Фон (картинка, без текста)" descr="V05-list-bg.png"/>
-          <p:cNvPicPr>
-            <a:picLocks noChangeAspect="1"/>
-          </p:cNvPicPr>
-          <p:nvPr/>
-        </p:nvPicPr>
-        <p:blipFill>
-          <a:blip r:embed="rId2"/>
-          <a:stretch>
-            <a:fillRect/>
-          </a:stretch>
-        </p:blipFill>
-        <p:spPr>
-          <a:xfrm>
-            <a:off x="0" y="0"/>
-            <a:ext cx="10287000" cy="10287000"/>
-          </a:xfrm>
-          <a:prstGeom prst="rect">
-            <a:avLst/>
-          </a:prstGeom>
-        </p:spPr>
-      </p:pic>
-      <p:pic>
-        <p:nvPicPr>
-          <p:cNvPr id="5" name="Логотип" descr="logo-full.png"/>
-          <p:cNvPicPr>
-            <a:picLocks noChangeAspect="1"/>
-          </p:cNvPicPr>
-          <p:nvPr/>
-        </p:nvPicPr>
-        <p:blipFill>
-          <a:blip r:embed="rId3"/>
-          <a:stretch>
-            <a:fillRect/>
-          </a:stretch>
-        </p:blipFill>
-        <p:spPr>
-          <a:xfrm>
-            <a:off x="914400" y="914400"/>
-            <a:ext cx="1905000" cy="1162942"/>
-          </a:xfrm>
-          <a:prstGeom prst="rect">
-            <a:avLst/>
-          </a:prstGeom>
-        </p:spPr>
-      </p:pic>
-      <p:pic>
-        <p:nvPicPr>
-          <p:cNvPr id="6" name="Фото сотрудника, вырезка PNG (заменить: Изменить рисунок)" descr="ivlikova-olga.png"/>
-          <p:cNvPicPr>
-            <a:picLocks noChangeAspect="1"/>
-          </p:cNvPicPr>
-          <p:nvPr>
-            <p:ph type="pic" idx="10"/>
-          </p:nvPr>
-        </p:nvPicPr>
-        <p:blipFill>
-          <a:blip r:embed="rId4"/>
-          <a:stretch>
-            <a:fillRect/>
-          </a:stretch>
-        </p:blipFill>
-        <p:spPr>
-          <a:xfrm>
-            <a:off x="4327326" y="2133600"/>
-            <a:ext cx="6626423" cy="8153400"/>
-          </a:xfrm>
-          <a:prstGeom prst="rect">
-            <a:avLst/>
-          </a:prstGeom>
-        </p:spPr>
-      </p:pic>
-      <p:sp>
-        <p:nvSpPr>
-          <p:cNvPr id="7" name="Малиновая черта"/>
-          <p:cNvSpPr/>
-          <p:nvPr/>
-        </p:nvSpPr>
-        <p:spPr>
-          <a:xfrm>
-            <a:off x="914400" y="2362200"/>
-            <a:ext cx="609600" cy="38100"/>
-          </a:xfrm>
-          <a:prstGeom prst="rect">
-            <a:avLst/>
-          </a:prstGeom>
-          <a:solidFill>
-            <a:srgbClr val="D73A61"/>
-          </a:solidFill>
-          <a:ln>
-            <a:noFill/>
-          </a:ln>
-          <a:effectLst/>
-        </p:spPr>
-        <p:style>
-          <a:lnRef idx="1">
-            <a:schemeClr val="accent1"/>
-          </a:lnRef>
-          <a:fillRef idx="3">
-            <a:schemeClr val="accent1"/>
-          </a:fillRef>
-          <a:effectRef idx="2">
-            <a:schemeClr val="accent1"/>
-          </a:effectRef>
-          <a:fontRef idx="minor">
-            <a:schemeClr val="lt1"/>
-          </a:fontRef>
-        </p:style>
-        <p:txBody>
-          <a:bodyPr rtlCol="0" anchor="ctr"/>
-          <a:lstStyle/>
-          <a:p>
-            <a:pPr algn="ctr"/>
-          </a:p>
-        </p:txBody>
-      </p:sp>
-      <p:sp>
-        <p:nvSpPr>
-          <p:cNvPr id="8" name="Текст 1"/>
-          <p:cNvSpPr txBox="1"/>
-          <p:nvPr/>
-        </p:nvSpPr>
-        <p:spPr>
-          <a:xfrm>
-            <a:off x="914400" y="2684145"/>
-            <a:ext cx="9144000" cy="251460"/>
-          </a:xfrm>
-          <a:prstGeom prst="rect">
-            <a:avLst/>
-          </a:prstGeom>
-          <a:noFill/>
-        </p:spPr>
-        <p:txBody>
-          <a:bodyPr wrap="none" lIns="0" rIns="0" tIns="0" bIns="0" anchor="t"/>
-          <a:lstStyle/>
-          <a:p>
-            <a:pPr algn="l">
-              <a:lnSpc>
-                <a:spcPts val="1979"/>
-              </a:lnSpc>
-            </a:pPr>
-            <a:r>
-              <a:rPr b="0" sz="1650" spc="231" cap="all">
-                <a:solidFill>
-                  <a:srgbClr val="6A6965"/>
-                </a:solidFill>
-                <a:latin typeface="Gilroy Medium"/>
-                <a:ea typeface="Gilroy Medium"/>
-                <a:cs typeface="Gilroy Medium"/>
-              </a:rPr>
-              <a:t>Рубрика</a:t>
-            </a:r>
-          </a:p>
-        </p:txBody>
-      </p:sp>
-      <p:sp>
-        <p:nvSpPr>
-          <p:cNvPr id="9" name="Текст 2"/>
-          <p:cNvSpPr txBox="1"/>
-          <p:nvPr/>
-        </p:nvSpPr>
-        <p:spPr>
-          <a:xfrm>
-            <a:off x="914400" y="3203829"/>
-            <a:ext cx="9144000" cy="2258568"/>
-          </a:xfrm>
-          <a:prstGeom prst="rect">
-            <a:avLst/>
-          </a:prstGeom>
-          <a:noFill/>
-        </p:spPr>
-        <p:txBody>
-          <a:bodyPr wrap="none" lIns="0" rIns="0" tIns="0" bIns="0" anchor="t"/>
-          <a:lstStyle/>
-          <a:p>
-            <a:pPr algn="l">
-              <a:lnSpc>
-                <a:spcPts val="4446"/>
-              </a:lnSpc>
-            </a:pPr>
-            <a:r>
-              <a:rPr b="0" sz="3900" spc="-78">
-                <a:solidFill>
-                  <a:srgbClr val="1C1A17"/>
-                </a:solidFill>
-                <a:latin typeface="Gilroy SemiBold"/>
-                <a:ea typeface="Gilroy SemiBold"/>
-                <a:cs typeface="Gilroy SemiBold"/>
-              </a:rPr>
-              <a:t>Здесь результат</a:t>
-            </a:r>
-            <a:br/>
-            <a:r>
-              <a:rPr b="0" sz="3900" spc="-78">
-                <a:solidFill>
-                  <a:srgbClr val="1C1A17"/>
-                </a:solidFill>
-                <a:latin typeface="Gilroy SemiBold"/>
-                <a:ea typeface="Gilroy SemiBold"/>
-                <a:cs typeface="Gilroy SemiBold"/>
-              </a:rPr>
-              <a:t>для клиента:</a:t>
-            </a:r>
-            <a:br/>
-            <a:r>
-              <a:rPr b="0" sz="3900" spc="-78">
-                <a:solidFill>
-                  <a:srgbClr val="D73A61"/>
-                </a:solidFill>
-                <a:latin typeface="Gilroy SemiBold"/>
-                <a:ea typeface="Gilroy SemiBold"/>
-                <a:cs typeface="Gilroy SemiBold"/>
-              </a:rPr>
-              <a:t>сумма</a:t>
-            </a:r>
-            <a:r>
-              <a:rPr b="0" sz="3900" spc="-78">
-                <a:solidFill>
-                  <a:srgbClr val="1C1A17"/>
-                </a:solidFill>
-                <a:latin typeface="Gilroy SemiBold"/>
-                <a:ea typeface="Gilroy SemiBold"/>
-                <a:cs typeface="Gilroy SemiBold"/>
-              </a:rPr>
-              <a:t> или цель</a:t>
-            </a:r>
-            <a:br/>
-            <a:r>
-              <a:rPr b="0" sz="3900" spc="-78">
-                <a:solidFill>
-                  <a:srgbClr val="1C1A17"/>
-                </a:solidFill>
-                <a:latin typeface="Gilroy SemiBold"/>
-                <a:ea typeface="Gilroy SemiBold"/>
-                <a:cs typeface="Gilroy SemiBold"/>
-              </a:rPr>
-              <a:t>в одну строку</a:t>
-            </a:r>
-          </a:p>
-        </p:txBody>
-      </p:sp>
-      <p:sp>
-        <p:nvSpPr>
-          <p:cNvPr id="10" name="Текст 3"/>
-          <p:cNvSpPr txBox="1"/>
-          <p:nvPr/>
-        </p:nvSpPr>
-        <p:spPr>
-          <a:xfrm>
-            <a:off x="914400" y="8397240"/>
-            <a:ext cx="9144000" cy="502920"/>
-          </a:xfrm>
-          <a:prstGeom prst="rect">
-            <a:avLst/>
-          </a:prstGeom>
-          <a:noFill/>
-        </p:spPr>
-        <p:txBody>
-          <a:bodyPr wrap="none" lIns="0" rIns="0" tIns="0" bIns="0" anchor="t"/>
-          <a:lstStyle/>
-          <a:p>
-            <a:pPr algn="l">
-              <a:lnSpc>
-                <a:spcPts val="3959"/>
-              </a:lnSpc>
-            </a:pPr>
-            <a:r>
-              <a:rPr b="0" sz="3300" spc="-33">
-                <a:solidFill>
-                  <a:srgbClr val="1C1A17"/>
-                </a:solidFill>
-                <a:latin typeface="Gilroy SemiBold"/>
-                <a:ea typeface="Gilroy SemiBold"/>
-                <a:cs typeface="Gilroy SemiBold"/>
-              </a:rPr>
-              <a:t>Имя Фамилия</a:t>
-            </a:r>
-          </a:p>
-        </p:txBody>
-      </p:sp>
-      <p:sp>
-        <p:nvSpPr>
-          <p:cNvPr id="11" name="Текст 4"/>
-          <p:cNvSpPr txBox="1"/>
-          <p:nvPr/>
-        </p:nvSpPr>
-        <p:spPr>
-          <a:xfrm>
-            <a:off x="914400" y="8996362"/>
-            <a:ext cx="9144000" cy="371475"/>
-          </a:xfrm>
-          <a:prstGeom prst="rect">
-            <a:avLst/>
-          </a:prstGeom>
-          <a:noFill/>
-        </p:spPr>
-        <p:txBody>
-          <a:bodyPr wrap="none" lIns="0" rIns="0" tIns="0" bIns="0" anchor="t"/>
-          <a:lstStyle/>
-          <a:p>
-            <a:pPr algn="l">
-              <a:lnSpc>
-                <a:spcPts val="2925"/>
-              </a:lnSpc>
-            </a:pPr>
-            <a:r>
-              <a:rPr b="0" sz="2250">
-                <a:solidFill>
-                  <a:srgbClr val="6A6965"/>
-                </a:solidFill>
-                <a:latin typeface="Gilroy"/>
-                <a:ea typeface="Gilroy"/>
-                <a:cs typeface="Gilroy"/>
-              </a:rPr>
-              <a:t>Должность сотрудника</a:t>
-            </a:r>
+              <a:t>на любое</a:t>
+            </a:r>
+            <a:endParaRPr sz="4500" b="0" spc="-90" dirty="0">
+              <a:solidFill>
+                <a:srgbClr val="D73A61"/>
+              </a:solidFill>
+              <a:latin typeface="Gilroy SemiBold"/>
+              <a:ea typeface="Gilroy SemiBold"/>
+              <a:cs typeface="Gilroy SemiBold"/>
+            </a:endParaRPr>
           </a:p>
         </p:txBody>
       </p:sp>
@@ -9718,9 +8784,9 @@
 </file>
 
 <file path=ppt/theme/theme2.xml><?xml version="1.0" encoding="utf-8"?>
-<a:theme xmlns:a="http://schemas.openxmlformats.org/drawingml/2006/main" name="Office Theme">
+<a:theme xmlns:a="http://schemas.openxmlformats.org/drawingml/2006/main" name="Тема Office">
   <a:themeElements>
-    <a:clrScheme name="Office">
+    <a:clrScheme name="Стандартная">
       <a:dk1>
         <a:sysClr val="windowText" lastClr="000000"/>
       </a:dk1>
@@ -9758,7 +8824,7 @@
         <a:srgbClr val="800080"/>
       </a:folHlink>
     </a:clrScheme>
-    <a:fontScheme name="Office">
+    <a:fontScheme name="Стандартная">
       <a:majorFont>
         <a:latin typeface="Calibri"/>
         <a:ea typeface=""/>
@@ -9830,7 +8896,7 @@
         <a:font script="Geor" typeface="Sylfaen"/>
       </a:minorFont>
     </a:fontScheme>
-    <a:fmtScheme name="Office">
+    <a:fmtScheme name="Стандартная">
       <a:fillStyleLst>
         <a:solidFill>
           <a:schemeClr val="phClr"/>
@@ -9862,16 +8928,20 @@
           <a:gsLst>
             <a:gs pos="0">
               <a:schemeClr val="phClr">
-                <a:tint val="100000"/>
-                <a:shade val="100000"/>
+                <a:shade val="51000"/>
+                <a:satMod val="130000"/>
+              </a:schemeClr>
+            </a:gs>
+            <a:gs pos="80000">
+              <a:schemeClr val="phClr">
+                <a:shade val="93000"/>
                 <a:satMod val="130000"/>
               </a:schemeClr>
             </a:gs>
             <a:gs pos="100000">
               <a:schemeClr val="phClr">
-                <a:tint val="50000"/>
-                <a:shade val="100000"/>
-                <a:satMod val="350000"/>
+                <a:shade val="94000"/>
+                <a:satMod val="135000"/>
               </a:schemeClr>
             </a:gs>
           </a:gsLst>
@@ -9993,46 +9063,7 @@
       </a:bgFillStyleLst>
     </a:fmtScheme>
   </a:themeElements>
-  <a:objectDefaults>
-    <a:spDef>
-      <a:spPr/>
-      <a:bodyPr/>
-      <a:lstStyle/>
-      <a:style>
-        <a:lnRef idx="1">
-          <a:schemeClr val="accent1"/>
-        </a:lnRef>
-        <a:fillRef idx="3">
-          <a:schemeClr val="accent1"/>
-        </a:fillRef>
-        <a:effectRef idx="2">
-          <a:schemeClr val="accent1"/>
-        </a:effectRef>
-        <a:fontRef idx="minor">
-          <a:schemeClr val="lt1"/>
-        </a:fontRef>
-      </a:style>
-    </a:spDef>
-    <a:lnDef>
-      <a:spPr/>
-      <a:bodyPr/>
-      <a:lstStyle/>
-      <a:style>
-        <a:lnRef idx="2">
-          <a:schemeClr val="accent1"/>
-        </a:lnRef>
-        <a:fillRef idx="0">
-          <a:schemeClr val="accent1"/>
-        </a:fillRef>
-        <a:effectRef idx="1">
-          <a:schemeClr val="accent1"/>
-        </a:effectRef>
-        <a:fontRef idx="minor">
-          <a:schemeClr val="tx1"/>
-        </a:fontRef>
-      </a:style>
-    </a:lnDef>
-  </a:objectDefaults>
+  <a:objectDefaults/>
   <a:extraClrSchemeLst/>
 </a:theme>
 </file>